--- a/final_project/sleep_disorder_presentation.pptx
+++ b/final_project/sleep_disorder_presentation.pptx
@@ -5,7 +5,7 @@
     <p:sldMasterId id="2147483648" r:id="rId1"/>
   </p:sldMasterIdLst>
   <p:notesMasterIdLst>
-    <p:notesMasterId r:id="rId12"/>
+    <p:notesMasterId r:id="rId16"/>
   </p:notesMasterIdLst>
   <p:sldIdLst>
     <p:sldId id="256" r:id="rId3"/>
@@ -17,6 +17,10 @@
     <p:sldId id="262" r:id="rId9"/>
     <p:sldId id="263" r:id="rId10"/>
     <p:sldId id="264" r:id="rId11"/>
+    <p:sldId id="265" r:id="rId12"/>
+    <p:sldId id="266" r:id="rId13"/>
+    <p:sldId id="267" r:id="rId14"/>
+    <p:sldId id="268" r:id="rId15"/>
   </p:sldIdLst>
   <p:sldSz cx="9144000" cy="5143500"/>
   <p:notesSz cx="5143500" cy="9144000"/>
@@ -139,7 +143,7 @@
       </p:grpSpPr>
       <p:sp>
         <p:nvSpPr>
-          <p:cNvPr id="1719933614" name="Header Placeholder 1"/>
+          <p:cNvPr id="1284827722" name="Header Placeholder 1"/>
           <p:cNvSpPr>
             <a:spLocks noGrp="1"/>
           </p:cNvSpPr>
@@ -173,7 +177,7 @@
       </p:sp>
       <p:sp>
         <p:nvSpPr>
-          <p:cNvPr id="986683515" name="Date Placeholder 2"/>
+          <p:cNvPr id="1671209263" name="Date Placeholder 2"/>
           <p:cNvSpPr>
             <a:spLocks noGrp="1"/>
           </p:cNvSpPr>
@@ -211,7 +215,7 @@
       </p:sp>
       <p:sp>
         <p:nvSpPr>
-          <p:cNvPr id="331739220" name="Slide Image Placeholder 3"/>
+          <p:cNvPr id="1144367364" name="Slide Image Placeholder 3"/>
           <p:cNvSpPr>
             <a:spLocks noChangeAspect="1" noGrp="1" noRot="1"/>
           </p:cNvSpPr>
@@ -247,7 +251,7 @@
       </p:sp>
       <p:sp>
         <p:nvSpPr>
-          <p:cNvPr id="1673439975" name="Notes Placeholder 4"/>
+          <p:cNvPr id="1476118480" name="Notes Placeholder 4"/>
           <p:cNvSpPr>
             <a:spLocks noGrp="1"/>
           </p:cNvSpPr>
@@ -321,7 +325,7 @@
       </p:sp>
       <p:sp>
         <p:nvSpPr>
-          <p:cNvPr id="1349626266" name="Footer Placeholder 5"/>
+          <p:cNvPr id="172073172" name="Footer Placeholder 5"/>
           <p:cNvSpPr>
             <a:spLocks noGrp="1"/>
           </p:cNvSpPr>
@@ -355,7 +359,7 @@
       </p:sp>
       <p:sp>
         <p:nvSpPr>
-          <p:cNvPr id="1002971190" name="Slide Number Placeholder 6"/>
+          <p:cNvPr id="626112319" name="Slide Number Placeholder 6"/>
           <p:cNvSpPr>
             <a:spLocks noGrp="1"/>
           </p:cNvSpPr>
@@ -508,7 +512,7 @@
       </p:grpSpPr>
       <p:sp>
         <p:nvSpPr>
-          <p:cNvPr id="386361347" name="Slide Image Placeholder 1"/>
+          <p:cNvPr id="828166725" name="Slide Image Placeholder 1"/>
           <p:cNvSpPr>
             <a:spLocks noChangeAspect="1" noGrp="1" noRot="1"/>
           </p:cNvSpPr>
@@ -520,7 +524,7 @@
       </p:sp>
       <p:sp>
         <p:nvSpPr>
-          <p:cNvPr id="549091855" name="Notes Placeholder 2"/>
+          <p:cNvPr id="1526550393" name="Notes Placeholder 2"/>
           <p:cNvSpPr>
             <a:spLocks noGrp="1"/>
           </p:cNvSpPr>
@@ -542,7 +546,7 @@
       </p:sp>
       <p:sp>
         <p:nvSpPr>
-          <p:cNvPr id="1491136338" name="Slide Number Placeholder 3"/>
+          <p:cNvPr id="180767988" name="Slide Number Placeholder 3"/>
           <p:cNvSpPr>
             <a:spLocks noGrp="1"/>
           </p:cNvSpPr>
@@ -561,6 +565,346 @@
             <a:fld id="{F7021451-1387-4CA6-816F-3879F97B5CBC}" type="slidenum">
               <a:rPr lang="en-US"/>
               <a:t>1</a:t>
+            </a:fld>
+            <a:endParaRPr lang="en-US"/>
+          </a:p>
+        </p:txBody>
+      </p:sp>
+    </p:spTree>
+  </p:cSld>
+  <p:clrMapOvr>
+    <a:masterClrMapping/>
+  </p:clrMapOvr>
+</p:notes>
+</file>
+
+<file path=ppt/notesSlides/notesSlide10.xml><?xml version="1.0" encoding="utf-8"?>
+<p:notes xmlns:a="http://schemas.openxmlformats.org/drawingml/2006/main" xmlns:r="http://schemas.openxmlformats.org/officeDocument/2006/relationships" xmlns:p="http://schemas.openxmlformats.org/presentationml/2006/main" xmlns:m="http://schemas.openxmlformats.org/officeDocument/2006/math" xmlns:w="http://schemas.openxmlformats.org/wordprocessingml/2006/main">
+  <p:cSld name="">
+    <p:spTree>
+      <p:nvGrpSpPr>
+        <p:cNvPr id="1" name=""/>
+        <p:cNvGrpSpPr/>
+        <p:nvPr/>
+      </p:nvGrpSpPr>
+      <p:grpSpPr bwMode="auto">
+        <a:xfrm>
+          <a:off x="0" y="0"/>
+          <a:ext cx="0" cy="0"/>
+          <a:chOff x="0" y="0"/>
+          <a:chExt cx="0" cy="0"/>
+        </a:xfrm>
+      </p:grpSpPr>
+      <p:sp>
+        <p:nvSpPr>
+          <p:cNvPr id="89805101" name="Slide Image Placeholder 1"/>
+          <p:cNvSpPr>
+            <a:spLocks noChangeAspect="1" noGrp="1" noRot="1"/>
+          </p:cNvSpPr>
+          <p:nvPr>
+            <p:ph type="sldImg"/>
+          </p:nvPr>
+        </p:nvSpPr>
+        <p:spPr bwMode="auto"/>
+      </p:sp>
+      <p:sp>
+        <p:nvSpPr>
+          <p:cNvPr id="846613130" name="Notes Placeholder 2"/>
+          <p:cNvSpPr>
+            <a:spLocks noGrp="1"/>
+          </p:cNvSpPr>
+          <p:nvPr>
+            <p:ph type="body" idx="1"/>
+          </p:nvPr>
+        </p:nvSpPr>
+        <p:spPr bwMode="auto"/>
+        <p:txBody>
+          <a:bodyPr/>
+          <a:lstStyle/>
+          <a:p>
+            <a:pPr>
+              <a:defRPr/>
+            </a:pPr>
+            <a:endParaRPr lang="en-US"/>
+          </a:p>
+        </p:txBody>
+      </p:sp>
+      <p:sp>
+        <p:nvSpPr>
+          <p:cNvPr id="726571262" name="Slide Number Placeholder 3"/>
+          <p:cNvSpPr>
+            <a:spLocks noGrp="1"/>
+          </p:cNvSpPr>
+          <p:nvPr>
+            <p:ph type="sldNum" sz="quarter" idx="10"/>
+          </p:nvPr>
+        </p:nvSpPr>
+        <p:spPr bwMode="auto"/>
+        <p:txBody>
+          <a:bodyPr/>
+          <a:lstStyle/>
+          <a:p>
+            <a:pPr>
+              <a:defRPr/>
+            </a:pPr>
+            <a:fld id="{26E93FD2-D2D3-2814-6E53-A78943F0A5B2}" type="slidenum">
+              <a:rPr lang="en-US"/>
+              <a:t/>
+            </a:fld>
+            <a:endParaRPr lang="en-US"/>
+          </a:p>
+        </p:txBody>
+      </p:sp>
+    </p:spTree>
+  </p:cSld>
+  <p:clrMapOvr>
+    <a:masterClrMapping/>
+  </p:clrMapOvr>
+</p:notes>
+</file>
+
+<file path=ppt/notesSlides/notesSlide11.xml><?xml version="1.0" encoding="utf-8"?>
+<p:notes xmlns:a="http://schemas.openxmlformats.org/drawingml/2006/main" xmlns:r="http://schemas.openxmlformats.org/officeDocument/2006/relationships" xmlns:p="http://schemas.openxmlformats.org/presentationml/2006/main" xmlns:m="http://schemas.openxmlformats.org/officeDocument/2006/math" xmlns:w="http://schemas.openxmlformats.org/wordprocessingml/2006/main">
+  <p:cSld name="">
+    <p:spTree>
+      <p:nvGrpSpPr>
+        <p:cNvPr id="1" name=""/>
+        <p:cNvGrpSpPr/>
+        <p:nvPr/>
+      </p:nvGrpSpPr>
+      <p:grpSpPr bwMode="auto">
+        <a:xfrm>
+          <a:off x="0" y="0"/>
+          <a:ext cx="0" cy="0"/>
+          <a:chOff x="0" y="0"/>
+          <a:chExt cx="0" cy="0"/>
+        </a:xfrm>
+      </p:grpSpPr>
+      <p:sp>
+        <p:nvSpPr>
+          <p:cNvPr id="1859651725" name="Slide Image Placeholder 1"/>
+          <p:cNvSpPr>
+            <a:spLocks noChangeAspect="1" noGrp="1" noRot="1"/>
+          </p:cNvSpPr>
+          <p:nvPr>
+            <p:ph type="sldImg"/>
+          </p:nvPr>
+        </p:nvSpPr>
+        <p:spPr bwMode="auto"/>
+      </p:sp>
+      <p:sp>
+        <p:nvSpPr>
+          <p:cNvPr id="898902293" name="Notes Placeholder 2"/>
+          <p:cNvSpPr>
+            <a:spLocks noGrp="1"/>
+          </p:cNvSpPr>
+          <p:nvPr>
+            <p:ph type="body" idx="1"/>
+          </p:nvPr>
+        </p:nvSpPr>
+        <p:spPr bwMode="auto"/>
+        <p:txBody>
+          <a:bodyPr/>
+          <a:lstStyle/>
+          <a:p>
+            <a:pPr>
+              <a:defRPr/>
+            </a:pPr>
+            <a:endParaRPr lang="en-US"/>
+          </a:p>
+        </p:txBody>
+      </p:sp>
+      <p:sp>
+        <p:nvSpPr>
+          <p:cNvPr id="616960668" name="Slide Number Placeholder 3"/>
+          <p:cNvSpPr>
+            <a:spLocks noGrp="1"/>
+          </p:cNvSpPr>
+          <p:nvPr>
+            <p:ph type="sldNum" sz="quarter" idx="10"/>
+          </p:nvPr>
+        </p:nvSpPr>
+        <p:spPr bwMode="auto"/>
+        <p:txBody>
+          <a:bodyPr/>
+          <a:lstStyle/>
+          <a:p>
+            <a:pPr>
+              <a:defRPr/>
+            </a:pPr>
+            <a:fld id="{F7021451-1387-4CA6-816F-3879F97B5CBC}" type="slidenum">
+              <a:rPr lang="en-US"/>
+              <a:t>7</a:t>
+            </a:fld>
+            <a:endParaRPr lang="en-US"/>
+          </a:p>
+        </p:txBody>
+      </p:sp>
+    </p:spTree>
+  </p:cSld>
+  <p:clrMapOvr>
+    <a:masterClrMapping/>
+  </p:clrMapOvr>
+</p:notes>
+</file>
+
+<file path=ppt/notesSlides/notesSlide12.xml><?xml version="1.0" encoding="utf-8"?>
+<p:notes xmlns:a="http://schemas.openxmlformats.org/drawingml/2006/main" xmlns:r="http://schemas.openxmlformats.org/officeDocument/2006/relationships" xmlns:p="http://schemas.openxmlformats.org/presentationml/2006/main" xmlns:m="http://schemas.openxmlformats.org/officeDocument/2006/math" xmlns:w="http://schemas.openxmlformats.org/wordprocessingml/2006/main">
+  <p:cSld name="">
+    <p:spTree>
+      <p:nvGrpSpPr>
+        <p:cNvPr id="1" name=""/>
+        <p:cNvGrpSpPr/>
+        <p:nvPr/>
+      </p:nvGrpSpPr>
+      <p:grpSpPr bwMode="auto">
+        <a:xfrm>
+          <a:off x="0" y="0"/>
+          <a:ext cx="0" cy="0"/>
+          <a:chOff x="0" y="0"/>
+          <a:chExt cx="0" cy="0"/>
+        </a:xfrm>
+      </p:grpSpPr>
+      <p:sp>
+        <p:nvSpPr>
+          <p:cNvPr id="1527940236" name="Slide Image Placeholder 1"/>
+          <p:cNvSpPr>
+            <a:spLocks noChangeAspect="1" noGrp="1" noRot="1"/>
+          </p:cNvSpPr>
+          <p:nvPr>
+            <p:ph type="sldImg"/>
+          </p:nvPr>
+        </p:nvSpPr>
+        <p:spPr bwMode="auto"/>
+      </p:sp>
+      <p:sp>
+        <p:nvSpPr>
+          <p:cNvPr id="1998637770" name="Notes Placeholder 2"/>
+          <p:cNvSpPr>
+            <a:spLocks noGrp="1"/>
+          </p:cNvSpPr>
+          <p:nvPr>
+            <p:ph type="body" idx="1"/>
+          </p:nvPr>
+        </p:nvSpPr>
+        <p:spPr bwMode="auto"/>
+        <p:txBody>
+          <a:bodyPr/>
+          <a:lstStyle/>
+          <a:p>
+            <a:pPr>
+              <a:defRPr/>
+            </a:pPr>
+            <a:endParaRPr lang="en-US"/>
+          </a:p>
+        </p:txBody>
+      </p:sp>
+      <p:sp>
+        <p:nvSpPr>
+          <p:cNvPr id="1251962984" name="Slide Number Placeholder 3"/>
+          <p:cNvSpPr>
+            <a:spLocks noGrp="1"/>
+          </p:cNvSpPr>
+          <p:nvPr>
+            <p:ph type="sldNum" sz="quarter" idx="10"/>
+          </p:nvPr>
+        </p:nvSpPr>
+        <p:spPr bwMode="auto"/>
+        <p:txBody>
+          <a:bodyPr/>
+          <a:lstStyle/>
+          <a:p>
+            <a:pPr>
+              <a:defRPr/>
+            </a:pPr>
+            <a:fld id="{F7021451-1387-4CA6-816F-3879F97B5CBC}" type="slidenum">
+              <a:rPr lang="en-US"/>
+              <a:t>8</a:t>
+            </a:fld>
+            <a:endParaRPr lang="en-US"/>
+          </a:p>
+        </p:txBody>
+      </p:sp>
+    </p:spTree>
+  </p:cSld>
+  <p:clrMapOvr>
+    <a:masterClrMapping/>
+  </p:clrMapOvr>
+</p:notes>
+</file>
+
+<file path=ppt/notesSlides/notesSlide13.xml><?xml version="1.0" encoding="utf-8"?>
+<p:notes xmlns:a="http://schemas.openxmlformats.org/drawingml/2006/main" xmlns:r="http://schemas.openxmlformats.org/officeDocument/2006/relationships" xmlns:p="http://schemas.openxmlformats.org/presentationml/2006/main" xmlns:m="http://schemas.openxmlformats.org/officeDocument/2006/math" xmlns:w="http://schemas.openxmlformats.org/wordprocessingml/2006/main">
+  <p:cSld name="">
+    <p:spTree>
+      <p:nvGrpSpPr>
+        <p:cNvPr id="1" name=""/>
+        <p:cNvGrpSpPr/>
+        <p:nvPr/>
+      </p:nvGrpSpPr>
+      <p:grpSpPr bwMode="auto">
+        <a:xfrm>
+          <a:off x="0" y="0"/>
+          <a:ext cx="0" cy="0"/>
+          <a:chOff x="0" y="0"/>
+          <a:chExt cx="0" cy="0"/>
+        </a:xfrm>
+      </p:grpSpPr>
+      <p:sp>
+        <p:nvSpPr>
+          <p:cNvPr id="629933442" name="Slide Image Placeholder 1"/>
+          <p:cNvSpPr>
+            <a:spLocks noChangeAspect="1" noGrp="1" noRot="1"/>
+          </p:cNvSpPr>
+          <p:nvPr>
+            <p:ph type="sldImg"/>
+          </p:nvPr>
+        </p:nvSpPr>
+        <p:spPr bwMode="auto"/>
+      </p:sp>
+      <p:sp>
+        <p:nvSpPr>
+          <p:cNvPr id="1571686127" name="Notes Placeholder 2"/>
+          <p:cNvSpPr>
+            <a:spLocks noGrp="1"/>
+          </p:cNvSpPr>
+          <p:nvPr>
+            <p:ph type="body" idx="1"/>
+          </p:nvPr>
+        </p:nvSpPr>
+        <p:spPr bwMode="auto"/>
+        <p:txBody>
+          <a:bodyPr/>
+          <a:lstStyle/>
+          <a:p>
+            <a:pPr>
+              <a:defRPr/>
+            </a:pPr>
+            <a:endParaRPr lang="en-US"/>
+          </a:p>
+        </p:txBody>
+      </p:sp>
+      <p:sp>
+        <p:nvSpPr>
+          <p:cNvPr id="758125043" name="Slide Number Placeholder 3"/>
+          <p:cNvSpPr>
+            <a:spLocks noGrp="1"/>
+          </p:cNvSpPr>
+          <p:nvPr>
+            <p:ph type="sldNum" sz="quarter" idx="10"/>
+          </p:nvPr>
+        </p:nvSpPr>
+        <p:spPr bwMode="auto"/>
+        <p:txBody>
+          <a:bodyPr/>
+          <a:lstStyle/>
+          <a:p>
+            <a:pPr>
+              <a:defRPr/>
+            </a:pPr>
+            <a:fld id="{F7021451-1387-4CA6-816F-3879F97B5CBC}" type="slidenum">
+              <a:rPr lang="en-US"/>
+              <a:t>9</a:t>
             </a:fld>
             <a:endParaRPr lang="en-US"/>
           </a:p>
@@ -593,7 +937,7 @@
       </p:grpSpPr>
       <p:sp>
         <p:nvSpPr>
-          <p:cNvPr id="83391201" name="Slide Image Placeholder 1"/>
+          <p:cNvPr id="1104626777" name="Slide Image Placeholder 1"/>
           <p:cNvSpPr>
             <a:spLocks noChangeAspect="1" noGrp="1" noRot="1"/>
           </p:cNvSpPr>
@@ -605,7 +949,7 @@
       </p:sp>
       <p:sp>
         <p:nvSpPr>
-          <p:cNvPr id="306986331" name="Notes Placeholder 2"/>
+          <p:cNvPr id="1994081918" name="Notes Placeholder 2"/>
           <p:cNvSpPr>
             <a:spLocks noGrp="1"/>
           </p:cNvSpPr>
@@ -627,7 +971,7 @@
       </p:sp>
       <p:sp>
         <p:nvSpPr>
-          <p:cNvPr id="2141134110" name="Slide Number Placeholder 3"/>
+          <p:cNvPr id="870263198" name="Slide Number Placeholder 3"/>
           <p:cNvSpPr>
             <a:spLocks noGrp="1"/>
           </p:cNvSpPr>
@@ -678,7 +1022,7 @@
       </p:grpSpPr>
       <p:sp>
         <p:nvSpPr>
-          <p:cNvPr id="2019821596" name="Slide Image Placeholder 1"/>
+          <p:cNvPr id="629476749" name="Slide Image Placeholder 1"/>
           <p:cNvSpPr>
             <a:spLocks noChangeAspect="1" noGrp="1" noRot="1"/>
           </p:cNvSpPr>
@@ -690,7 +1034,7 @@
       </p:sp>
       <p:sp>
         <p:nvSpPr>
-          <p:cNvPr id="2092029940" name="Notes Placeholder 2"/>
+          <p:cNvPr id="1438756168" name="Notes Placeholder 2"/>
           <p:cNvSpPr>
             <a:spLocks noGrp="1"/>
           </p:cNvSpPr>
@@ -712,7 +1056,7 @@
       </p:sp>
       <p:sp>
         <p:nvSpPr>
-          <p:cNvPr id="1007586198" name="Slide Number Placeholder 3"/>
+          <p:cNvPr id="1037547608" name="Slide Number Placeholder 3"/>
           <p:cNvSpPr>
             <a:spLocks noGrp="1"/>
           </p:cNvSpPr>
@@ -763,7 +1107,7 @@
       </p:grpSpPr>
       <p:sp>
         <p:nvSpPr>
-          <p:cNvPr id="1822140322" name="Slide Image Placeholder 1"/>
+          <p:cNvPr id="290017443" name="Slide Image Placeholder 1"/>
           <p:cNvSpPr>
             <a:spLocks noChangeAspect="1" noGrp="1" noRot="1"/>
           </p:cNvSpPr>
@@ -775,7 +1119,7 @@
       </p:sp>
       <p:sp>
         <p:nvSpPr>
-          <p:cNvPr id="88920583" name="Notes Placeholder 2"/>
+          <p:cNvPr id="1610387168" name="Notes Placeholder 2"/>
           <p:cNvSpPr>
             <a:spLocks noGrp="1"/>
           </p:cNvSpPr>
@@ -797,7 +1141,7 @@
       </p:sp>
       <p:sp>
         <p:nvSpPr>
-          <p:cNvPr id="853037176" name="Slide Number Placeholder 3"/>
+          <p:cNvPr id="783073530" name="Slide Number Placeholder 3"/>
           <p:cNvSpPr>
             <a:spLocks noGrp="1"/>
           </p:cNvSpPr>
@@ -848,7 +1192,7 @@
       </p:grpSpPr>
       <p:sp>
         <p:nvSpPr>
-          <p:cNvPr id="1466256684" name="Slide Image Placeholder 1"/>
+          <p:cNvPr id="1456892892" name="Slide Image Placeholder 1"/>
           <p:cNvSpPr>
             <a:spLocks noChangeAspect="1" noGrp="1" noRot="1"/>
           </p:cNvSpPr>
@@ -860,7 +1204,7 @@
       </p:sp>
       <p:sp>
         <p:nvSpPr>
-          <p:cNvPr id="1214913374" name="Notes Placeholder 2"/>
+          <p:cNvPr id="1571368569" name="Notes Placeholder 2"/>
           <p:cNvSpPr>
             <a:spLocks noGrp="1"/>
           </p:cNvSpPr>
@@ -882,7 +1226,7 @@
       </p:sp>
       <p:sp>
         <p:nvSpPr>
-          <p:cNvPr id="522249033" name="Slide Number Placeholder 3"/>
+          <p:cNvPr id="451012672" name="Slide Number Placeholder 3"/>
           <p:cNvSpPr>
             <a:spLocks noGrp="1"/>
           </p:cNvSpPr>
@@ -933,7 +1277,7 @@
       </p:grpSpPr>
       <p:sp>
         <p:nvSpPr>
-          <p:cNvPr id="1879215185" name="Slide Image Placeholder 1"/>
+          <p:cNvPr id="1346342223" name="Slide Image Placeholder 1"/>
           <p:cNvSpPr>
             <a:spLocks noChangeAspect="1" noGrp="1" noRot="1"/>
           </p:cNvSpPr>
@@ -945,7 +1289,7 @@
       </p:sp>
       <p:sp>
         <p:nvSpPr>
-          <p:cNvPr id="1538021450" name="Notes Placeholder 2"/>
+          <p:cNvPr id="852220803" name="Notes Placeholder 2"/>
           <p:cNvSpPr>
             <a:spLocks noGrp="1"/>
           </p:cNvSpPr>
@@ -967,7 +1311,7 @@
       </p:sp>
       <p:sp>
         <p:nvSpPr>
-          <p:cNvPr id="273087936" name="Slide Number Placeholder 3"/>
+          <p:cNvPr id="81784154" name="Slide Number Placeholder 3"/>
           <p:cNvSpPr>
             <a:spLocks noGrp="1"/>
           </p:cNvSpPr>
@@ -983,9 +1327,9 @@
             <a:pPr>
               <a:defRPr/>
             </a:pPr>
-            <a:fld id="{F7021451-1387-4CA6-816F-3879F97B5CBC}" type="slidenum">
+            <a:fld id="{1530C0A6-9337-DF74-8EC5-4646A7B511D0}" type="slidenum">
               <a:rPr lang="en-US"/>
-              <a:t>6</a:t>
+              <a:t/>
             </a:fld>
             <a:endParaRPr lang="en-US"/>
           </a:p>
@@ -1018,7 +1362,7 @@
       </p:grpSpPr>
       <p:sp>
         <p:nvSpPr>
-          <p:cNvPr id="40604588" name="Slide Image Placeholder 1"/>
+          <p:cNvPr id="2064198786" name="Slide Image Placeholder 1"/>
           <p:cNvSpPr>
             <a:spLocks noChangeAspect="1" noGrp="1" noRot="1"/>
           </p:cNvSpPr>
@@ -1030,7 +1374,7 @@
       </p:sp>
       <p:sp>
         <p:nvSpPr>
-          <p:cNvPr id="184435617" name="Notes Placeholder 2"/>
+          <p:cNvPr id="1738240742" name="Notes Placeholder 2"/>
           <p:cNvSpPr>
             <a:spLocks noGrp="1"/>
           </p:cNvSpPr>
@@ -1052,7 +1396,7 @@
       </p:sp>
       <p:sp>
         <p:nvSpPr>
-          <p:cNvPr id="401318692" name="Slide Number Placeholder 3"/>
+          <p:cNvPr id="2002187863" name="Slide Number Placeholder 3"/>
           <p:cNvSpPr>
             <a:spLocks noGrp="1"/>
           </p:cNvSpPr>
@@ -1068,9 +1412,9 @@
             <a:pPr>
               <a:defRPr/>
             </a:pPr>
-            <a:fld id="{F7021451-1387-4CA6-816F-3879F97B5CBC}" type="slidenum">
+            <a:fld id="{BEF09082-146A-487B-EFA5-0510B0B7E284}" type="slidenum">
               <a:rPr lang="en-US"/>
-              <a:t>7</a:t>
+              <a:t/>
             </a:fld>
             <a:endParaRPr lang="en-US"/>
           </a:p>
@@ -1103,7 +1447,7 @@
       </p:grpSpPr>
       <p:sp>
         <p:nvSpPr>
-          <p:cNvPr id="1254382991" name="Slide Image Placeholder 1"/>
+          <p:cNvPr id="1322434507" name="Slide Image Placeholder 1"/>
           <p:cNvSpPr>
             <a:spLocks noChangeAspect="1" noGrp="1" noRot="1"/>
           </p:cNvSpPr>
@@ -1115,7 +1459,7 @@
       </p:sp>
       <p:sp>
         <p:nvSpPr>
-          <p:cNvPr id="770917805" name="Notes Placeholder 2"/>
+          <p:cNvPr id="708246228" name="Notes Placeholder 2"/>
           <p:cNvSpPr>
             <a:spLocks noGrp="1"/>
           </p:cNvSpPr>
@@ -1137,7 +1481,7 @@
       </p:sp>
       <p:sp>
         <p:nvSpPr>
-          <p:cNvPr id="1293552348" name="Slide Number Placeholder 3"/>
+          <p:cNvPr id="1684791730" name="Slide Number Placeholder 3"/>
           <p:cNvSpPr>
             <a:spLocks noGrp="1"/>
           </p:cNvSpPr>
@@ -1155,7 +1499,7 @@
             </a:pPr>
             <a:fld id="{F7021451-1387-4CA6-816F-3879F97B5CBC}" type="slidenum">
               <a:rPr lang="en-US"/>
-              <a:t>8</a:t>
+              <a:t>6</a:t>
             </a:fld>
             <a:endParaRPr lang="en-US"/>
           </a:p>
@@ -1188,7 +1532,7 @@
       </p:grpSpPr>
       <p:sp>
         <p:nvSpPr>
-          <p:cNvPr id="797429067" name="Slide Image Placeholder 1"/>
+          <p:cNvPr id="251861613" name="Slide Image Placeholder 1"/>
           <p:cNvSpPr>
             <a:spLocks noChangeAspect="1" noGrp="1" noRot="1"/>
           </p:cNvSpPr>
@@ -1200,7 +1544,7 @@
       </p:sp>
       <p:sp>
         <p:nvSpPr>
-          <p:cNvPr id="670572387" name="Notes Placeholder 2"/>
+          <p:cNvPr id="1610395315" name="Notes Placeholder 2"/>
           <p:cNvSpPr>
             <a:spLocks noGrp="1"/>
           </p:cNvSpPr>
@@ -1222,7 +1566,7 @@
       </p:sp>
       <p:sp>
         <p:nvSpPr>
-          <p:cNvPr id="172411751" name="Slide Number Placeholder 3"/>
+          <p:cNvPr id="1451852680" name="Slide Number Placeholder 3"/>
           <p:cNvSpPr>
             <a:spLocks noGrp="1"/>
           </p:cNvSpPr>
@@ -1238,9 +1582,9 @@
             <a:pPr>
               <a:defRPr/>
             </a:pPr>
-            <a:fld id="{F7021451-1387-4CA6-816F-3879F97B5CBC}" type="slidenum">
+            <a:fld id="{41B70EDE-F428-7499-7E28-754BDF4F6F38}" type="slidenum">
               <a:rPr lang="en-US"/>
-              <a:t>9</a:t>
+              <a:t/>
             </a:fld>
             <a:endParaRPr lang="en-US"/>
           </a:p>
@@ -1587,7 +1931,7 @@
       </p:grpSpPr>
       <p:sp>
         <p:nvSpPr>
-          <p:cNvPr id="816050969" name="Shape 0"/>
+          <p:cNvPr id="1480340849" name="Shape 0"/>
           <p:cNvSpPr/>
           <p:nvPr/>
         </p:nvSpPr>
@@ -1612,7 +1956,7 @@
       </p:sp>
       <p:sp>
         <p:nvSpPr>
-          <p:cNvPr id="1442248616" name="Shape 1"/>
+          <p:cNvPr id="1337374565" name="Shape 1"/>
           <p:cNvSpPr/>
           <p:nvPr/>
         </p:nvSpPr>
@@ -1641,7 +1985,7 @@
       </p:sp>
       <p:sp>
         <p:nvSpPr>
-          <p:cNvPr id="767279038" name="Shape 2"/>
+          <p:cNvPr id="318300785" name="Shape 2"/>
           <p:cNvSpPr/>
           <p:nvPr/>
         </p:nvSpPr>
@@ -1670,7 +2014,7 @@
       </p:sp>
       <p:sp>
         <p:nvSpPr>
-          <p:cNvPr id="859712071" name="Text 3"/>
+          <p:cNvPr id="1050023269" name="Text 3"/>
           <p:cNvSpPr/>
           <p:nvPr/>
         </p:nvSpPr>
@@ -1728,7 +2072,7 @@
       </p:sp>
       <p:sp>
         <p:nvSpPr>
-          <p:cNvPr id="1286995850" name="Text 4"/>
+          <p:cNvPr id="2091880931" name="Text 4"/>
           <p:cNvSpPr/>
           <p:nvPr/>
         </p:nvSpPr>
@@ -1768,7 +2112,7 @@
       </p:sp>
       <p:sp>
         <p:nvSpPr>
-          <p:cNvPr id="1132390552" name="Shape 5"/>
+          <p:cNvPr id="1433444174" name="Shape 5"/>
           <p:cNvSpPr/>
           <p:nvPr/>
         </p:nvSpPr>
@@ -1793,7 +2137,7 @@
       </p:sp>
       <p:sp>
         <p:nvSpPr>
-          <p:cNvPr id="1169507770" name="Text 6"/>
+          <p:cNvPr id="331533772" name="Text 6"/>
           <p:cNvSpPr/>
           <p:nvPr/>
         </p:nvSpPr>
@@ -1825,6 +2169,2846 @@
               <a:t>John Pierre | Final Project  |  ITAI 1371 |  May 2025</a:t>
             </a:r>
             <a:endParaRPr lang="en-US" sz="1100"/>
+          </a:p>
+        </p:txBody>
+      </p:sp>
+    </p:spTree>
+  </p:cSld>
+  <p:clrMapOvr>
+    <a:masterClrMapping/>
+  </p:clrMapOvr>
+  <mc:AlternateContent xmlns:mc="http://schemas.openxmlformats.org/markup-compatibility/2006">
+    <mc:Choice xmlns:p159="http://schemas.microsoft.com/office/powerpoint/2015/09/main" xmlns:p14="http://schemas.microsoft.com/office/powerpoint/2010/main" Requires="p159">
+      <p:transition p14:dur="2000" advClick="1"/>
+    </mc:Choice>
+    <mc:Fallback>
+      <p:transition advClick="1"/>
+    </mc:Fallback>
+  </mc:AlternateContent>
+</p:sld>
+</file>
+
+<file path=ppt/slides/slide10.xml><?xml version="1.0" encoding="utf-8"?>
+<p:sld xmlns:a="http://schemas.openxmlformats.org/drawingml/2006/main" xmlns:r="http://schemas.openxmlformats.org/officeDocument/2006/relationships" xmlns:p="http://schemas.openxmlformats.org/presentationml/2006/main" xmlns:m="http://schemas.openxmlformats.org/officeDocument/2006/math" xmlns:w="http://schemas.openxmlformats.org/wordprocessingml/2006/main" xmlns:mc="http://schemas.openxmlformats.org/markup-compatibility/2006" showMasterPhAnim="0" showMasterSp="1" show="1">
+  <p:cSld name="Slide 3">
+    <p:bg>
+      <p:bgPr shadeToTitle="0">
+        <a:solidFill>
+          <a:srgbClr val="FFFFFF"/>
+        </a:solidFill>
+      </p:bgPr>
+    </p:bg>
+    <p:spTree>
+      <p:nvGrpSpPr>
+        <p:cNvPr id="1" name=""/>
+        <p:cNvGrpSpPr/>
+        <p:nvPr/>
+      </p:nvGrpSpPr>
+      <p:grpSpPr bwMode="auto">
+        <a:xfrm>
+          <a:off x="0" y="0"/>
+          <a:ext cx="0" cy="0"/>
+          <a:chOff x="0" y="0"/>
+          <a:chExt cx="0" cy="0"/>
+        </a:xfrm>
+      </p:grpSpPr>
+      <p:sp>
+        <p:nvSpPr>
+          <p:cNvPr id="923379647" name="Shape 0"/>
+          <p:cNvSpPr/>
+          <p:nvPr/>
+        </p:nvSpPr>
+        <p:spPr bwMode="auto">
+          <a:xfrm>
+            <a:off x="0" y="0"/>
+            <a:ext cx="9144000" cy="658368"/>
+          </a:xfrm>
+          <a:prstGeom prst="rect">
+            <a:avLst/>
+          </a:prstGeom>
+          <a:solidFill>
+            <a:srgbClr val="0D1B2A"/>
+          </a:solidFill>
+          <a:ln w="12700">
+            <a:solidFill>
+              <a:srgbClr val="0D1B2A"/>
+            </a:solidFill>
+            <a:prstDash val="solid"/>
+          </a:ln>
+        </p:spPr>
+      </p:sp>
+      <p:sp>
+        <p:nvSpPr>
+          <p:cNvPr id="2022321773" name="Shape 1"/>
+          <p:cNvSpPr/>
+          <p:nvPr/>
+        </p:nvSpPr>
+        <p:spPr bwMode="auto">
+          <a:xfrm>
+            <a:off x="411480" y="118872"/>
+            <a:ext cx="347471" cy="347471"/>
+          </a:xfrm>
+          <a:prstGeom prst="rect">
+            <a:avLst/>
+          </a:prstGeom>
+          <a:solidFill>
+            <a:srgbClr val="0A9396"/>
+          </a:solidFill>
+          <a:ln w="12700">
+            <a:solidFill>
+              <a:srgbClr val="0A9396"/>
+            </a:solidFill>
+            <a:prstDash val="solid"/>
+          </a:ln>
+        </p:spPr>
+      </p:sp>
+      <p:sp>
+        <p:nvSpPr>
+          <p:cNvPr id="1897464900" name="Text 2"/>
+          <p:cNvSpPr/>
+          <p:nvPr/>
+        </p:nvSpPr>
+        <p:spPr bwMode="auto">
+          <a:xfrm>
+            <a:off x="411480" y="118872"/>
+            <a:ext cx="347471" cy="347471"/>
+          </a:xfrm>
+          <a:prstGeom prst="rect">
+            <a:avLst/>
+          </a:prstGeom>
+          <a:noFill/>
+          <a:ln/>
+        </p:spPr>
+        <p:txBody>
+          <a:bodyPr wrap="square" lIns="0" tIns="0" rIns="0" bIns="0" rtlCol="0" anchor="ctr"/>
+          <a:lstStyle/>
+          <a:p>
+            <a:pPr marL="0" indent="0" algn="ctr">
+              <a:buNone/>
+              <a:defRPr/>
+            </a:pPr>
+            <a:r>
+              <a:rPr lang="en-US" sz="1400" b="1">
+                <a:solidFill>
+                  <a:schemeClr val="bg1"/>
+                </a:solidFill>
+              </a:rPr>
+              <a:t>9</a:t>
+            </a:r>
+            <a:endParaRPr lang="en-US" sz="1400"/>
+          </a:p>
+        </p:txBody>
+      </p:sp>
+      <p:sp>
+        <p:nvSpPr>
+          <p:cNvPr id="456010453" name="Text 3"/>
+          <p:cNvSpPr/>
+          <p:nvPr/>
+        </p:nvSpPr>
+        <p:spPr bwMode="auto">
+          <a:xfrm>
+            <a:off x="868680" y="118872"/>
+            <a:ext cx="8046720" cy="347471"/>
+          </a:xfrm>
+          <a:prstGeom prst="rect">
+            <a:avLst/>
+          </a:prstGeom>
+          <a:noFill/>
+          <a:ln/>
+        </p:spPr>
+        <p:txBody>
+          <a:bodyPr wrap="square" lIns="0" tIns="0" rIns="0" bIns="0" rtlCol="0" anchor="ctr"/>
+          <a:lstStyle/>
+          <a:p>
+            <a:pPr marL="0" indent="0">
+              <a:buNone/>
+              <a:defRPr/>
+            </a:pPr>
+            <a:r>
+              <a:rPr lang="en-US" sz="1800" b="1">
+                <a:solidFill>
+                  <a:srgbClr val="FFFFFF"/>
+                </a:solidFill>
+              </a:rPr>
+              <a:t>RF vs. XGBoost Fairness Check</a:t>
+            </a:r>
+            <a:endParaRPr lang="en-US" sz="1800"/>
+          </a:p>
+        </p:txBody>
+      </p:sp>
+      <p:sp>
+        <p:nvSpPr>
+          <p:cNvPr id="76803344" name="Shape 4"/>
+          <p:cNvSpPr/>
+          <p:nvPr/>
+        </p:nvSpPr>
+        <p:spPr bwMode="auto">
+          <a:xfrm>
+            <a:off x="0" y="4937760"/>
+            <a:ext cx="9144000" cy="201168"/>
+          </a:xfrm>
+          <a:prstGeom prst="rect">
+            <a:avLst/>
+          </a:prstGeom>
+          <a:solidFill>
+            <a:srgbClr val="0A9396"/>
+          </a:solidFill>
+          <a:ln w="12700">
+            <a:solidFill>
+              <a:srgbClr val="0A9396"/>
+            </a:solidFill>
+            <a:prstDash val="solid"/>
+          </a:ln>
+        </p:spPr>
+      </p:sp>
+      <p:sp>
+        <p:nvSpPr>
+          <p:cNvPr id="1236672738" name="Text 5"/>
+          <p:cNvSpPr/>
+          <p:nvPr/>
+        </p:nvSpPr>
+        <p:spPr bwMode="auto">
+          <a:xfrm>
+            <a:off x="274320" y="4937760"/>
+            <a:ext cx="8595360" cy="201168"/>
+          </a:xfrm>
+          <a:prstGeom prst="rect">
+            <a:avLst/>
+          </a:prstGeom>
+          <a:noFill/>
+          <a:ln/>
+        </p:spPr>
+        <p:txBody>
+          <a:bodyPr wrap="square" lIns="0" tIns="0" rIns="0" bIns="0" rtlCol="0" anchor="ctr"/>
+          <a:lstStyle/>
+          <a:p>
+            <a:pPr marL="0" indent="0">
+              <a:buNone/>
+              <a:defRPr/>
+            </a:pPr>
+            <a:r>
+              <a:rPr lang="en-US" sz="800">
+                <a:solidFill>
+                  <a:srgbClr val="FFFFFF"/>
+                </a:solidFill>
+              </a:rPr>
+              <a:t>Sleep Disorder Classification  |  Final Project</a:t>
+            </a:r>
+            <a:endParaRPr lang="en-US" sz="800"/>
+          </a:p>
+        </p:txBody>
+      </p:sp>
+      <p:pic>
+        <p:nvPicPr>
+          <p:cNvPr id="165572052" name=""/>
+          <p:cNvPicPr>
+            <a:picLocks noChangeAspect="1"/>
+          </p:cNvPicPr>
+          <p:nvPr/>
+        </p:nvPicPr>
+        <p:blipFill rotWithShape="1">
+          <a:blip r:embed="rId3"/>
+          <a:stretch/>
+        </p:blipFill>
+        <p:spPr bwMode="auto">
+          <a:xfrm flipH="0" flipV="0">
+            <a:off x="809624" y="658367"/>
+            <a:ext cx="6851416" cy="4249612"/>
+          </a:xfrm>
+          <a:prstGeom prst="rect">
+            <a:avLst/>
+          </a:prstGeom>
+        </p:spPr>
+      </p:pic>
+    </p:spTree>
+  </p:cSld>
+  <p:clrMapOvr>
+    <a:masterClrMapping/>
+  </p:clrMapOvr>
+  <mc:AlternateContent xmlns:mc="http://schemas.openxmlformats.org/markup-compatibility/2006">
+    <mc:Choice xmlns:p159="http://schemas.microsoft.com/office/powerpoint/2015/09/main" xmlns:p14="http://schemas.microsoft.com/office/powerpoint/2010/main" Requires="p159">
+      <p:transition p14:dur="2000" advClick="1"/>
+    </mc:Choice>
+    <mc:Fallback>
+      <p:transition advClick="1"/>
+    </mc:Fallback>
+  </mc:AlternateContent>
+</p:sld>
+</file>
+
+<file path=ppt/slides/slide11.xml><?xml version="1.0" encoding="utf-8"?>
+<p:sld xmlns:a="http://schemas.openxmlformats.org/drawingml/2006/main" xmlns:r="http://schemas.openxmlformats.org/officeDocument/2006/relationships" xmlns:p="http://schemas.openxmlformats.org/presentationml/2006/main" xmlns:m="http://schemas.openxmlformats.org/officeDocument/2006/math" xmlns:w="http://schemas.openxmlformats.org/wordprocessingml/2006/main" xmlns:mc="http://schemas.openxmlformats.org/markup-compatibility/2006" showMasterPhAnim="0" showMasterSp="1" show="1">
+  <p:cSld name="Slide 7">
+    <p:bg>
+      <p:bgPr shadeToTitle="0">
+        <a:solidFill>
+          <a:srgbClr val="FFFFFF"/>
+        </a:solidFill>
+      </p:bgPr>
+    </p:bg>
+    <p:spTree>
+      <p:nvGrpSpPr>
+        <p:cNvPr id="1" name=""/>
+        <p:cNvGrpSpPr/>
+        <p:nvPr/>
+      </p:nvGrpSpPr>
+      <p:grpSpPr bwMode="auto">
+        <a:xfrm>
+          <a:off x="0" y="0"/>
+          <a:ext cx="0" cy="0"/>
+          <a:chOff x="0" y="0"/>
+          <a:chExt cx="0" cy="0"/>
+        </a:xfrm>
+      </p:grpSpPr>
+      <p:sp>
+        <p:nvSpPr>
+          <p:cNvPr id="854867899" name="Shape 0"/>
+          <p:cNvSpPr/>
+          <p:nvPr/>
+        </p:nvSpPr>
+        <p:spPr bwMode="auto">
+          <a:xfrm>
+            <a:off x="0" y="0"/>
+            <a:ext cx="9144000" cy="658368"/>
+          </a:xfrm>
+          <a:prstGeom prst="rect">
+            <a:avLst/>
+          </a:prstGeom>
+          <a:solidFill>
+            <a:srgbClr val="0D1B2A"/>
+          </a:solidFill>
+          <a:ln w="12700">
+            <a:solidFill>
+              <a:srgbClr val="0D1B2A"/>
+            </a:solidFill>
+            <a:prstDash val="solid"/>
+          </a:ln>
+        </p:spPr>
+      </p:sp>
+      <p:sp>
+        <p:nvSpPr>
+          <p:cNvPr id="1422216595" name="Shape 1"/>
+          <p:cNvSpPr/>
+          <p:nvPr/>
+        </p:nvSpPr>
+        <p:spPr bwMode="auto">
+          <a:xfrm>
+            <a:off x="411480" y="118872"/>
+            <a:ext cx="347472" cy="347472"/>
+          </a:xfrm>
+          <a:prstGeom prst="rect">
+            <a:avLst/>
+          </a:prstGeom>
+          <a:solidFill>
+            <a:srgbClr val="0A9396"/>
+          </a:solidFill>
+          <a:ln w="12700">
+            <a:solidFill>
+              <a:srgbClr val="0A9396"/>
+            </a:solidFill>
+            <a:prstDash val="solid"/>
+          </a:ln>
+        </p:spPr>
+      </p:sp>
+      <p:sp>
+        <p:nvSpPr>
+          <p:cNvPr id="746906654" name="Text 2"/>
+          <p:cNvSpPr/>
+          <p:nvPr/>
+        </p:nvSpPr>
+        <p:spPr bwMode="auto">
+          <a:xfrm>
+            <a:off x="411480" y="118872"/>
+            <a:ext cx="347472" cy="347472"/>
+          </a:xfrm>
+          <a:prstGeom prst="rect">
+            <a:avLst/>
+          </a:prstGeom>
+          <a:noFill/>
+          <a:ln/>
+        </p:spPr>
+        <p:txBody>
+          <a:bodyPr wrap="square" lIns="0" tIns="0" rIns="0" bIns="0" rtlCol="0" anchor="ctr"/>
+          <a:lstStyle/>
+          <a:p>
+            <a:pPr marL="0" indent="0" algn="ctr">
+              <a:buNone/>
+              <a:defRPr/>
+            </a:pPr>
+            <a:r>
+              <a:rPr lang="en-US" sz="1400" b="1">
+                <a:solidFill>
+                  <a:srgbClr val="FFFFFF"/>
+                </a:solidFill>
+              </a:rPr>
+              <a:t>10</a:t>
+            </a:r>
+            <a:endParaRPr lang="en-US" sz="1400"/>
+          </a:p>
+        </p:txBody>
+      </p:sp>
+      <p:sp>
+        <p:nvSpPr>
+          <p:cNvPr id="2115795779" name="Text 3"/>
+          <p:cNvSpPr/>
+          <p:nvPr/>
+        </p:nvSpPr>
+        <p:spPr bwMode="auto">
+          <a:xfrm>
+            <a:off x="868680" y="118872"/>
+            <a:ext cx="8046720" cy="347472"/>
+          </a:xfrm>
+          <a:prstGeom prst="rect">
+            <a:avLst/>
+          </a:prstGeom>
+          <a:noFill/>
+          <a:ln/>
+        </p:spPr>
+        <p:txBody>
+          <a:bodyPr wrap="square" lIns="0" tIns="0" rIns="0" bIns="0" rtlCol="0" anchor="ctr"/>
+          <a:lstStyle/>
+          <a:p>
+            <a:pPr marL="0" indent="0">
+              <a:buNone/>
+              <a:defRPr/>
+            </a:pPr>
+            <a:r>
+              <a:rPr lang="en-US" sz="1800" b="1">
+                <a:solidFill>
+                  <a:srgbClr val="FFFFFF"/>
+                </a:solidFill>
+              </a:rPr>
+              <a:t>Discussion</a:t>
+            </a:r>
+            <a:endParaRPr lang="en-US" sz="1800"/>
+          </a:p>
+        </p:txBody>
+      </p:sp>
+      <p:sp>
+        <p:nvSpPr>
+          <p:cNvPr id="454179089" name="Shape 4"/>
+          <p:cNvSpPr/>
+          <p:nvPr/>
+        </p:nvSpPr>
+        <p:spPr bwMode="auto">
+          <a:xfrm>
+            <a:off x="0" y="4937760"/>
+            <a:ext cx="9144000" cy="201168"/>
+          </a:xfrm>
+          <a:prstGeom prst="rect">
+            <a:avLst/>
+          </a:prstGeom>
+          <a:solidFill>
+            <a:srgbClr val="0A9396"/>
+          </a:solidFill>
+          <a:ln w="12700">
+            <a:solidFill>
+              <a:srgbClr val="0A9396"/>
+            </a:solidFill>
+            <a:prstDash val="solid"/>
+          </a:ln>
+        </p:spPr>
+      </p:sp>
+      <p:sp>
+        <p:nvSpPr>
+          <p:cNvPr id="1457170569" name="Text 5"/>
+          <p:cNvSpPr/>
+          <p:nvPr/>
+        </p:nvSpPr>
+        <p:spPr bwMode="auto">
+          <a:xfrm>
+            <a:off x="274320" y="4937760"/>
+            <a:ext cx="8595360" cy="201168"/>
+          </a:xfrm>
+          <a:prstGeom prst="rect">
+            <a:avLst/>
+          </a:prstGeom>
+          <a:noFill/>
+          <a:ln/>
+        </p:spPr>
+        <p:txBody>
+          <a:bodyPr wrap="square" lIns="0" tIns="0" rIns="0" bIns="0" rtlCol="0" anchor="ctr"/>
+          <a:lstStyle/>
+          <a:p>
+            <a:pPr marL="0" indent="0">
+              <a:buNone/>
+              <a:defRPr/>
+            </a:pPr>
+            <a:r>
+              <a:rPr lang="en-US" sz="800">
+                <a:solidFill>
+                  <a:srgbClr val="FFFFFF"/>
+                </a:solidFill>
+              </a:rPr>
+              <a:t>Sleep Disorder Classification  |  Final Project</a:t>
+            </a:r>
+            <a:endParaRPr lang="en-US" sz="800"/>
+          </a:p>
+        </p:txBody>
+      </p:sp>
+      <p:sp>
+        <p:nvSpPr>
+          <p:cNvPr id="997212986" name="Text 6"/>
+          <p:cNvSpPr/>
+          <p:nvPr/>
+        </p:nvSpPr>
+        <p:spPr bwMode="auto">
+          <a:xfrm>
+            <a:off x="457200" y="713232"/>
+            <a:ext cx="8229600" cy="274320"/>
+          </a:xfrm>
+          <a:prstGeom prst="rect">
+            <a:avLst/>
+          </a:prstGeom>
+          <a:noFill/>
+          <a:ln/>
+        </p:spPr>
+        <p:txBody>
+          <a:bodyPr wrap="square" rtlCol="0" anchor="ctr"/>
+          <a:lstStyle/>
+          <a:p>
+            <a:pPr marL="0" indent="0">
+              <a:buNone/>
+              <a:defRPr/>
+            </a:pPr>
+            <a:r>
+              <a:rPr lang="en-US" sz="1000" i="1">
+                <a:solidFill>
+                  <a:srgbClr val="64748B"/>
+                </a:solidFill>
+              </a:rPr>
+              <a:t>Challenges encountered and how they were addressed</a:t>
+            </a:r>
+            <a:endParaRPr lang="en-US" sz="1000"/>
+          </a:p>
+        </p:txBody>
+      </p:sp>
+      <p:sp>
+        <p:nvSpPr>
+          <p:cNvPr id="1681922559" name="Shape 7"/>
+          <p:cNvSpPr/>
+          <p:nvPr/>
+        </p:nvSpPr>
+        <p:spPr bwMode="auto">
+          <a:xfrm>
+            <a:off x="320040" y="1005840"/>
+            <a:ext cx="4114800" cy="1737360"/>
+          </a:xfrm>
+          <a:prstGeom prst="rect">
+            <a:avLst/>
+          </a:prstGeom>
+          <a:solidFill>
+            <a:srgbClr val="E9F5F6"/>
+          </a:solidFill>
+          <a:ln w="12700">
+            <a:solidFill>
+              <a:srgbClr val="94D2BD"/>
+            </a:solidFill>
+            <a:prstDash val="solid"/>
+          </a:ln>
+          <a:effectLst>
+            <a:outerShdw blurRad="101600" dist="38100" dir="8100000" sx="100000" sy="100000" kx="0" ky="0" algn="bl" rotWithShape="0">
+              <a:srgbClr val="000000">
+                <a:alpha val="13000"/>
+              </a:srgbClr>
+            </a:outerShdw>
+          </a:effectLst>
+        </p:spPr>
+      </p:sp>
+      <p:sp>
+        <p:nvSpPr>
+          <p:cNvPr id="1466638539" name="Text 8"/>
+          <p:cNvSpPr/>
+          <p:nvPr/>
+        </p:nvSpPr>
+        <p:spPr bwMode="auto">
+          <a:xfrm>
+            <a:off x="320040" y="1097280"/>
+            <a:ext cx="640080" cy="502920"/>
+          </a:xfrm>
+          <a:prstGeom prst="rect">
+            <a:avLst/>
+          </a:prstGeom>
+          <a:noFill/>
+          <a:ln/>
+        </p:spPr>
+        <p:txBody>
+          <a:bodyPr wrap="square" rtlCol="0" anchor="ctr"/>
+          <a:lstStyle/>
+          <a:p>
+            <a:pPr marL="0" indent="0" algn="ctr">
+              <a:buNone/>
+              <a:defRPr/>
+            </a:pPr>
+            <a:r>
+              <a:rPr lang="en-US" sz="2200">
+                <a:solidFill>
+                  <a:srgbClr val="000000"/>
+                </a:solidFill>
+              </a:rPr>
+              <a:t>⚙️</a:t>
+            </a:r>
+            <a:endParaRPr lang="en-US" sz="2200"/>
+          </a:p>
+        </p:txBody>
+      </p:sp>
+      <p:sp>
+        <p:nvSpPr>
+          <p:cNvPr id="444048927" name="Text 9"/>
+          <p:cNvSpPr/>
+          <p:nvPr/>
+        </p:nvSpPr>
+        <p:spPr bwMode="auto">
+          <a:xfrm>
+            <a:off x="914400" y="1143000"/>
+            <a:ext cx="3383280" cy="320040"/>
+          </a:xfrm>
+          <a:prstGeom prst="rect">
+            <a:avLst/>
+          </a:prstGeom>
+          <a:noFill/>
+          <a:ln/>
+        </p:spPr>
+        <p:txBody>
+          <a:bodyPr wrap="square" rtlCol="0" anchor="ctr"/>
+          <a:lstStyle/>
+          <a:p>
+            <a:pPr marL="0" indent="0">
+              <a:buNone/>
+              <a:defRPr/>
+            </a:pPr>
+            <a:r>
+              <a:rPr lang="en-US" sz="1300" b="1">
+                <a:solidFill>
+                  <a:srgbClr val="0D1B2A"/>
+                </a:solidFill>
+              </a:rPr>
+              <a:t>Class Imbalance</a:t>
+            </a:r>
+            <a:endParaRPr lang="en-US" sz="1300"/>
+          </a:p>
+        </p:txBody>
+      </p:sp>
+      <p:sp>
+        <p:nvSpPr>
+          <p:cNvPr id="455290409" name="Text 10"/>
+          <p:cNvSpPr/>
+          <p:nvPr/>
+        </p:nvSpPr>
+        <p:spPr bwMode="auto">
+          <a:xfrm>
+            <a:off x="457200" y="1517904"/>
+            <a:ext cx="3886200" cy="1097280"/>
+          </a:xfrm>
+          <a:prstGeom prst="rect">
+            <a:avLst/>
+          </a:prstGeom>
+          <a:noFill/>
+          <a:ln/>
+        </p:spPr>
+        <p:txBody>
+          <a:bodyPr wrap="square" rtlCol="0" anchor="t"/>
+          <a:lstStyle/>
+          <a:p>
+            <a:pPr marL="0" indent="0">
+              <a:buNone/>
+              <a:defRPr/>
+            </a:pPr>
+            <a:r>
+              <a:rPr lang="en-US" sz="1100">
+                <a:solidFill>
+                  <a:srgbClr val="1E293B"/>
+                </a:solidFill>
+              </a:rPr>
+              <a:t>The dataset had unequal representation across sleep disorder classes. Stratified splitting and weighted F1-score evaluation ensured fair model comparison.</a:t>
+            </a:r>
+            <a:endParaRPr lang="en-US" sz="1100"/>
+          </a:p>
+        </p:txBody>
+      </p:sp>
+      <p:sp>
+        <p:nvSpPr>
+          <p:cNvPr id="1970590238" name="Shape 11"/>
+          <p:cNvSpPr/>
+          <p:nvPr/>
+        </p:nvSpPr>
+        <p:spPr bwMode="auto">
+          <a:xfrm>
+            <a:off x="4754880" y="1005840"/>
+            <a:ext cx="4114800" cy="1737360"/>
+          </a:xfrm>
+          <a:prstGeom prst="rect">
+            <a:avLst/>
+          </a:prstGeom>
+          <a:solidFill>
+            <a:srgbClr val="E9F5F6"/>
+          </a:solidFill>
+          <a:ln w="12700">
+            <a:solidFill>
+              <a:srgbClr val="94D2BD"/>
+            </a:solidFill>
+            <a:prstDash val="solid"/>
+          </a:ln>
+          <a:effectLst>
+            <a:outerShdw blurRad="101600" dist="38100" dir="8100000" sx="100000" sy="100000" kx="0" ky="0" algn="bl" rotWithShape="0">
+              <a:srgbClr val="000000">
+                <a:alpha val="13000"/>
+              </a:srgbClr>
+            </a:outerShdw>
+          </a:effectLst>
+        </p:spPr>
+      </p:sp>
+      <p:sp>
+        <p:nvSpPr>
+          <p:cNvPr id="1230409677" name="Text 12"/>
+          <p:cNvSpPr/>
+          <p:nvPr/>
+        </p:nvSpPr>
+        <p:spPr bwMode="auto">
+          <a:xfrm>
+            <a:off x="4754880" y="1097280"/>
+            <a:ext cx="640080" cy="502920"/>
+          </a:xfrm>
+          <a:prstGeom prst="rect">
+            <a:avLst/>
+          </a:prstGeom>
+          <a:noFill/>
+          <a:ln/>
+        </p:spPr>
+        <p:txBody>
+          <a:bodyPr wrap="square" rtlCol="0" anchor="ctr"/>
+          <a:lstStyle/>
+          <a:p>
+            <a:pPr marL="0" indent="0" algn="ctr">
+              <a:buNone/>
+              <a:defRPr/>
+            </a:pPr>
+            <a:r>
+              <a:rPr lang="en-US" sz="2200">
+                <a:solidFill>
+                  <a:srgbClr val="000000"/>
+                </a:solidFill>
+              </a:rPr>
+              <a:t>🔧</a:t>
+            </a:r>
+            <a:endParaRPr lang="en-US" sz="2200"/>
+          </a:p>
+        </p:txBody>
+      </p:sp>
+      <p:sp>
+        <p:nvSpPr>
+          <p:cNvPr id="178287588" name="Text 13"/>
+          <p:cNvSpPr/>
+          <p:nvPr/>
+        </p:nvSpPr>
+        <p:spPr bwMode="auto">
+          <a:xfrm>
+            <a:off x="5349240" y="1143000"/>
+            <a:ext cx="3383280" cy="320040"/>
+          </a:xfrm>
+          <a:prstGeom prst="rect">
+            <a:avLst/>
+          </a:prstGeom>
+          <a:noFill/>
+          <a:ln/>
+        </p:spPr>
+        <p:txBody>
+          <a:bodyPr wrap="square" rtlCol="0" anchor="ctr"/>
+          <a:lstStyle/>
+          <a:p>
+            <a:pPr marL="0" indent="0">
+              <a:buNone/>
+              <a:defRPr/>
+            </a:pPr>
+            <a:r>
+              <a:rPr lang="en-US" sz="1300" b="1">
+                <a:solidFill>
+                  <a:srgbClr val="0D1B2A"/>
+                </a:solidFill>
+              </a:rPr>
+              <a:t>Feature Engineering</a:t>
+            </a:r>
+            <a:endParaRPr lang="en-US" sz="1300"/>
+          </a:p>
+        </p:txBody>
+      </p:sp>
+      <p:sp>
+        <p:nvSpPr>
+          <p:cNvPr id="137105534" name="Text 14"/>
+          <p:cNvSpPr/>
+          <p:nvPr/>
+        </p:nvSpPr>
+        <p:spPr bwMode="auto">
+          <a:xfrm>
+            <a:off x="4892039" y="1517904"/>
+            <a:ext cx="3886200" cy="1097280"/>
+          </a:xfrm>
+          <a:prstGeom prst="rect">
+            <a:avLst/>
+          </a:prstGeom>
+          <a:noFill/>
+          <a:ln/>
+        </p:spPr>
+        <p:txBody>
+          <a:bodyPr wrap="square" rtlCol="0" anchor="t"/>
+          <a:lstStyle/>
+          <a:p>
+            <a:pPr marL="0" indent="0">
+              <a:buNone/>
+              <a:defRPr/>
+            </a:pPr>
+            <a:r>
+              <a:rPr lang="en-US" sz="1100">
+                <a:solidFill>
+                  <a:srgbClr val="1E293B"/>
+                </a:solidFill>
+              </a:rPr>
+              <a:t>The Blood Pressure column was stored as a string (e.g., '120/80'). We parsed it into separate Systolic and Diastolic numerical features.</a:t>
+            </a:r>
+            <a:endParaRPr lang="en-US" sz="1100"/>
+          </a:p>
+        </p:txBody>
+      </p:sp>
+      <p:sp>
+        <p:nvSpPr>
+          <p:cNvPr id="879855004" name="Shape 15"/>
+          <p:cNvSpPr/>
+          <p:nvPr/>
+        </p:nvSpPr>
+        <p:spPr bwMode="auto">
+          <a:xfrm>
+            <a:off x="320040" y="2926080"/>
+            <a:ext cx="4114800" cy="1737360"/>
+          </a:xfrm>
+          <a:prstGeom prst="rect">
+            <a:avLst/>
+          </a:prstGeom>
+          <a:solidFill>
+            <a:srgbClr val="E9F5F6"/>
+          </a:solidFill>
+          <a:ln w="12700">
+            <a:solidFill>
+              <a:srgbClr val="94D2BD"/>
+            </a:solidFill>
+            <a:prstDash val="solid"/>
+          </a:ln>
+          <a:effectLst>
+            <a:outerShdw blurRad="101600" dist="38100" dir="8100000" sx="100000" sy="100000" kx="0" ky="0" algn="bl" rotWithShape="0">
+              <a:srgbClr val="000000">
+                <a:alpha val="13000"/>
+              </a:srgbClr>
+            </a:outerShdw>
+          </a:effectLst>
+        </p:spPr>
+      </p:sp>
+      <p:sp>
+        <p:nvSpPr>
+          <p:cNvPr id="463266443" name="Text 16"/>
+          <p:cNvSpPr/>
+          <p:nvPr/>
+        </p:nvSpPr>
+        <p:spPr bwMode="auto">
+          <a:xfrm>
+            <a:off x="320040" y="3017519"/>
+            <a:ext cx="640080" cy="502920"/>
+          </a:xfrm>
+          <a:prstGeom prst="rect">
+            <a:avLst/>
+          </a:prstGeom>
+          <a:noFill/>
+          <a:ln/>
+        </p:spPr>
+        <p:txBody>
+          <a:bodyPr wrap="square" rtlCol="0" anchor="ctr"/>
+          <a:lstStyle/>
+          <a:p>
+            <a:pPr marL="0" indent="0" algn="ctr">
+              <a:buNone/>
+              <a:defRPr/>
+            </a:pPr>
+            <a:r>
+              <a:rPr lang="en-US" sz="2200">
+                <a:solidFill>
+                  <a:srgbClr val="000000"/>
+                </a:solidFill>
+              </a:rPr>
+              <a:t>📊</a:t>
+            </a:r>
+            <a:endParaRPr lang="en-US" sz="2200"/>
+          </a:p>
+        </p:txBody>
+      </p:sp>
+      <p:sp>
+        <p:nvSpPr>
+          <p:cNvPr id="922485054" name="Text 17"/>
+          <p:cNvSpPr/>
+          <p:nvPr/>
+        </p:nvSpPr>
+        <p:spPr bwMode="auto">
+          <a:xfrm>
+            <a:off x="914400" y="3063240"/>
+            <a:ext cx="3383280" cy="320040"/>
+          </a:xfrm>
+          <a:prstGeom prst="rect">
+            <a:avLst/>
+          </a:prstGeom>
+          <a:noFill/>
+          <a:ln/>
+        </p:spPr>
+        <p:txBody>
+          <a:bodyPr wrap="square" rtlCol="0" anchor="ctr"/>
+          <a:lstStyle/>
+          <a:p>
+            <a:pPr marL="0" indent="0">
+              <a:buNone/>
+              <a:defRPr/>
+            </a:pPr>
+            <a:r>
+              <a:rPr lang="en-US" sz="1300" b="1">
+                <a:solidFill>
+                  <a:srgbClr val="0D1B2A"/>
+                </a:solidFill>
+              </a:rPr>
+              <a:t>Model Stability</a:t>
+            </a:r>
+            <a:endParaRPr lang="en-US" sz="1300"/>
+          </a:p>
+        </p:txBody>
+      </p:sp>
+      <p:sp>
+        <p:nvSpPr>
+          <p:cNvPr id="551244426" name="Text 18"/>
+          <p:cNvSpPr/>
+          <p:nvPr/>
+        </p:nvSpPr>
+        <p:spPr bwMode="auto">
+          <a:xfrm>
+            <a:off x="457200" y="3438144"/>
+            <a:ext cx="3886200" cy="1097280"/>
+          </a:xfrm>
+          <a:prstGeom prst="rect">
+            <a:avLst/>
+          </a:prstGeom>
+          <a:noFill/>
+          <a:ln/>
+        </p:spPr>
+        <p:txBody>
+          <a:bodyPr wrap="square" rtlCol="0" anchor="t"/>
+          <a:lstStyle/>
+          <a:p>
+            <a:pPr marL="0" indent="0">
+              <a:buNone/>
+              <a:defRPr/>
+            </a:pPr>
+            <a:r>
+              <a:rPr lang="en-US" sz="1100">
+                <a:solidFill>
+                  <a:srgbClr val="1E293B"/>
+                </a:solidFill>
+              </a:rPr>
+              <a:t>5-fold cross-validation was used to detect overfitting and confirm that test-set performance was consistent with training trends.</a:t>
+            </a:r>
+            <a:endParaRPr lang="en-US" sz="1100"/>
+          </a:p>
+        </p:txBody>
+      </p:sp>
+      <p:sp>
+        <p:nvSpPr>
+          <p:cNvPr id="602372910" name="Shape 19"/>
+          <p:cNvSpPr/>
+          <p:nvPr/>
+        </p:nvSpPr>
+        <p:spPr bwMode="auto">
+          <a:xfrm>
+            <a:off x="4754880" y="2926080"/>
+            <a:ext cx="4114800" cy="1737360"/>
+          </a:xfrm>
+          <a:prstGeom prst="rect">
+            <a:avLst/>
+          </a:prstGeom>
+          <a:solidFill>
+            <a:srgbClr val="E9F5F6"/>
+          </a:solidFill>
+          <a:ln w="12700">
+            <a:solidFill>
+              <a:srgbClr val="94D2BD"/>
+            </a:solidFill>
+            <a:prstDash val="solid"/>
+          </a:ln>
+          <a:effectLst>
+            <a:outerShdw blurRad="101600" dist="38100" dir="8100000" sx="100000" sy="100000" kx="0" ky="0" algn="bl" rotWithShape="0">
+              <a:srgbClr val="000000">
+                <a:alpha val="13000"/>
+              </a:srgbClr>
+            </a:outerShdw>
+          </a:effectLst>
+        </p:spPr>
+      </p:sp>
+      <p:sp>
+        <p:nvSpPr>
+          <p:cNvPr id="215431920" name="Text 20"/>
+          <p:cNvSpPr/>
+          <p:nvPr/>
+        </p:nvSpPr>
+        <p:spPr bwMode="auto">
+          <a:xfrm>
+            <a:off x="4754880" y="3017519"/>
+            <a:ext cx="640080" cy="502920"/>
+          </a:xfrm>
+          <a:prstGeom prst="rect">
+            <a:avLst/>
+          </a:prstGeom>
+          <a:noFill/>
+          <a:ln/>
+        </p:spPr>
+        <p:txBody>
+          <a:bodyPr wrap="square" rtlCol="0" anchor="ctr"/>
+          <a:lstStyle/>
+          <a:p>
+            <a:pPr marL="0" indent="0" algn="ctr">
+              <a:buNone/>
+              <a:defRPr/>
+            </a:pPr>
+            <a:r>
+              <a:rPr lang="en-US" sz="2200">
+                <a:solidFill>
+                  <a:srgbClr val="000000"/>
+                </a:solidFill>
+              </a:rPr>
+              <a:t>⚖️</a:t>
+            </a:r>
+            <a:endParaRPr lang="en-US" sz="2200"/>
+          </a:p>
+        </p:txBody>
+      </p:sp>
+      <p:sp>
+        <p:nvSpPr>
+          <p:cNvPr id="233438930" name="Text 21"/>
+          <p:cNvSpPr/>
+          <p:nvPr/>
+        </p:nvSpPr>
+        <p:spPr bwMode="auto">
+          <a:xfrm>
+            <a:off x="5349240" y="3063240"/>
+            <a:ext cx="3383280" cy="320040"/>
+          </a:xfrm>
+          <a:prstGeom prst="rect">
+            <a:avLst/>
+          </a:prstGeom>
+          <a:noFill/>
+          <a:ln/>
+        </p:spPr>
+        <p:txBody>
+          <a:bodyPr wrap="square" rtlCol="0" anchor="ctr"/>
+          <a:lstStyle/>
+          <a:p>
+            <a:pPr marL="0" indent="0">
+              <a:buNone/>
+              <a:defRPr/>
+            </a:pPr>
+            <a:r>
+              <a:rPr lang="en-US" sz="1300" b="1">
+                <a:solidFill>
+                  <a:srgbClr val="0D1B2A"/>
+                </a:solidFill>
+              </a:rPr>
+              <a:t>Fairness Gaps</a:t>
+            </a:r>
+            <a:endParaRPr lang="en-US" sz="1300"/>
+          </a:p>
+        </p:txBody>
+      </p:sp>
+      <p:sp>
+        <p:nvSpPr>
+          <p:cNvPr id="1126704624" name="Text 22"/>
+          <p:cNvSpPr/>
+          <p:nvPr/>
+        </p:nvSpPr>
+        <p:spPr bwMode="auto">
+          <a:xfrm>
+            <a:off x="4892039" y="3438144"/>
+            <a:ext cx="3886200" cy="1097280"/>
+          </a:xfrm>
+          <a:prstGeom prst="rect">
+            <a:avLst/>
+          </a:prstGeom>
+          <a:noFill/>
+          <a:ln/>
+        </p:spPr>
+        <p:txBody>
+          <a:bodyPr wrap="square" rtlCol="0" anchor="t"/>
+          <a:lstStyle/>
+          <a:p>
+            <a:pPr marL="0" indent="0">
+              <a:buNone/>
+              <a:defRPr/>
+            </a:pPr>
+            <a:r>
+              <a:rPr lang="en-US" sz="1100">
+                <a:solidFill>
+                  <a:srgbClr val="1E293B"/>
+                </a:solidFill>
+              </a:rPr>
+              <a:t>Initial fairness audit revealed minor accuracy differences by BMI category. Groups with fewer than 5 samples were flagged and interpreted with caution.</a:t>
+            </a:r>
+            <a:endParaRPr lang="en-US" sz="1100"/>
+          </a:p>
+        </p:txBody>
+      </p:sp>
+    </p:spTree>
+  </p:cSld>
+  <p:clrMapOvr>
+    <a:masterClrMapping/>
+  </p:clrMapOvr>
+  <mc:AlternateContent xmlns:mc="http://schemas.openxmlformats.org/markup-compatibility/2006">
+    <mc:Choice xmlns:p159="http://schemas.microsoft.com/office/powerpoint/2015/09/main" xmlns:p14="http://schemas.microsoft.com/office/powerpoint/2010/main" Requires="p159">
+      <p:transition p14:dur="2000" advClick="1"/>
+    </mc:Choice>
+    <mc:Fallback>
+      <p:transition advClick="1"/>
+    </mc:Fallback>
+  </mc:AlternateContent>
+</p:sld>
+</file>
+
+<file path=ppt/slides/slide12.xml><?xml version="1.0" encoding="utf-8"?>
+<p:sld xmlns:a="http://schemas.openxmlformats.org/drawingml/2006/main" xmlns:r="http://schemas.openxmlformats.org/officeDocument/2006/relationships" xmlns:p="http://schemas.openxmlformats.org/presentationml/2006/main" xmlns:m="http://schemas.openxmlformats.org/officeDocument/2006/math" xmlns:w="http://schemas.openxmlformats.org/wordprocessingml/2006/main" xmlns:mc="http://schemas.openxmlformats.org/markup-compatibility/2006" showMasterPhAnim="0" showMasterSp="1" show="1">
+  <p:cSld name="Slide 8">
+    <p:bg>
+      <p:bgPr shadeToTitle="0">
+        <a:solidFill>
+          <a:srgbClr val="FFFFFF"/>
+        </a:solidFill>
+      </p:bgPr>
+    </p:bg>
+    <p:spTree>
+      <p:nvGrpSpPr>
+        <p:cNvPr id="1" name=""/>
+        <p:cNvGrpSpPr/>
+        <p:nvPr/>
+      </p:nvGrpSpPr>
+      <p:grpSpPr bwMode="auto">
+        <a:xfrm>
+          <a:off x="0" y="0"/>
+          <a:ext cx="0" cy="0"/>
+          <a:chOff x="0" y="0"/>
+          <a:chExt cx="0" cy="0"/>
+        </a:xfrm>
+      </p:grpSpPr>
+      <p:sp>
+        <p:nvSpPr>
+          <p:cNvPr id="185000130" name="Shape 0"/>
+          <p:cNvSpPr/>
+          <p:nvPr/>
+        </p:nvSpPr>
+        <p:spPr bwMode="auto">
+          <a:xfrm>
+            <a:off x="0" y="0"/>
+            <a:ext cx="9144000" cy="658368"/>
+          </a:xfrm>
+          <a:prstGeom prst="rect">
+            <a:avLst/>
+          </a:prstGeom>
+          <a:solidFill>
+            <a:srgbClr val="0D1B2A"/>
+          </a:solidFill>
+          <a:ln w="12700">
+            <a:solidFill>
+              <a:srgbClr val="0D1B2A"/>
+            </a:solidFill>
+            <a:prstDash val="solid"/>
+          </a:ln>
+        </p:spPr>
+      </p:sp>
+      <p:sp>
+        <p:nvSpPr>
+          <p:cNvPr id="1947552507" name="Shape 1"/>
+          <p:cNvSpPr/>
+          <p:nvPr/>
+        </p:nvSpPr>
+        <p:spPr bwMode="auto">
+          <a:xfrm>
+            <a:off x="411480" y="118872"/>
+            <a:ext cx="347472" cy="347472"/>
+          </a:xfrm>
+          <a:prstGeom prst="rect">
+            <a:avLst/>
+          </a:prstGeom>
+          <a:solidFill>
+            <a:srgbClr val="0A9396"/>
+          </a:solidFill>
+          <a:ln w="12700">
+            <a:solidFill>
+              <a:srgbClr val="0A9396"/>
+            </a:solidFill>
+            <a:prstDash val="solid"/>
+          </a:ln>
+        </p:spPr>
+      </p:sp>
+      <p:sp>
+        <p:nvSpPr>
+          <p:cNvPr id="884008200" name="Text 2"/>
+          <p:cNvSpPr/>
+          <p:nvPr/>
+        </p:nvSpPr>
+        <p:spPr bwMode="auto">
+          <a:xfrm>
+            <a:off x="411480" y="118872"/>
+            <a:ext cx="347472" cy="347472"/>
+          </a:xfrm>
+          <a:prstGeom prst="rect">
+            <a:avLst/>
+          </a:prstGeom>
+          <a:noFill/>
+          <a:ln/>
+        </p:spPr>
+        <p:txBody>
+          <a:bodyPr wrap="square" lIns="0" tIns="0" rIns="0" bIns="0" rtlCol="0" anchor="ctr"/>
+          <a:lstStyle/>
+          <a:p>
+            <a:pPr marL="0" indent="0" algn="ctr">
+              <a:buNone/>
+              <a:defRPr/>
+            </a:pPr>
+            <a:r>
+              <a:rPr lang="en-US" sz="1400" b="1">
+                <a:solidFill>
+                  <a:srgbClr val="FFFFFF"/>
+                </a:solidFill>
+              </a:rPr>
+              <a:t>11</a:t>
+            </a:r>
+            <a:endParaRPr lang="en-US" sz="1400"/>
+          </a:p>
+        </p:txBody>
+      </p:sp>
+      <p:sp>
+        <p:nvSpPr>
+          <p:cNvPr id="296277954" name="Text 3"/>
+          <p:cNvSpPr/>
+          <p:nvPr/>
+        </p:nvSpPr>
+        <p:spPr bwMode="auto">
+          <a:xfrm>
+            <a:off x="868680" y="118872"/>
+            <a:ext cx="8046720" cy="347472"/>
+          </a:xfrm>
+          <a:prstGeom prst="rect">
+            <a:avLst/>
+          </a:prstGeom>
+          <a:noFill/>
+          <a:ln/>
+        </p:spPr>
+        <p:txBody>
+          <a:bodyPr wrap="square" lIns="0" tIns="0" rIns="0" bIns="0" rtlCol="0" anchor="ctr"/>
+          <a:lstStyle/>
+          <a:p>
+            <a:pPr marL="0" indent="0">
+              <a:buNone/>
+              <a:defRPr/>
+            </a:pPr>
+            <a:r>
+              <a:rPr lang="en-US" sz="1800" b="1">
+                <a:solidFill>
+                  <a:srgbClr val="FFFFFF"/>
+                </a:solidFill>
+              </a:rPr>
+              <a:t>Future Directions</a:t>
+            </a:r>
+            <a:endParaRPr lang="en-US" sz="1800"/>
+          </a:p>
+        </p:txBody>
+      </p:sp>
+      <p:sp>
+        <p:nvSpPr>
+          <p:cNvPr id="196718331" name="Shape 4"/>
+          <p:cNvSpPr/>
+          <p:nvPr/>
+        </p:nvSpPr>
+        <p:spPr bwMode="auto">
+          <a:xfrm>
+            <a:off x="0" y="4937760"/>
+            <a:ext cx="9144000" cy="201168"/>
+          </a:xfrm>
+          <a:prstGeom prst="rect">
+            <a:avLst/>
+          </a:prstGeom>
+          <a:solidFill>
+            <a:srgbClr val="0A9396"/>
+          </a:solidFill>
+          <a:ln w="12700">
+            <a:solidFill>
+              <a:srgbClr val="0A9396"/>
+            </a:solidFill>
+            <a:prstDash val="solid"/>
+          </a:ln>
+        </p:spPr>
+      </p:sp>
+      <p:sp>
+        <p:nvSpPr>
+          <p:cNvPr id="1497723116" name="Text 5"/>
+          <p:cNvSpPr/>
+          <p:nvPr/>
+        </p:nvSpPr>
+        <p:spPr bwMode="auto">
+          <a:xfrm>
+            <a:off x="274320" y="4937760"/>
+            <a:ext cx="8595360" cy="201168"/>
+          </a:xfrm>
+          <a:prstGeom prst="rect">
+            <a:avLst/>
+          </a:prstGeom>
+          <a:noFill/>
+          <a:ln/>
+        </p:spPr>
+        <p:txBody>
+          <a:bodyPr wrap="square" lIns="0" tIns="0" rIns="0" bIns="0" rtlCol="0" anchor="ctr"/>
+          <a:lstStyle/>
+          <a:p>
+            <a:pPr marL="0" indent="0">
+              <a:buNone/>
+              <a:defRPr/>
+            </a:pPr>
+            <a:r>
+              <a:rPr lang="en-US" sz="800">
+                <a:solidFill>
+                  <a:srgbClr val="FFFFFF"/>
+                </a:solidFill>
+              </a:rPr>
+              <a:t>Sleep Disorder Classification  |  Final Project</a:t>
+            </a:r>
+            <a:endParaRPr lang="en-US" sz="800"/>
+          </a:p>
+        </p:txBody>
+      </p:sp>
+      <p:sp>
+        <p:nvSpPr>
+          <p:cNvPr id="678384438" name="Text 6"/>
+          <p:cNvSpPr/>
+          <p:nvPr/>
+        </p:nvSpPr>
+        <p:spPr bwMode="auto">
+          <a:xfrm>
+            <a:off x="457200" y="713232"/>
+            <a:ext cx="8229600" cy="274320"/>
+          </a:xfrm>
+          <a:prstGeom prst="rect">
+            <a:avLst/>
+          </a:prstGeom>
+          <a:noFill/>
+          <a:ln/>
+        </p:spPr>
+        <p:txBody>
+          <a:bodyPr wrap="square" rtlCol="0" anchor="ctr"/>
+          <a:lstStyle/>
+          <a:p>
+            <a:pPr marL="0" indent="0">
+              <a:buNone/>
+              <a:defRPr/>
+            </a:pPr>
+            <a:r>
+              <a:rPr lang="en-US" sz="1000" i="1">
+                <a:solidFill>
+                  <a:srgbClr val="64748B"/>
+                </a:solidFill>
+              </a:rPr>
+              <a:t>Key areas for improvement and lessons learned</a:t>
+            </a:r>
+            <a:endParaRPr lang="en-US" sz="1000"/>
+          </a:p>
+        </p:txBody>
+      </p:sp>
+      <p:sp>
+        <p:nvSpPr>
+          <p:cNvPr id="1938816588" name="Shape 7"/>
+          <p:cNvSpPr/>
+          <p:nvPr/>
+        </p:nvSpPr>
+        <p:spPr bwMode="auto">
+          <a:xfrm>
+            <a:off x="457200" y="2441448"/>
+            <a:ext cx="8229600" cy="45720"/>
+          </a:xfrm>
+          <a:prstGeom prst="rect">
+            <a:avLst/>
+          </a:prstGeom>
+          <a:solidFill>
+            <a:srgbClr val="94D2BD"/>
+          </a:solidFill>
+          <a:ln w="12700">
+            <a:solidFill>
+              <a:srgbClr val="94D2BD"/>
+            </a:solidFill>
+            <a:prstDash val="solid"/>
+          </a:ln>
+        </p:spPr>
+      </p:sp>
+      <p:sp>
+        <p:nvSpPr>
+          <p:cNvPr id="939276320" name="Shape 8"/>
+          <p:cNvSpPr/>
+          <p:nvPr/>
+        </p:nvSpPr>
+        <p:spPr bwMode="auto">
+          <a:xfrm>
+            <a:off x="960120" y="2304288"/>
+            <a:ext cx="228600" cy="228600"/>
+          </a:xfrm>
+          <a:prstGeom prst="ellipse">
+            <a:avLst/>
+          </a:prstGeom>
+          <a:solidFill>
+            <a:srgbClr val="0A9396"/>
+          </a:solidFill>
+          <a:ln w="12700">
+            <a:solidFill>
+              <a:srgbClr val="0A9396"/>
+            </a:solidFill>
+            <a:prstDash val="solid"/>
+          </a:ln>
+        </p:spPr>
+      </p:sp>
+      <p:sp>
+        <p:nvSpPr>
+          <p:cNvPr id="1165815538" name="Shape 9"/>
+          <p:cNvSpPr/>
+          <p:nvPr/>
+        </p:nvSpPr>
+        <p:spPr bwMode="auto">
+          <a:xfrm>
+            <a:off x="530352" y="960120"/>
+            <a:ext cx="1508759" cy="1371600"/>
+          </a:xfrm>
+          <a:prstGeom prst="rect">
+            <a:avLst/>
+          </a:prstGeom>
+          <a:solidFill>
+            <a:srgbClr val="0D1B2A"/>
+          </a:solidFill>
+          <a:ln w="12700">
+            <a:solidFill>
+              <a:srgbClr val="0A9396"/>
+            </a:solidFill>
+            <a:prstDash val="solid"/>
+          </a:ln>
+          <a:effectLst>
+            <a:outerShdw blurRad="101600" dist="38100" dir="8100000" sx="100000" sy="100000" kx="0" ky="0" algn="bl" rotWithShape="0">
+              <a:srgbClr val="000000">
+                <a:alpha val="13000"/>
+              </a:srgbClr>
+            </a:outerShdw>
+          </a:effectLst>
+        </p:spPr>
+      </p:sp>
+      <p:sp>
+        <p:nvSpPr>
+          <p:cNvPr id="776577280" name="Text 10"/>
+          <p:cNvSpPr/>
+          <p:nvPr/>
+        </p:nvSpPr>
+        <p:spPr bwMode="auto">
+          <a:xfrm>
+            <a:off x="576072" y="1051560"/>
+            <a:ext cx="1417320" cy="347472"/>
+          </a:xfrm>
+          <a:prstGeom prst="rect">
+            <a:avLst/>
+          </a:prstGeom>
+          <a:noFill/>
+          <a:ln/>
+        </p:spPr>
+        <p:txBody>
+          <a:bodyPr wrap="square" rtlCol="0" anchor="ctr"/>
+          <a:lstStyle/>
+          <a:p>
+            <a:pPr marL="0" indent="0" algn="ctr">
+              <a:buNone/>
+              <a:defRPr/>
+            </a:pPr>
+            <a:r>
+              <a:rPr lang="en-US" sz="1100" b="1">
+                <a:solidFill>
+                  <a:srgbClr val="94D2BD"/>
+                </a:solidFill>
+              </a:rPr>
+              <a:t>Larger Dataset</a:t>
+            </a:r>
+            <a:endParaRPr lang="en-US" sz="1100"/>
+          </a:p>
+        </p:txBody>
+      </p:sp>
+      <p:sp>
+        <p:nvSpPr>
+          <p:cNvPr id="1674212394" name="Text 11"/>
+          <p:cNvSpPr/>
+          <p:nvPr/>
+        </p:nvSpPr>
+        <p:spPr bwMode="auto">
+          <a:xfrm>
+            <a:off x="576072" y="1417320"/>
+            <a:ext cx="1417320" cy="822960"/>
+          </a:xfrm>
+          <a:prstGeom prst="rect">
+            <a:avLst/>
+          </a:prstGeom>
+          <a:noFill/>
+          <a:ln/>
+        </p:spPr>
+        <p:txBody>
+          <a:bodyPr wrap="square" rtlCol="0" anchor="t"/>
+          <a:lstStyle/>
+          <a:p>
+            <a:pPr marL="0" indent="0" algn="ctr">
+              <a:buNone/>
+              <a:defRPr/>
+            </a:pPr>
+            <a:r>
+              <a:rPr lang="en-US" sz="900">
+                <a:solidFill>
+                  <a:srgbClr val="FFFFFF"/>
+                </a:solidFill>
+              </a:rPr>
+              <a:t>Collect or augment with PSG or wearable sensor data to improve generalizability and reduce demographic sampling gaps.</a:t>
+            </a:r>
+            <a:endParaRPr lang="en-US" sz="900"/>
+          </a:p>
+        </p:txBody>
+      </p:sp>
+      <p:sp>
+        <p:nvSpPr>
+          <p:cNvPr id="461253601" name="Shape 12"/>
+          <p:cNvSpPr/>
+          <p:nvPr/>
+        </p:nvSpPr>
+        <p:spPr bwMode="auto">
+          <a:xfrm>
+            <a:off x="1051560" y="2331720"/>
+            <a:ext cx="36576" cy="109728"/>
+          </a:xfrm>
+          <a:prstGeom prst="rect">
+            <a:avLst/>
+          </a:prstGeom>
+          <a:solidFill>
+            <a:srgbClr val="94D2BD"/>
+          </a:solidFill>
+          <a:ln w="12700">
+            <a:solidFill>
+              <a:srgbClr val="94D2BD"/>
+            </a:solidFill>
+            <a:prstDash val="solid"/>
+          </a:ln>
+        </p:spPr>
+      </p:sp>
+      <p:sp>
+        <p:nvSpPr>
+          <p:cNvPr id="221173859" name="Shape 13"/>
+          <p:cNvSpPr/>
+          <p:nvPr/>
+        </p:nvSpPr>
+        <p:spPr bwMode="auto">
+          <a:xfrm>
+            <a:off x="2624328" y="2304288"/>
+            <a:ext cx="228600" cy="228600"/>
+          </a:xfrm>
+          <a:prstGeom prst="ellipse">
+            <a:avLst/>
+          </a:prstGeom>
+          <a:solidFill>
+            <a:srgbClr val="0A9396"/>
+          </a:solidFill>
+          <a:ln w="12700">
+            <a:solidFill>
+              <a:srgbClr val="0A9396"/>
+            </a:solidFill>
+            <a:prstDash val="solid"/>
+          </a:ln>
+        </p:spPr>
+      </p:sp>
+      <p:sp>
+        <p:nvSpPr>
+          <p:cNvPr id="1203965431" name="Shape 14"/>
+          <p:cNvSpPr/>
+          <p:nvPr/>
+        </p:nvSpPr>
+        <p:spPr bwMode="auto">
+          <a:xfrm>
+            <a:off x="2194560" y="2834640"/>
+            <a:ext cx="1508759" cy="1417320"/>
+          </a:xfrm>
+          <a:prstGeom prst="rect">
+            <a:avLst/>
+          </a:prstGeom>
+          <a:solidFill>
+            <a:srgbClr val="0D1B2A"/>
+          </a:solidFill>
+          <a:ln w="12700">
+            <a:solidFill>
+              <a:srgbClr val="0A9396"/>
+            </a:solidFill>
+            <a:prstDash val="solid"/>
+          </a:ln>
+          <a:effectLst>
+            <a:outerShdw blurRad="101600" dist="38100" dir="8100000" sx="100000" sy="100000" kx="0" ky="0" algn="bl" rotWithShape="0">
+              <a:srgbClr val="000000">
+                <a:alpha val="13000"/>
+              </a:srgbClr>
+            </a:outerShdw>
+          </a:effectLst>
+        </p:spPr>
+      </p:sp>
+      <p:sp>
+        <p:nvSpPr>
+          <p:cNvPr id="588636043" name="Text 15"/>
+          <p:cNvSpPr/>
+          <p:nvPr/>
+        </p:nvSpPr>
+        <p:spPr bwMode="auto">
+          <a:xfrm>
+            <a:off x="2240280" y="2926080"/>
+            <a:ext cx="1417320" cy="347472"/>
+          </a:xfrm>
+          <a:prstGeom prst="rect">
+            <a:avLst/>
+          </a:prstGeom>
+          <a:noFill/>
+          <a:ln/>
+        </p:spPr>
+        <p:txBody>
+          <a:bodyPr wrap="square" rtlCol="0" anchor="ctr"/>
+          <a:lstStyle/>
+          <a:p>
+            <a:pPr marL="0" indent="0" algn="ctr">
+              <a:buNone/>
+              <a:defRPr/>
+            </a:pPr>
+            <a:r>
+              <a:rPr lang="en-US" sz="1100" b="1">
+                <a:solidFill>
+                  <a:srgbClr val="94D2BD"/>
+                </a:solidFill>
+              </a:rPr>
+              <a:t>Deep Learning</a:t>
+            </a:r>
+            <a:endParaRPr lang="en-US" sz="1100"/>
+          </a:p>
+        </p:txBody>
+      </p:sp>
+      <p:sp>
+        <p:nvSpPr>
+          <p:cNvPr id="910696992" name="Text 16"/>
+          <p:cNvSpPr/>
+          <p:nvPr/>
+        </p:nvSpPr>
+        <p:spPr bwMode="auto">
+          <a:xfrm>
+            <a:off x="2240280" y="3291840"/>
+            <a:ext cx="1417320" cy="868680"/>
+          </a:xfrm>
+          <a:prstGeom prst="rect">
+            <a:avLst/>
+          </a:prstGeom>
+          <a:noFill/>
+          <a:ln/>
+        </p:spPr>
+        <p:txBody>
+          <a:bodyPr wrap="square" rtlCol="0" anchor="t"/>
+          <a:lstStyle/>
+          <a:p>
+            <a:pPr marL="0" indent="0" algn="ctr">
+              <a:buNone/>
+              <a:defRPr/>
+            </a:pPr>
+            <a:r>
+              <a:rPr lang="en-US" sz="900">
+                <a:solidFill>
+                  <a:srgbClr val="FFFFFF"/>
+                </a:solidFill>
+              </a:rPr>
+              <a:t>Explore LSTM or Transformer models if time-series sleep metrics (e.g., nightly wearable data) become available.</a:t>
+            </a:r>
+            <a:endParaRPr lang="en-US" sz="900"/>
+          </a:p>
+        </p:txBody>
+      </p:sp>
+      <p:sp>
+        <p:nvSpPr>
+          <p:cNvPr id="608995007" name="Shape 17"/>
+          <p:cNvSpPr/>
+          <p:nvPr/>
+        </p:nvSpPr>
+        <p:spPr bwMode="auto">
+          <a:xfrm>
+            <a:off x="2715768" y="2624328"/>
+            <a:ext cx="36576" cy="210312"/>
+          </a:xfrm>
+          <a:prstGeom prst="rect">
+            <a:avLst/>
+          </a:prstGeom>
+          <a:solidFill>
+            <a:srgbClr val="94D2BD"/>
+          </a:solidFill>
+          <a:ln w="12700">
+            <a:solidFill>
+              <a:srgbClr val="94D2BD"/>
+            </a:solidFill>
+            <a:prstDash val="solid"/>
+          </a:ln>
+        </p:spPr>
+      </p:sp>
+      <p:sp>
+        <p:nvSpPr>
+          <p:cNvPr id="20358008" name="Shape 18"/>
+          <p:cNvSpPr/>
+          <p:nvPr/>
+        </p:nvSpPr>
+        <p:spPr bwMode="auto">
+          <a:xfrm>
+            <a:off x="4288536" y="2304288"/>
+            <a:ext cx="228600" cy="228600"/>
+          </a:xfrm>
+          <a:prstGeom prst="ellipse">
+            <a:avLst/>
+          </a:prstGeom>
+          <a:solidFill>
+            <a:srgbClr val="0A9396"/>
+          </a:solidFill>
+          <a:ln w="12700">
+            <a:solidFill>
+              <a:srgbClr val="0A9396"/>
+            </a:solidFill>
+            <a:prstDash val="solid"/>
+          </a:ln>
+        </p:spPr>
+      </p:sp>
+      <p:sp>
+        <p:nvSpPr>
+          <p:cNvPr id="1153324676" name="Shape 19"/>
+          <p:cNvSpPr/>
+          <p:nvPr/>
+        </p:nvSpPr>
+        <p:spPr bwMode="auto">
+          <a:xfrm>
+            <a:off x="3858768" y="960120"/>
+            <a:ext cx="1508759" cy="1371600"/>
+          </a:xfrm>
+          <a:prstGeom prst="rect">
+            <a:avLst/>
+          </a:prstGeom>
+          <a:solidFill>
+            <a:srgbClr val="0D1B2A"/>
+          </a:solidFill>
+          <a:ln w="12700">
+            <a:solidFill>
+              <a:srgbClr val="0A9396"/>
+            </a:solidFill>
+            <a:prstDash val="solid"/>
+          </a:ln>
+          <a:effectLst>
+            <a:outerShdw blurRad="101600" dist="38100" dir="8100000" sx="100000" sy="100000" kx="0" ky="0" algn="bl" rotWithShape="0">
+              <a:srgbClr val="000000">
+                <a:alpha val="13000"/>
+              </a:srgbClr>
+            </a:outerShdw>
+          </a:effectLst>
+        </p:spPr>
+      </p:sp>
+      <p:sp>
+        <p:nvSpPr>
+          <p:cNvPr id="488913096" name="Text 20"/>
+          <p:cNvSpPr/>
+          <p:nvPr/>
+        </p:nvSpPr>
+        <p:spPr bwMode="auto">
+          <a:xfrm>
+            <a:off x="3904488" y="1051560"/>
+            <a:ext cx="1417320" cy="347472"/>
+          </a:xfrm>
+          <a:prstGeom prst="rect">
+            <a:avLst/>
+          </a:prstGeom>
+          <a:noFill/>
+          <a:ln/>
+        </p:spPr>
+        <p:txBody>
+          <a:bodyPr wrap="square" rtlCol="0" anchor="ctr"/>
+          <a:lstStyle/>
+          <a:p>
+            <a:pPr marL="0" indent="0" algn="ctr">
+              <a:buNone/>
+              <a:defRPr/>
+            </a:pPr>
+            <a:r>
+              <a:rPr lang="en-US" sz="1100" b="1">
+                <a:solidFill>
+                  <a:srgbClr val="94D2BD"/>
+                </a:solidFill>
+              </a:rPr>
+              <a:t>Hyperparameter Tuning</a:t>
+            </a:r>
+            <a:endParaRPr lang="en-US" sz="1100"/>
+          </a:p>
+        </p:txBody>
+      </p:sp>
+      <p:sp>
+        <p:nvSpPr>
+          <p:cNvPr id="1393529062" name="Text 21"/>
+          <p:cNvSpPr/>
+          <p:nvPr/>
+        </p:nvSpPr>
+        <p:spPr bwMode="auto">
+          <a:xfrm>
+            <a:off x="3904488" y="1417320"/>
+            <a:ext cx="1417320" cy="822960"/>
+          </a:xfrm>
+          <a:prstGeom prst="rect">
+            <a:avLst/>
+          </a:prstGeom>
+          <a:noFill/>
+          <a:ln/>
+        </p:spPr>
+        <p:txBody>
+          <a:bodyPr wrap="square" rtlCol="0" anchor="t"/>
+          <a:lstStyle/>
+          <a:p>
+            <a:pPr marL="0" indent="0" algn="ctr">
+              <a:buNone/>
+              <a:defRPr/>
+            </a:pPr>
+            <a:r>
+              <a:rPr lang="en-US" sz="900">
+                <a:solidFill>
+                  <a:srgbClr val="FFFFFF"/>
+                </a:solidFill>
+              </a:rPr>
+              <a:t>Apply Bayesian optimization or Optuna for more principled model selection beyond default parameters.</a:t>
+            </a:r>
+            <a:endParaRPr lang="en-US" sz="900"/>
+          </a:p>
+        </p:txBody>
+      </p:sp>
+      <p:sp>
+        <p:nvSpPr>
+          <p:cNvPr id="77069323" name="Shape 22"/>
+          <p:cNvSpPr/>
+          <p:nvPr/>
+        </p:nvSpPr>
+        <p:spPr bwMode="auto">
+          <a:xfrm>
+            <a:off x="4379976" y="2331720"/>
+            <a:ext cx="36576" cy="109728"/>
+          </a:xfrm>
+          <a:prstGeom prst="rect">
+            <a:avLst/>
+          </a:prstGeom>
+          <a:solidFill>
+            <a:srgbClr val="94D2BD"/>
+          </a:solidFill>
+          <a:ln w="12700">
+            <a:solidFill>
+              <a:srgbClr val="94D2BD"/>
+            </a:solidFill>
+            <a:prstDash val="solid"/>
+          </a:ln>
+        </p:spPr>
+      </p:sp>
+      <p:sp>
+        <p:nvSpPr>
+          <p:cNvPr id="1952525902" name="Shape 23"/>
+          <p:cNvSpPr/>
+          <p:nvPr/>
+        </p:nvSpPr>
+        <p:spPr bwMode="auto">
+          <a:xfrm>
+            <a:off x="5952744" y="2304288"/>
+            <a:ext cx="228600" cy="228600"/>
+          </a:xfrm>
+          <a:prstGeom prst="ellipse">
+            <a:avLst/>
+          </a:prstGeom>
+          <a:solidFill>
+            <a:srgbClr val="0A9396"/>
+          </a:solidFill>
+          <a:ln w="12700">
+            <a:solidFill>
+              <a:srgbClr val="0A9396"/>
+            </a:solidFill>
+            <a:prstDash val="solid"/>
+          </a:ln>
+        </p:spPr>
+      </p:sp>
+      <p:sp>
+        <p:nvSpPr>
+          <p:cNvPr id="22625435" name="Shape 24"/>
+          <p:cNvSpPr/>
+          <p:nvPr/>
+        </p:nvSpPr>
+        <p:spPr bwMode="auto">
+          <a:xfrm>
+            <a:off x="5522976" y="2834640"/>
+            <a:ext cx="1508759" cy="1417320"/>
+          </a:xfrm>
+          <a:prstGeom prst="rect">
+            <a:avLst/>
+          </a:prstGeom>
+          <a:solidFill>
+            <a:srgbClr val="0D1B2A"/>
+          </a:solidFill>
+          <a:ln w="12700">
+            <a:solidFill>
+              <a:srgbClr val="0A9396"/>
+            </a:solidFill>
+            <a:prstDash val="solid"/>
+          </a:ln>
+          <a:effectLst>
+            <a:outerShdw blurRad="101600" dist="38100" dir="8100000" sx="100000" sy="100000" kx="0" ky="0" algn="bl" rotWithShape="0">
+              <a:srgbClr val="000000">
+                <a:alpha val="13000"/>
+              </a:srgbClr>
+            </a:outerShdw>
+          </a:effectLst>
+        </p:spPr>
+      </p:sp>
+      <p:sp>
+        <p:nvSpPr>
+          <p:cNvPr id="793212511" name="Text 25"/>
+          <p:cNvSpPr/>
+          <p:nvPr/>
+        </p:nvSpPr>
+        <p:spPr bwMode="auto">
+          <a:xfrm>
+            <a:off x="5568696" y="2926080"/>
+            <a:ext cx="1417320" cy="347472"/>
+          </a:xfrm>
+          <a:prstGeom prst="rect">
+            <a:avLst/>
+          </a:prstGeom>
+          <a:noFill/>
+          <a:ln/>
+        </p:spPr>
+        <p:txBody>
+          <a:bodyPr wrap="square" rtlCol="0" anchor="ctr"/>
+          <a:lstStyle/>
+          <a:p>
+            <a:pPr marL="0" indent="0" algn="ctr">
+              <a:buNone/>
+              <a:defRPr/>
+            </a:pPr>
+            <a:r>
+              <a:rPr lang="en-US" sz="1100" b="1">
+                <a:solidFill>
+                  <a:srgbClr val="94D2BD"/>
+                </a:solidFill>
+              </a:rPr>
+              <a:t>Explainability</a:t>
+            </a:r>
+            <a:endParaRPr lang="en-US" sz="1100"/>
+          </a:p>
+        </p:txBody>
+      </p:sp>
+      <p:sp>
+        <p:nvSpPr>
+          <p:cNvPr id="311740227" name="Text 26"/>
+          <p:cNvSpPr/>
+          <p:nvPr/>
+        </p:nvSpPr>
+        <p:spPr bwMode="auto">
+          <a:xfrm>
+            <a:off x="5568696" y="3291840"/>
+            <a:ext cx="1417320" cy="868680"/>
+          </a:xfrm>
+          <a:prstGeom prst="rect">
+            <a:avLst/>
+          </a:prstGeom>
+          <a:noFill/>
+          <a:ln/>
+        </p:spPr>
+        <p:txBody>
+          <a:bodyPr wrap="square" rtlCol="0" anchor="t"/>
+          <a:lstStyle/>
+          <a:p>
+            <a:pPr marL="0" indent="0" algn="ctr">
+              <a:buNone/>
+              <a:defRPr/>
+            </a:pPr>
+            <a:r>
+              <a:rPr lang="en-US" sz="900">
+                <a:solidFill>
+                  <a:srgbClr val="FFFFFF"/>
+                </a:solidFill>
+              </a:rPr>
+              <a:t>Integrate SHAP values for per-patient explanations — critical for clinical adoption and regulatory requirements.</a:t>
+            </a:r>
+            <a:endParaRPr lang="en-US" sz="900"/>
+          </a:p>
+        </p:txBody>
+      </p:sp>
+      <p:sp>
+        <p:nvSpPr>
+          <p:cNvPr id="1321096353" name="Shape 27"/>
+          <p:cNvSpPr/>
+          <p:nvPr/>
+        </p:nvSpPr>
+        <p:spPr bwMode="auto">
+          <a:xfrm>
+            <a:off x="6044184" y="2624328"/>
+            <a:ext cx="36576" cy="210312"/>
+          </a:xfrm>
+          <a:prstGeom prst="rect">
+            <a:avLst/>
+          </a:prstGeom>
+          <a:solidFill>
+            <a:srgbClr val="94D2BD"/>
+          </a:solidFill>
+          <a:ln w="12700">
+            <a:solidFill>
+              <a:srgbClr val="94D2BD"/>
+            </a:solidFill>
+            <a:prstDash val="solid"/>
+          </a:ln>
+        </p:spPr>
+      </p:sp>
+      <p:sp>
+        <p:nvSpPr>
+          <p:cNvPr id="392101977" name="Shape 28"/>
+          <p:cNvSpPr/>
+          <p:nvPr/>
+        </p:nvSpPr>
+        <p:spPr bwMode="auto">
+          <a:xfrm>
+            <a:off x="7616952" y="2304288"/>
+            <a:ext cx="228600" cy="228600"/>
+          </a:xfrm>
+          <a:prstGeom prst="ellipse">
+            <a:avLst/>
+          </a:prstGeom>
+          <a:solidFill>
+            <a:srgbClr val="0A9396"/>
+          </a:solidFill>
+          <a:ln w="12700">
+            <a:solidFill>
+              <a:srgbClr val="0A9396"/>
+            </a:solidFill>
+            <a:prstDash val="solid"/>
+          </a:ln>
+        </p:spPr>
+      </p:sp>
+      <p:sp>
+        <p:nvSpPr>
+          <p:cNvPr id="1528212615" name="Shape 29"/>
+          <p:cNvSpPr/>
+          <p:nvPr/>
+        </p:nvSpPr>
+        <p:spPr bwMode="auto">
+          <a:xfrm>
+            <a:off x="7187184" y="960120"/>
+            <a:ext cx="1508759" cy="1371600"/>
+          </a:xfrm>
+          <a:prstGeom prst="rect">
+            <a:avLst/>
+          </a:prstGeom>
+          <a:solidFill>
+            <a:srgbClr val="0D1B2A"/>
+          </a:solidFill>
+          <a:ln w="12700">
+            <a:solidFill>
+              <a:srgbClr val="0A9396"/>
+            </a:solidFill>
+            <a:prstDash val="solid"/>
+          </a:ln>
+          <a:effectLst>
+            <a:outerShdw blurRad="101600" dist="38100" dir="8100000" sx="100000" sy="100000" kx="0" ky="0" algn="bl" rotWithShape="0">
+              <a:srgbClr val="000000">
+                <a:alpha val="13000"/>
+              </a:srgbClr>
+            </a:outerShdw>
+          </a:effectLst>
+        </p:spPr>
+      </p:sp>
+      <p:sp>
+        <p:nvSpPr>
+          <p:cNvPr id="2078643921" name="Text 30"/>
+          <p:cNvSpPr/>
+          <p:nvPr/>
+        </p:nvSpPr>
+        <p:spPr bwMode="auto">
+          <a:xfrm>
+            <a:off x="7232904" y="1051560"/>
+            <a:ext cx="1417320" cy="347472"/>
+          </a:xfrm>
+          <a:prstGeom prst="rect">
+            <a:avLst/>
+          </a:prstGeom>
+          <a:noFill/>
+          <a:ln/>
+        </p:spPr>
+        <p:txBody>
+          <a:bodyPr wrap="square" rtlCol="0" anchor="ctr"/>
+          <a:lstStyle/>
+          <a:p>
+            <a:pPr marL="0" indent="0" algn="ctr">
+              <a:buNone/>
+              <a:defRPr/>
+            </a:pPr>
+            <a:r>
+              <a:rPr lang="en-US" sz="1100" b="1">
+                <a:solidFill>
+                  <a:srgbClr val="94D2BD"/>
+                </a:solidFill>
+              </a:rPr>
+              <a:t>Real-World Deployment</a:t>
+            </a:r>
+            <a:endParaRPr lang="en-US" sz="1100"/>
+          </a:p>
+        </p:txBody>
+      </p:sp>
+      <p:sp>
+        <p:nvSpPr>
+          <p:cNvPr id="39235183" name="Text 31"/>
+          <p:cNvSpPr/>
+          <p:nvPr/>
+        </p:nvSpPr>
+        <p:spPr bwMode="auto">
+          <a:xfrm>
+            <a:off x="7232904" y="1417320"/>
+            <a:ext cx="1417320" cy="822960"/>
+          </a:xfrm>
+          <a:prstGeom prst="rect">
+            <a:avLst/>
+          </a:prstGeom>
+          <a:noFill/>
+          <a:ln/>
+        </p:spPr>
+        <p:txBody>
+          <a:bodyPr wrap="square" rtlCol="0" anchor="t"/>
+          <a:lstStyle/>
+          <a:p>
+            <a:pPr marL="0" indent="0" algn="ctr">
+              <a:buNone/>
+              <a:defRPr/>
+            </a:pPr>
+            <a:r>
+              <a:rPr lang="en-US" sz="900">
+                <a:solidFill>
+                  <a:srgbClr val="FFFFFF"/>
+                </a:solidFill>
+              </a:rPr>
+              <a:t>Wrap the best model in a clinical screening tool with a user-facing interface and continuous model monitoring.</a:t>
+            </a:r>
+            <a:endParaRPr lang="en-US" sz="900"/>
+          </a:p>
+        </p:txBody>
+      </p:sp>
+      <p:sp>
+        <p:nvSpPr>
+          <p:cNvPr id="1743020046" name="Shape 32"/>
+          <p:cNvSpPr/>
+          <p:nvPr/>
+        </p:nvSpPr>
+        <p:spPr bwMode="auto">
+          <a:xfrm>
+            <a:off x="7708392" y="2331720"/>
+            <a:ext cx="36576" cy="109728"/>
+          </a:xfrm>
+          <a:prstGeom prst="rect">
+            <a:avLst/>
+          </a:prstGeom>
+          <a:solidFill>
+            <a:srgbClr val="94D2BD"/>
+          </a:solidFill>
+          <a:ln w="12700">
+            <a:solidFill>
+              <a:srgbClr val="94D2BD"/>
+            </a:solidFill>
+            <a:prstDash val="solid"/>
+          </a:ln>
+        </p:spPr>
+      </p:sp>
+    </p:spTree>
+  </p:cSld>
+  <p:clrMapOvr>
+    <a:masterClrMapping/>
+  </p:clrMapOvr>
+  <mc:AlternateContent xmlns:mc="http://schemas.openxmlformats.org/markup-compatibility/2006">
+    <mc:Choice xmlns:p159="http://schemas.microsoft.com/office/powerpoint/2015/09/main" xmlns:p14="http://schemas.microsoft.com/office/powerpoint/2010/main" Requires="p159">
+      <p:transition p14:dur="2000" advClick="1"/>
+    </mc:Choice>
+    <mc:Fallback>
+      <p:transition advClick="1"/>
+    </mc:Fallback>
+  </mc:AlternateContent>
+</p:sld>
+</file>
+
+<file path=ppt/slides/slide13.xml><?xml version="1.0" encoding="utf-8"?>
+<p:sld xmlns:a="http://schemas.openxmlformats.org/drawingml/2006/main" xmlns:r="http://schemas.openxmlformats.org/officeDocument/2006/relationships" xmlns:p="http://schemas.openxmlformats.org/presentationml/2006/main" xmlns:m="http://schemas.openxmlformats.org/officeDocument/2006/math" xmlns:w="http://schemas.openxmlformats.org/wordprocessingml/2006/main" xmlns:mc="http://schemas.openxmlformats.org/markup-compatibility/2006" showMasterPhAnim="0" showMasterSp="1" show="1">
+  <p:cSld name="Slide 9">
+    <p:bg>
+      <p:bgPr shadeToTitle="0">
+        <a:solidFill>
+          <a:srgbClr val="0D1B2A"/>
+        </a:solidFill>
+      </p:bgPr>
+    </p:bg>
+    <p:spTree>
+      <p:nvGrpSpPr>
+        <p:cNvPr id="1" name=""/>
+        <p:cNvGrpSpPr/>
+        <p:nvPr/>
+      </p:nvGrpSpPr>
+      <p:grpSpPr bwMode="auto">
+        <a:xfrm>
+          <a:off x="0" y="0"/>
+          <a:ext cx="0" cy="0"/>
+          <a:chOff x="0" y="0"/>
+          <a:chExt cx="0" cy="0"/>
+        </a:xfrm>
+      </p:grpSpPr>
+      <p:sp>
+        <p:nvSpPr>
+          <p:cNvPr id="170775947" name="Shape 0"/>
+          <p:cNvSpPr/>
+          <p:nvPr/>
+        </p:nvSpPr>
+        <p:spPr bwMode="auto">
+          <a:xfrm>
+            <a:off x="0" y="0"/>
+            <a:ext cx="228600" cy="5143500"/>
+          </a:xfrm>
+          <a:prstGeom prst="rect">
+            <a:avLst/>
+          </a:prstGeom>
+          <a:solidFill>
+            <a:srgbClr val="0A9396"/>
+          </a:solidFill>
+          <a:ln w="12700">
+            <a:solidFill>
+              <a:srgbClr val="0A9396"/>
+            </a:solidFill>
+            <a:prstDash val="solid"/>
+          </a:ln>
+        </p:spPr>
+      </p:sp>
+      <p:sp>
+        <p:nvSpPr>
+          <p:cNvPr id="830134351" name="Shape 1"/>
+          <p:cNvSpPr/>
+          <p:nvPr/>
+        </p:nvSpPr>
+        <p:spPr bwMode="auto">
+          <a:xfrm>
+            <a:off x="6858000" y="-457200"/>
+            <a:ext cx="2743200" cy="2743200"/>
+          </a:xfrm>
+          <a:prstGeom prst="ellipse">
+            <a:avLst/>
+          </a:prstGeom>
+          <a:solidFill>
+            <a:srgbClr val="0A9396">
+              <a:alpha val="15000"/>
+            </a:srgbClr>
+          </a:solidFill>
+          <a:ln w="12700">
+            <a:solidFill>
+              <a:srgbClr val="0A9396">
+                <a:alpha val="15000"/>
+              </a:srgbClr>
+            </a:solidFill>
+            <a:prstDash val="solid"/>
+          </a:ln>
+        </p:spPr>
+      </p:sp>
+      <p:sp>
+        <p:nvSpPr>
+          <p:cNvPr id="807555721" name="Shape 2"/>
+          <p:cNvSpPr/>
+          <p:nvPr/>
+        </p:nvSpPr>
+        <p:spPr bwMode="auto">
+          <a:xfrm>
+            <a:off x="7498080" y="3200400"/>
+            <a:ext cx="1645920" cy="1645920"/>
+          </a:xfrm>
+          <a:prstGeom prst="ellipse">
+            <a:avLst/>
+          </a:prstGeom>
+          <a:solidFill>
+            <a:srgbClr val="94D2BD">
+              <a:alpha val="20000"/>
+            </a:srgbClr>
+          </a:solidFill>
+          <a:ln w="12700">
+            <a:solidFill>
+              <a:srgbClr val="94D2BD">
+                <a:alpha val="20000"/>
+              </a:srgbClr>
+            </a:solidFill>
+            <a:prstDash val="solid"/>
+          </a:ln>
+        </p:spPr>
+      </p:sp>
+      <p:sp>
+        <p:nvSpPr>
+          <p:cNvPr id="1653195881" name="Text 3"/>
+          <p:cNvSpPr/>
+          <p:nvPr/>
+        </p:nvSpPr>
+        <p:spPr bwMode="auto">
+          <a:xfrm>
+            <a:off x="502920" y="274320"/>
+            <a:ext cx="411480" cy="411480"/>
+          </a:xfrm>
+          <a:prstGeom prst="rect">
+            <a:avLst/>
+          </a:prstGeom>
+          <a:noFill/>
+          <a:ln/>
+        </p:spPr>
+        <p:txBody>
+          <a:bodyPr wrap="square" rtlCol="0" anchor="ctr"/>
+          <a:lstStyle/>
+          <a:p>
+            <a:pPr marL="0" indent="0" algn="ctr">
+              <a:buNone/>
+              <a:defRPr/>
+            </a:pPr>
+            <a:r>
+              <a:rPr lang="en-US" sz="1800" b="1">
+                <a:solidFill>
+                  <a:srgbClr val="FFFFFF"/>
+                </a:solidFill>
+              </a:rPr>
+              <a:t>8</a:t>
+            </a:r>
+            <a:endParaRPr lang="en-US" sz="1800"/>
+          </a:p>
+        </p:txBody>
+      </p:sp>
+      <p:sp>
+        <p:nvSpPr>
+          <p:cNvPr id="581814573" name="Shape 4"/>
+          <p:cNvSpPr/>
+          <p:nvPr/>
+        </p:nvSpPr>
+        <p:spPr bwMode="auto">
+          <a:xfrm>
+            <a:off x="502920" y="274320"/>
+            <a:ext cx="411480" cy="411480"/>
+          </a:xfrm>
+          <a:prstGeom prst="rect">
+            <a:avLst/>
+          </a:prstGeom>
+          <a:solidFill>
+            <a:srgbClr val="0A9396"/>
+          </a:solidFill>
+          <a:ln w="12700">
+            <a:solidFill>
+              <a:srgbClr val="0A9396"/>
+            </a:solidFill>
+            <a:prstDash val="solid"/>
+          </a:ln>
+        </p:spPr>
+      </p:sp>
+      <p:sp>
+        <p:nvSpPr>
+          <p:cNvPr id="27277483" name="Text 5"/>
+          <p:cNvSpPr/>
+          <p:nvPr/>
+        </p:nvSpPr>
+        <p:spPr bwMode="auto">
+          <a:xfrm>
+            <a:off x="502920" y="274320"/>
+            <a:ext cx="411480" cy="411480"/>
+          </a:xfrm>
+          <a:prstGeom prst="rect">
+            <a:avLst/>
+          </a:prstGeom>
+          <a:noFill/>
+          <a:ln/>
+        </p:spPr>
+        <p:txBody>
+          <a:bodyPr wrap="square" lIns="0" tIns="0" rIns="0" bIns="0" rtlCol="0" anchor="ctr"/>
+          <a:lstStyle/>
+          <a:p>
+            <a:pPr marL="0" indent="0" algn="ctr">
+              <a:buNone/>
+              <a:defRPr/>
+            </a:pPr>
+            <a:r>
+              <a:rPr lang="en-US" sz="1600" b="1">
+                <a:solidFill>
+                  <a:srgbClr val="FFFFFF"/>
+                </a:solidFill>
+              </a:rPr>
+              <a:t>12</a:t>
+            </a:r>
+            <a:endParaRPr lang="en-US" sz="1600"/>
+          </a:p>
+        </p:txBody>
+      </p:sp>
+      <p:sp>
+        <p:nvSpPr>
+          <p:cNvPr id="1910750858" name="Text 6"/>
+          <p:cNvSpPr/>
+          <p:nvPr/>
+        </p:nvSpPr>
+        <p:spPr bwMode="auto">
+          <a:xfrm>
+            <a:off x="1210291" y="274320"/>
+            <a:ext cx="5486400" cy="548640"/>
+          </a:xfrm>
+          <a:prstGeom prst="rect">
+            <a:avLst/>
+          </a:prstGeom>
+          <a:noFill/>
+          <a:ln/>
+        </p:spPr>
+        <p:txBody>
+          <a:bodyPr wrap="square" rtlCol="0" anchor="ctr"/>
+          <a:lstStyle/>
+          <a:p>
+            <a:pPr marL="0" indent="0">
+              <a:buNone/>
+              <a:defRPr/>
+            </a:pPr>
+            <a:r>
+              <a:rPr lang="en-US" sz="3000" b="1">
+                <a:solidFill>
+                  <a:srgbClr val="FFFFFF"/>
+                </a:solidFill>
+              </a:rPr>
+              <a:t>Conclusion</a:t>
+            </a:r>
+            <a:endParaRPr lang="en-US" sz="3000"/>
+          </a:p>
+        </p:txBody>
+      </p:sp>
+      <p:sp>
+        <p:nvSpPr>
+          <p:cNvPr id="1256463179" name="Shape 7"/>
+          <p:cNvSpPr/>
+          <p:nvPr/>
+        </p:nvSpPr>
+        <p:spPr bwMode="auto">
+          <a:xfrm>
+            <a:off x="502920" y="960120"/>
+            <a:ext cx="8046720" cy="1051560"/>
+          </a:xfrm>
+          <a:prstGeom prst="rect">
+            <a:avLst/>
+          </a:prstGeom>
+          <a:solidFill>
+            <a:srgbClr val="122636"/>
+          </a:solidFill>
+          <a:ln w="12700">
+            <a:solidFill>
+              <a:srgbClr val="0A9396"/>
+            </a:solidFill>
+            <a:prstDash val="solid"/>
+          </a:ln>
+          <a:effectLst>
+            <a:outerShdw blurRad="101600" dist="38100" dir="8100000" sx="100000" sy="100000" kx="0" ky="0" algn="bl" rotWithShape="0">
+              <a:srgbClr val="000000">
+                <a:alpha val="13000"/>
+              </a:srgbClr>
+            </a:outerShdw>
+          </a:effectLst>
+        </p:spPr>
+      </p:sp>
+      <p:sp>
+        <p:nvSpPr>
+          <p:cNvPr id="331445752" name="Shape 8"/>
+          <p:cNvSpPr/>
+          <p:nvPr/>
+        </p:nvSpPr>
+        <p:spPr bwMode="auto">
+          <a:xfrm>
+            <a:off x="502920" y="960120"/>
+            <a:ext cx="91440" cy="1051560"/>
+          </a:xfrm>
+          <a:prstGeom prst="rect">
+            <a:avLst/>
+          </a:prstGeom>
+          <a:solidFill>
+            <a:srgbClr val="0A9396"/>
+          </a:solidFill>
+          <a:ln w="12700">
+            <a:solidFill>
+              <a:srgbClr val="0A9396"/>
+            </a:solidFill>
+            <a:prstDash val="solid"/>
+          </a:ln>
+        </p:spPr>
+      </p:sp>
+      <p:sp>
+        <p:nvSpPr>
+          <p:cNvPr id="1721114658" name="Text 9"/>
+          <p:cNvSpPr/>
+          <p:nvPr/>
+        </p:nvSpPr>
+        <p:spPr bwMode="auto">
+          <a:xfrm>
+            <a:off x="731520" y="1051560"/>
+            <a:ext cx="7589520" cy="274320"/>
+          </a:xfrm>
+          <a:prstGeom prst="rect">
+            <a:avLst/>
+          </a:prstGeom>
+          <a:noFill/>
+          <a:ln/>
+        </p:spPr>
+        <p:txBody>
+          <a:bodyPr wrap="square" rtlCol="0" anchor="ctr"/>
+          <a:lstStyle/>
+          <a:p>
+            <a:pPr marL="0" indent="0">
+              <a:buNone/>
+              <a:defRPr/>
+            </a:pPr>
+            <a:r>
+              <a:rPr lang="en-US" sz="1300" b="1">
+                <a:solidFill>
+                  <a:srgbClr val="94D2BD"/>
+                </a:solidFill>
+              </a:rPr>
+              <a:t>What Was Built</a:t>
+            </a:r>
+            <a:endParaRPr lang="en-US" sz="1300"/>
+          </a:p>
+        </p:txBody>
+      </p:sp>
+      <p:sp>
+        <p:nvSpPr>
+          <p:cNvPr id="367469686" name="Text 10"/>
+          <p:cNvSpPr/>
+          <p:nvPr/>
+        </p:nvSpPr>
+        <p:spPr bwMode="auto">
+          <a:xfrm>
+            <a:off x="731520" y="1362455"/>
+            <a:ext cx="7589520" cy="566928"/>
+          </a:xfrm>
+          <a:prstGeom prst="rect">
+            <a:avLst/>
+          </a:prstGeom>
+          <a:noFill/>
+          <a:ln/>
+        </p:spPr>
+        <p:txBody>
+          <a:bodyPr wrap="square" rtlCol="0" anchor="t"/>
+          <a:lstStyle/>
+          <a:p>
+            <a:pPr marL="0" indent="0">
+              <a:buNone/>
+              <a:defRPr/>
+            </a:pPr>
+            <a:r>
+              <a:rPr lang="en-US" sz="1100">
+                <a:solidFill>
+                  <a:srgbClr val="FFFFFF"/>
+                </a:solidFill>
+              </a:rPr>
+              <a:t>A 3-class sleep disorder classifier using Random Forest and XGBoost on real-world lifestyle data. This achieved high accuracy with minimal preprocessing.</a:t>
+            </a:r>
+            <a:endParaRPr lang="en-US" sz="1100"/>
+          </a:p>
+        </p:txBody>
+      </p:sp>
+      <p:sp>
+        <p:nvSpPr>
+          <p:cNvPr id="1726907260" name="Shape 11"/>
+          <p:cNvSpPr/>
+          <p:nvPr/>
+        </p:nvSpPr>
+        <p:spPr bwMode="auto">
+          <a:xfrm>
+            <a:off x="502920" y="2194560"/>
+            <a:ext cx="8046720" cy="1051560"/>
+          </a:xfrm>
+          <a:prstGeom prst="rect">
+            <a:avLst/>
+          </a:prstGeom>
+          <a:solidFill>
+            <a:srgbClr val="122636"/>
+          </a:solidFill>
+          <a:ln w="12700">
+            <a:solidFill>
+              <a:srgbClr val="0A9396"/>
+            </a:solidFill>
+            <a:prstDash val="solid"/>
+          </a:ln>
+          <a:effectLst>
+            <a:outerShdw blurRad="101600" dist="38100" dir="8100000" sx="100000" sy="100000" kx="0" ky="0" algn="bl" rotWithShape="0">
+              <a:srgbClr val="000000">
+                <a:alpha val="13000"/>
+              </a:srgbClr>
+            </a:outerShdw>
+          </a:effectLst>
+        </p:spPr>
+      </p:sp>
+      <p:sp>
+        <p:nvSpPr>
+          <p:cNvPr id="1832982619" name="Shape 12"/>
+          <p:cNvSpPr/>
+          <p:nvPr/>
+        </p:nvSpPr>
+        <p:spPr bwMode="auto">
+          <a:xfrm>
+            <a:off x="502920" y="2194560"/>
+            <a:ext cx="91440" cy="1051560"/>
+          </a:xfrm>
+          <a:prstGeom prst="rect">
+            <a:avLst/>
+          </a:prstGeom>
+          <a:solidFill>
+            <a:srgbClr val="0A9396"/>
+          </a:solidFill>
+          <a:ln w="12700">
+            <a:solidFill>
+              <a:srgbClr val="0A9396"/>
+            </a:solidFill>
+            <a:prstDash val="solid"/>
+          </a:ln>
+        </p:spPr>
+      </p:sp>
+      <p:sp>
+        <p:nvSpPr>
+          <p:cNvPr id="1839721757" name="Text 13"/>
+          <p:cNvSpPr/>
+          <p:nvPr/>
+        </p:nvSpPr>
+        <p:spPr bwMode="auto">
+          <a:xfrm>
+            <a:off x="731520" y="2286000"/>
+            <a:ext cx="7589520" cy="274320"/>
+          </a:xfrm>
+          <a:prstGeom prst="rect">
+            <a:avLst/>
+          </a:prstGeom>
+          <a:noFill/>
+          <a:ln/>
+        </p:spPr>
+        <p:txBody>
+          <a:bodyPr wrap="square" rtlCol="0" anchor="ctr"/>
+          <a:lstStyle/>
+          <a:p>
+            <a:pPr marL="0" indent="0">
+              <a:buNone/>
+              <a:defRPr/>
+            </a:pPr>
+            <a:r>
+              <a:rPr lang="en-US" sz="1300" b="1">
+                <a:solidFill>
+                  <a:srgbClr val="94D2BD"/>
+                </a:solidFill>
+              </a:rPr>
+              <a:t>What We Learned</a:t>
+            </a:r>
+            <a:endParaRPr lang="en-US" sz="1300"/>
+          </a:p>
+        </p:txBody>
+      </p:sp>
+      <p:sp>
+        <p:nvSpPr>
+          <p:cNvPr id="1640162971" name="Text 14"/>
+          <p:cNvSpPr/>
+          <p:nvPr/>
+        </p:nvSpPr>
+        <p:spPr bwMode="auto">
+          <a:xfrm>
+            <a:off x="731520" y="2596896"/>
+            <a:ext cx="7589520" cy="566928"/>
+          </a:xfrm>
+          <a:prstGeom prst="rect">
+            <a:avLst/>
+          </a:prstGeom>
+          <a:noFill/>
+          <a:ln/>
+        </p:spPr>
+        <p:txBody>
+          <a:bodyPr wrap="square" rtlCol="0" anchor="t"/>
+          <a:lstStyle/>
+          <a:p>
+            <a:pPr marL="0" indent="0">
+              <a:buNone/>
+              <a:defRPr/>
+            </a:pPr>
+            <a:r>
+              <a:rPr lang="en-US" sz="1100">
+                <a:solidFill>
+                  <a:srgbClr val="FFFFFF"/>
+                </a:solidFill>
+              </a:rPr>
+              <a:t>Tree-based models are effective and interpretable for tabular health data. Feature engineering (BP parsing) and stratified splits were key to reliable results.</a:t>
+            </a:r>
+            <a:endParaRPr lang="en-US" sz="1100"/>
+          </a:p>
+        </p:txBody>
+      </p:sp>
+      <p:sp>
+        <p:nvSpPr>
+          <p:cNvPr id="789341258" name="Shape 15"/>
+          <p:cNvSpPr/>
+          <p:nvPr/>
+        </p:nvSpPr>
+        <p:spPr bwMode="auto">
+          <a:xfrm>
+            <a:off x="502920" y="3429000"/>
+            <a:ext cx="8046720" cy="1051560"/>
+          </a:xfrm>
+          <a:prstGeom prst="rect">
+            <a:avLst/>
+          </a:prstGeom>
+          <a:solidFill>
+            <a:srgbClr val="122636"/>
+          </a:solidFill>
+          <a:ln w="12700">
+            <a:solidFill>
+              <a:srgbClr val="0A9396"/>
+            </a:solidFill>
+            <a:prstDash val="solid"/>
+          </a:ln>
+          <a:effectLst>
+            <a:outerShdw blurRad="101600" dist="38100" dir="8100000" sx="100000" sy="100000" kx="0" ky="0" algn="bl" rotWithShape="0">
+              <a:srgbClr val="000000">
+                <a:alpha val="13000"/>
+              </a:srgbClr>
+            </a:outerShdw>
+          </a:effectLst>
+        </p:spPr>
+      </p:sp>
+      <p:sp>
+        <p:nvSpPr>
+          <p:cNvPr id="259610453" name="Shape 16"/>
+          <p:cNvSpPr/>
+          <p:nvPr/>
+        </p:nvSpPr>
+        <p:spPr bwMode="auto">
+          <a:xfrm>
+            <a:off x="502920" y="3429000"/>
+            <a:ext cx="91440" cy="1051560"/>
+          </a:xfrm>
+          <a:prstGeom prst="rect">
+            <a:avLst/>
+          </a:prstGeom>
+          <a:solidFill>
+            <a:srgbClr val="0A9396"/>
+          </a:solidFill>
+          <a:ln w="12700">
+            <a:solidFill>
+              <a:srgbClr val="0A9396"/>
+            </a:solidFill>
+            <a:prstDash val="solid"/>
+          </a:ln>
+        </p:spPr>
+      </p:sp>
+      <p:sp>
+        <p:nvSpPr>
+          <p:cNvPr id="1734032101" name="Text 17"/>
+          <p:cNvSpPr/>
+          <p:nvPr/>
+        </p:nvSpPr>
+        <p:spPr bwMode="auto">
+          <a:xfrm>
+            <a:off x="731520" y="3520440"/>
+            <a:ext cx="7589520" cy="274320"/>
+          </a:xfrm>
+          <a:prstGeom prst="rect">
+            <a:avLst/>
+          </a:prstGeom>
+          <a:noFill/>
+          <a:ln/>
+        </p:spPr>
+        <p:txBody>
+          <a:bodyPr wrap="square" rtlCol="0" anchor="ctr"/>
+          <a:lstStyle/>
+          <a:p>
+            <a:pPr marL="0" indent="0">
+              <a:buNone/>
+              <a:defRPr/>
+            </a:pPr>
+            <a:r>
+              <a:rPr lang="en-US" sz="1300" b="1">
+                <a:solidFill>
+                  <a:srgbClr val="94D2BD"/>
+                </a:solidFill>
+              </a:rPr>
+              <a:t>Broader Impact</a:t>
+            </a:r>
+            <a:endParaRPr lang="en-US" sz="1300"/>
+          </a:p>
+        </p:txBody>
+      </p:sp>
+      <p:sp>
+        <p:nvSpPr>
+          <p:cNvPr id="1693756344" name="Text 18"/>
+          <p:cNvSpPr/>
+          <p:nvPr/>
+        </p:nvSpPr>
+        <p:spPr bwMode="auto">
+          <a:xfrm>
+            <a:off x="731520" y="3831336"/>
+            <a:ext cx="7589520" cy="566928"/>
+          </a:xfrm>
+          <a:prstGeom prst="rect">
+            <a:avLst/>
+          </a:prstGeom>
+          <a:noFill/>
+          <a:ln/>
+        </p:spPr>
+        <p:txBody>
+          <a:bodyPr wrap="square" rtlCol="0" anchor="t"/>
+          <a:lstStyle/>
+          <a:p>
+            <a:pPr marL="0" indent="0">
+              <a:buNone/>
+              <a:defRPr/>
+            </a:pPr>
+            <a:r>
+              <a:rPr lang="en-US" sz="1100">
+                <a:solidFill>
+                  <a:srgbClr val="FFFFFF"/>
+                </a:solidFill>
+              </a:rPr>
+              <a:t>Fairness auditing ensures equitable predictions across gender and BMI groups, a necessary step for any real clinical screening tool.</a:t>
+            </a:r>
+            <a:endParaRPr lang="en-US" sz="1100"/>
+          </a:p>
+        </p:txBody>
+      </p:sp>
+      <p:sp>
+        <p:nvSpPr>
+          <p:cNvPr id="380375401" name="Text 19"/>
+          <p:cNvSpPr/>
+          <p:nvPr/>
+        </p:nvSpPr>
+        <p:spPr bwMode="auto">
+          <a:xfrm>
+            <a:off x="502920" y="4663440"/>
+            <a:ext cx="8229600" cy="320040"/>
+          </a:xfrm>
+          <a:prstGeom prst="rect">
+            <a:avLst/>
+          </a:prstGeom>
+          <a:noFill/>
+          <a:ln/>
+        </p:spPr>
+        <p:txBody>
+          <a:bodyPr wrap="square" rtlCol="0" anchor="ctr"/>
+          <a:lstStyle/>
+          <a:p>
+            <a:pPr marL="0" indent="0" algn="ctr">
+              <a:buNone/>
+              <a:defRPr/>
+            </a:pPr>
+            <a:r>
+              <a:rPr lang="en-US" sz="1200" i="1">
+                <a:solidFill>
+                  <a:srgbClr val="64748B"/>
+                </a:solidFill>
+              </a:rPr>
+              <a:t>Thank you  •  Questions welcome</a:t>
+            </a:r>
+            <a:endParaRPr lang="en-US" sz="1200"/>
           </a:p>
         </p:txBody>
       </p:sp>
@@ -1870,7 +5054,7 @@
       </p:grpSpPr>
       <p:sp>
         <p:nvSpPr>
-          <p:cNvPr id="881314097" name="Shape 0"/>
+          <p:cNvPr id="1363028164" name="Shape 0"/>
           <p:cNvSpPr/>
           <p:nvPr/>
         </p:nvSpPr>
@@ -1895,7 +5079,7 @@
       </p:sp>
       <p:sp>
         <p:nvSpPr>
-          <p:cNvPr id="498727791" name="Shape 1"/>
+          <p:cNvPr id="1924223804" name="Shape 1"/>
           <p:cNvSpPr/>
           <p:nvPr/>
         </p:nvSpPr>
@@ -1920,7 +5104,7 @@
       </p:sp>
       <p:sp>
         <p:nvSpPr>
-          <p:cNvPr id="431075186" name="Text 2"/>
+          <p:cNvPr id="1463613572" name="Text 2"/>
           <p:cNvSpPr/>
           <p:nvPr/>
         </p:nvSpPr>
@@ -1957,7 +5141,7 @@
       </p:sp>
       <p:sp>
         <p:nvSpPr>
-          <p:cNvPr id="1598249554" name="Text 3"/>
+          <p:cNvPr id="367633313" name="Text 3"/>
           <p:cNvSpPr/>
           <p:nvPr/>
         </p:nvSpPr>
@@ -1994,7 +5178,7 @@
       </p:sp>
       <p:sp>
         <p:nvSpPr>
-          <p:cNvPr id="1197562667" name="Shape 4"/>
+          <p:cNvPr id="823126169" name="Shape 4"/>
           <p:cNvSpPr/>
           <p:nvPr/>
         </p:nvSpPr>
@@ -2019,7 +5203,7 @@
       </p:sp>
       <p:sp>
         <p:nvSpPr>
-          <p:cNvPr id="1776128774" name="Text 5"/>
+          <p:cNvPr id="1638805675" name="Text 5"/>
           <p:cNvSpPr/>
           <p:nvPr/>
         </p:nvSpPr>
@@ -2056,7 +5240,7 @@
       </p:sp>
       <p:sp>
         <p:nvSpPr>
-          <p:cNvPr id="603039427" name="Text 6"/>
+          <p:cNvPr id="2059225458" name="Text 6"/>
           <p:cNvSpPr/>
           <p:nvPr/>
         </p:nvSpPr>
@@ -2085,7 +5269,7 @@
                   <a:srgbClr val="64748B"/>
                 </a:solidFill>
               </a:rPr>
-              <a:t>Why did we choose this problem?</a:t>
+              <a:t>Why did I choose this problem?</a:t>
             </a:r>
             <a:endParaRPr lang="en-US" sz="1000"/>
           </a:p>
@@ -2093,7 +5277,7 @@
       </p:sp>
       <p:sp>
         <p:nvSpPr>
-          <p:cNvPr id="944890960" name="Shape 7"/>
+          <p:cNvPr id="545289886" name="Shape 7"/>
           <p:cNvSpPr/>
           <p:nvPr/>
         </p:nvSpPr>
@@ -2125,7 +5309,7 @@
       </p:sp>
       <p:sp>
         <p:nvSpPr>
-          <p:cNvPr id="1902743823" name="Shape 8"/>
+          <p:cNvPr id="1139787009" name="Shape 8"/>
           <p:cNvSpPr/>
           <p:nvPr/>
         </p:nvSpPr>
@@ -2150,7 +5334,7 @@
       </p:sp>
       <p:sp>
         <p:nvSpPr>
-          <p:cNvPr id="1705414978" name="Text 9"/>
+          <p:cNvPr id="1322378352" name="Text 9"/>
           <p:cNvSpPr/>
           <p:nvPr/>
         </p:nvSpPr>
@@ -2187,7 +5371,7 @@
       </p:sp>
       <p:sp>
         <p:nvSpPr>
-          <p:cNvPr id="502601087" name="Text 10"/>
+          <p:cNvPr id="2054601158" name="Text 10"/>
           <p:cNvSpPr/>
           <p:nvPr/>
         </p:nvSpPr>
@@ -2224,7 +5408,7 @@
       </p:sp>
       <p:sp>
         <p:nvSpPr>
-          <p:cNvPr id="513527273" name="Text 11"/>
+          <p:cNvPr id="387890288" name="Text 11"/>
           <p:cNvSpPr/>
           <p:nvPr/>
         </p:nvSpPr>
@@ -2265,7 +5449,7 @@
       </p:sp>
       <p:sp>
         <p:nvSpPr>
-          <p:cNvPr id="1162784591" name="Shape 12"/>
+          <p:cNvPr id="955379924" name="Shape 12"/>
           <p:cNvSpPr/>
           <p:nvPr/>
         </p:nvSpPr>
@@ -2297,7 +5481,7 @@
       </p:sp>
       <p:sp>
         <p:nvSpPr>
-          <p:cNvPr id="2142209630" name="Shape 13"/>
+          <p:cNvPr id="298165390" name="Shape 13"/>
           <p:cNvSpPr/>
           <p:nvPr/>
         </p:nvSpPr>
@@ -2322,7 +5506,7 @@
       </p:sp>
       <p:sp>
         <p:nvSpPr>
-          <p:cNvPr id="1848921212" name="Text 14"/>
+          <p:cNvPr id="1259421501" name="Text 14"/>
           <p:cNvSpPr/>
           <p:nvPr/>
         </p:nvSpPr>
@@ -2359,7 +5543,7 @@
       </p:sp>
       <p:sp>
         <p:nvSpPr>
-          <p:cNvPr id="1377099430" name="Text 15"/>
+          <p:cNvPr id="257369487" name="Text 15"/>
           <p:cNvSpPr/>
           <p:nvPr/>
         </p:nvSpPr>
@@ -2396,7 +5580,7 @@
       </p:sp>
       <p:sp>
         <p:nvSpPr>
-          <p:cNvPr id="1519397182" name="Text 16"/>
+          <p:cNvPr id="403669486" name="Text 16"/>
           <p:cNvSpPr/>
           <p:nvPr/>
         </p:nvSpPr>
@@ -2433,7 +5617,7 @@
       </p:sp>
       <p:sp>
         <p:nvSpPr>
-          <p:cNvPr id="1719023630" name="Shape 17"/>
+          <p:cNvPr id="2138118207" name="Shape 17"/>
           <p:cNvSpPr/>
           <p:nvPr/>
         </p:nvSpPr>
@@ -2465,7 +5649,7 @@
       </p:sp>
       <p:sp>
         <p:nvSpPr>
-          <p:cNvPr id="138235345" name="Shape 18"/>
+          <p:cNvPr id="116846302" name="Shape 18"/>
           <p:cNvSpPr/>
           <p:nvPr/>
         </p:nvSpPr>
@@ -2490,7 +5674,7 @@
       </p:sp>
       <p:sp>
         <p:nvSpPr>
-          <p:cNvPr id="1324129184" name="Text 19"/>
+          <p:cNvPr id="686546855" name="Text 19"/>
           <p:cNvSpPr/>
           <p:nvPr/>
         </p:nvSpPr>
@@ -2527,7 +5711,7 @@
       </p:sp>
       <p:sp>
         <p:nvSpPr>
-          <p:cNvPr id="2077515353" name="Text 20"/>
+          <p:cNvPr id="563147766" name="Text 20"/>
           <p:cNvSpPr/>
           <p:nvPr/>
         </p:nvSpPr>
@@ -2564,7 +5748,7 @@
       </p:sp>
       <p:sp>
         <p:nvSpPr>
-          <p:cNvPr id="540088791" name="Text 21"/>
+          <p:cNvPr id="755187199" name="Text 21"/>
           <p:cNvSpPr/>
           <p:nvPr/>
         </p:nvSpPr>
@@ -2641,7 +5825,7 @@
       </p:grpSpPr>
       <p:sp>
         <p:nvSpPr>
-          <p:cNvPr id="384133417" name="Shape 0"/>
+          <p:cNvPr id="1036517541" name="Shape 0"/>
           <p:cNvSpPr/>
           <p:nvPr/>
         </p:nvSpPr>
@@ -2666,7 +5850,7 @@
       </p:sp>
       <p:sp>
         <p:nvSpPr>
-          <p:cNvPr id="107893993" name="Shape 1"/>
+          <p:cNvPr id="1211134225" name="Shape 1"/>
           <p:cNvSpPr/>
           <p:nvPr/>
         </p:nvSpPr>
@@ -2691,7 +5875,7 @@
       </p:sp>
       <p:sp>
         <p:nvSpPr>
-          <p:cNvPr id="2094963626" name="Text 2"/>
+          <p:cNvPr id="1643913494" name="Text 2"/>
           <p:cNvSpPr/>
           <p:nvPr/>
         </p:nvSpPr>
@@ -2728,7 +5912,7 @@
       </p:sp>
       <p:sp>
         <p:nvSpPr>
-          <p:cNvPr id="154640380" name="Text 3"/>
+          <p:cNvPr id="2053531547" name="Text 3"/>
           <p:cNvSpPr/>
           <p:nvPr/>
         </p:nvSpPr>
@@ -2765,7 +5949,7 @@
       </p:sp>
       <p:sp>
         <p:nvSpPr>
-          <p:cNvPr id="1696718535" name="Shape 4"/>
+          <p:cNvPr id="1322955604" name="Shape 4"/>
           <p:cNvSpPr/>
           <p:nvPr/>
         </p:nvSpPr>
@@ -2790,7 +5974,7 @@
       </p:sp>
       <p:sp>
         <p:nvSpPr>
-          <p:cNvPr id="1658734930" name="Text 5"/>
+          <p:cNvPr id="2096250746" name="Text 5"/>
           <p:cNvSpPr/>
           <p:nvPr/>
         </p:nvSpPr>
@@ -2827,7 +6011,7 @@
       </p:sp>
       <p:sp>
         <p:nvSpPr>
-          <p:cNvPr id="151915490" name="Text 6"/>
+          <p:cNvPr id="700060632" name="Text 6"/>
           <p:cNvSpPr/>
           <p:nvPr/>
         </p:nvSpPr>
@@ -2856,7 +6040,7 @@
                   <a:srgbClr val="64748B"/>
                 </a:solidFill>
               </a:rPr>
-              <a:t>What are we trying to solve?</a:t>
+              <a:t>What am I trying to solve?</a:t>
             </a:r>
             <a:endParaRPr lang="en-US" sz="1000"/>
           </a:p>
@@ -2864,7 +6048,7 @@
       </p:sp>
       <p:sp>
         <p:nvSpPr>
-          <p:cNvPr id="1654428945" name="Shape 7"/>
+          <p:cNvPr id="485544599" name="Shape 7"/>
           <p:cNvSpPr/>
           <p:nvPr/>
         </p:nvSpPr>
@@ -2896,7 +6080,7 @@
       </p:sp>
       <p:sp>
         <p:nvSpPr>
-          <p:cNvPr id="186618228" name="Text 8"/>
+          <p:cNvPr id="1876274214" name="Text 8"/>
           <p:cNvSpPr/>
           <p:nvPr/>
         </p:nvSpPr>
@@ -2933,7 +6117,7 @@
       </p:sp>
       <p:sp>
         <p:nvSpPr>
-          <p:cNvPr id="1529486065" name="Text 9"/>
+          <p:cNvPr id="574406767" name="Text 9"/>
           <p:cNvSpPr/>
           <p:nvPr/>
         </p:nvSpPr>
@@ -3068,7 +6252,7 @@
       </p:sp>
       <p:sp>
         <p:nvSpPr>
-          <p:cNvPr id="161248093" name="Shape 10"/>
+          <p:cNvPr id="2570336" name="Shape 10"/>
           <p:cNvSpPr/>
           <p:nvPr/>
         </p:nvSpPr>
@@ -3100,7 +6284,7 @@
       </p:sp>
       <p:sp>
         <p:nvSpPr>
-          <p:cNvPr id="1069507504" name="Text 11"/>
+          <p:cNvPr id="1407625541" name="Text 11"/>
           <p:cNvSpPr/>
           <p:nvPr/>
         </p:nvSpPr>
@@ -3137,7 +6321,7 @@
       </p:sp>
       <p:sp>
         <p:nvSpPr>
-          <p:cNvPr id="2004908859" name="Shape 12"/>
+          <p:cNvPr id="952870621" name="Shape 12"/>
           <p:cNvSpPr/>
           <p:nvPr/>
         </p:nvSpPr>
@@ -3162,7 +6346,7 @@
       </p:sp>
       <p:sp>
         <p:nvSpPr>
-          <p:cNvPr id="278273440" name="Text 13"/>
+          <p:cNvPr id="664156742" name="Text 13"/>
           <p:cNvSpPr/>
           <p:nvPr/>
         </p:nvSpPr>
@@ -3199,7 +6383,7 @@
       </p:sp>
       <p:sp>
         <p:nvSpPr>
-          <p:cNvPr id="68009494" name="Text 14"/>
+          <p:cNvPr id="851577544" name="Text 14"/>
           <p:cNvSpPr/>
           <p:nvPr/>
         </p:nvSpPr>
@@ -3236,7 +6420,7 @@
       </p:sp>
       <p:sp>
         <p:nvSpPr>
-          <p:cNvPr id="929120008" name="Shape 15"/>
+          <p:cNvPr id="379423153" name="Shape 15"/>
           <p:cNvSpPr/>
           <p:nvPr/>
         </p:nvSpPr>
@@ -3261,7 +6445,7 @@
       </p:sp>
       <p:sp>
         <p:nvSpPr>
-          <p:cNvPr id="1080798184" name="Text 16"/>
+          <p:cNvPr id="485071116" name="Text 16"/>
           <p:cNvSpPr/>
           <p:nvPr/>
         </p:nvSpPr>
@@ -3298,7 +6482,7 @@
       </p:sp>
       <p:sp>
         <p:nvSpPr>
-          <p:cNvPr id="2144222775" name="Text 17"/>
+          <p:cNvPr id="204447168" name="Text 17"/>
           <p:cNvSpPr/>
           <p:nvPr/>
         </p:nvSpPr>
@@ -3335,7 +6519,7 @@
       </p:sp>
       <p:sp>
         <p:nvSpPr>
-          <p:cNvPr id="792249803" name="Shape 18"/>
+          <p:cNvPr id="1650569565" name="Shape 18"/>
           <p:cNvSpPr/>
           <p:nvPr/>
         </p:nvSpPr>
@@ -3360,7 +6544,7 @@
       </p:sp>
       <p:sp>
         <p:nvSpPr>
-          <p:cNvPr id="827889274" name="Text 19"/>
+          <p:cNvPr id="1920870383" name="Text 19"/>
           <p:cNvSpPr/>
           <p:nvPr/>
         </p:nvSpPr>
@@ -3397,7 +6581,7 @@
       </p:sp>
       <p:sp>
         <p:nvSpPr>
-          <p:cNvPr id="324610730" name="Text 20"/>
+          <p:cNvPr id="1520310869" name="Text 20"/>
           <p:cNvSpPr/>
           <p:nvPr/>
         </p:nvSpPr>
@@ -3474,7 +6658,7 @@
       </p:grpSpPr>
       <p:sp>
         <p:nvSpPr>
-          <p:cNvPr id="165176289" name="Shape 0"/>
+          <p:cNvPr id="135018327" name="Shape 0"/>
           <p:cNvSpPr/>
           <p:nvPr/>
         </p:nvSpPr>
@@ -3499,7 +6683,7 @@
       </p:sp>
       <p:sp>
         <p:nvSpPr>
-          <p:cNvPr id="690026939" name="Shape 1"/>
+          <p:cNvPr id="37878310" name="Shape 1"/>
           <p:cNvSpPr/>
           <p:nvPr/>
         </p:nvSpPr>
@@ -3524,7 +6708,7 @@
       </p:sp>
       <p:sp>
         <p:nvSpPr>
-          <p:cNvPr id="106546294" name="Text 2"/>
+          <p:cNvPr id="1163298241" name="Text 2"/>
           <p:cNvSpPr/>
           <p:nvPr/>
         </p:nvSpPr>
@@ -3561,7 +6745,7 @@
       </p:sp>
       <p:sp>
         <p:nvSpPr>
-          <p:cNvPr id="1862469089" name="Text 3"/>
+          <p:cNvPr id="1311188942" name="Text 3"/>
           <p:cNvSpPr/>
           <p:nvPr/>
         </p:nvSpPr>
@@ -3598,7 +6782,7 @@
       </p:sp>
       <p:sp>
         <p:nvSpPr>
-          <p:cNvPr id="1795771173" name="Shape 4"/>
+          <p:cNvPr id="193456857" name="Shape 4"/>
           <p:cNvSpPr/>
           <p:nvPr/>
         </p:nvSpPr>
@@ -3623,7 +6807,7 @@
       </p:sp>
       <p:sp>
         <p:nvSpPr>
-          <p:cNvPr id="1515066976" name="Text 5"/>
+          <p:cNvPr id="843459991" name="Text 5"/>
           <p:cNvSpPr/>
           <p:nvPr/>
         </p:nvSpPr>
@@ -3660,7 +6844,7 @@
       </p:sp>
       <p:sp>
         <p:nvSpPr>
-          <p:cNvPr id="133154061" name="Text 6"/>
+          <p:cNvPr id="1002696791" name="Text 6"/>
           <p:cNvSpPr/>
           <p:nvPr/>
         </p:nvSpPr>
@@ -3697,7 +6881,7 @@
       </p:sp>
       <p:sp>
         <p:nvSpPr>
-          <p:cNvPr id="521542277" name="Shape 7"/>
+          <p:cNvPr id="923676158" name="Shape 7"/>
           <p:cNvSpPr/>
           <p:nvPr/>
         </p:nvSpPr>
@@ -3729,7 +6913,7 @@
       </p:sp>
       <p:sp>
         <p:nvSpPr>
-          <p:cNvPr id="1255462115" name="Text 8"/>
+          <p:cNvPr id="2030707649" name="Text 8"/>
           <p:cNvSpPr/>
           <p:nvPr/>
         </p:nvSpPr>
@@ -3766,7 +6950,7 @@
       </p:sp>
       <p:sp>
         <p:nvSpPr>
-          <p:cNvPr id="830001783" name="Text 9"/>
+          <p:cNvPr id="1670489039" name="Text 9"/>
           <p:cNvSpPr/>
           <p:nvPr/>
         </p:nvSpPr>
@@ -3803,7 +6987,7 @@
       </p:sp>
       <p:sp>
         <p:nvSpPr>
-          <p:cNvPr id="279344319" name="Shape 10"/>
+          <p:cNvPr id="1572255394" name="Shape 10"/>
           <p:cNvSpPr/>
           <p:nvPr/>
         </p:nvSpPr>
@@ -3835,7 +7019,7 @@
       </p:sp>
       <p:sp>
         <p:nvSpPr>
-          <p:cNvPr id="1838818225" name="Text 11"/>
+          <p:cNvPr id="1701820490" name="Text 11"/>
           <p:cNvSpPr/>
           <p:nvPr/>
         </p:nvSpPr>
@@ -3872,7 +7056,7 @@
       </p:sp>
       <p:sp>
         <p:nvSpPr>
-          <p:cNvPr id="732268651" name="Text 12"/>
+          <p:cNvPr id="2131464" name="Text 12"/>
           <p:cNvSpPr/>
           <p:nvPr/>
         </p:nvSpPr>
@@ -3901,7 +7085,7 @@
                   <a:srgbClr val="1E293B"/>
                 </a:solidFill>
               </a:rPr>
-              <a:t>Prior work has used SVMs, Naïve Bayes, and neural networks on PSG signals. Fewer studies address tabular lifestyle data — making this dataset a realistic, low-cost alternative.</a:t>
+              <a:t>Prior work has used SVMs, Naïve Bayes, and neural networks on PSG signals. Fewer studies address tabular lifestyle data, making this dataset a realistic, low-cost alternative.</a:t>
             </a:r>
             <a:endParaRPr lang="en-US" sz="1100"/>
           </a:p>
@@ -3909,7 +7093,7 @@
       </p:sp>
       <p:sp>
         <p:nvSpPr>
-          <p:cNvPr id="724872775" name="Shape 13"/>
+          <p:cNvPr id="298155995" name="Shape 13"/>
           <p:cNvSpPr/>
           <p:nvPr/>
         </p:nvSpPr>
@@ -3941,7 +7125,7 @@
       </p:sp>
       <p:sp>
         <p:nvSpPr>
-          <p:cNvPr id="1098431434" name="Text 14"/>
+          <p:cNvPr id="386638025" name="Text 14"/>
           <p:cNvSpPr/>
           <p:nvPr/>
         </p:nvSpPr>
@@ -3978,7 +7162,7 @@
       </p:sp>
       <p:sp>
         <p:nvSpPr>
-          <p:cNvPr id="1622467125" name="Text 15"/>
+          <p:cNvPr id="600520952" name="Text 15"/>
           <p:cNvSpPr/>
           <p:nvPr/>
         </p:nvSpPr>
@@ -4007,7 +7191,7 @@
                   <a:srgbClr val="1E293B"/>
                 </a:solidFill>
               </a:rPr>
-              <a:t>Random Forests and XGBoost excel on tabular data, handle mixed feature types, and provide built-in feature importance — making them ideal for interpretable medical classification.</a:t>
+              <a:t>Random Forests and XGBoost excel on tabular data, handle mixed feature types, and provide built-in feature importance which make them ideal for interpretable medical classification.</a:t>
             </a:r>
             <a:endParaRPr lang="en-US" sz="1100"/>
           </a:p>
@@ -4015,7 +7199,7 @@
       </p:sp>
       <p:sp>
         <p:nvSpPr>
-          <p:cNvPr id="397100115" name="Shape 16"/>
+          <p:cNvPr id="1819902291" name="Shape 16"/>
           <p:cNvSpPr/>
           <p:nvPr/>
         </p:nvSpPr>
@@ -4047,7 +7231,7 @@
       </p:sp>
       <p:sp>
         <p:nvSpPr>
-          <p:cNvPr id="2037742593" name="Text 17"/>
+          <p:cNvPr id="1062277589" name="Text 17"/>
           <p:cNvSpPr/>
           <p:nvPr/>
         </p:nvSpPr>
@@ -4084,7 +7268,7 @@
       </p:sp>
       <p:sp>
         <p:nvSpPr>
-          <p:cNvPr id="1103989194" name="Text 18"/>
+          <p:cNvPr id="1003992952" name="Text 18"/>
           <p:cNvSpPr/>
           <p:nvPr/>
         </p:nvSpPr>
@@ -4161,7 +7345,7 @@
       </p:grpSpPr>
       <p:sp>
         <p:nvSpPr>
-          <p:cNvPr id="503898647" name="Shape 0"/>
+          <p:cNvPr id="1858554601" name="Shape 0"/>
           <p:cNvSpPr/>
           <p:nvPr/>
         </p:nvSpPr>
@@ -4186,7 +7370,7 @@
       </p:sp>
       <p:sp>
         <p:nvSpPr>
-          <p:cNvPr id="1088786741" name="Shape 1"/>
+          <p:cNvPr id="1186090527" name="Shape 1"/>
           <p:cNvSpPr/>
           <p:nvPr/>
         </p:nvSpPr>
@@ -4211,7 +7395,7 @@
       </p:sp>
       <p:sp>
         <p:nvSpPr>
-          <p:cNvPr id="1654049929" name="Text 2"/>
+          <p:cNvPr id="1626082339" name="Text 2"/>
           <p:cNvSpPr/>
           <p:nvPr/>
         </p:nvSpPr>
@@ -4248,7 +7432,7 @@
       </p:sp>
       <p:sp>
         <p:nvSpPr>
-          <p:cNvPr id="281870581" name="Text 3"/>
+          <p:cNvPr id="1011036296" name="Text 3"/>
           <p:cNvSpPr/>
           <p:nvPr/>
         </p:nvSpPr>
@@ -4285,7 +7469,7 @@
       </p:sp>
       <p:sp>
         <p:nvSpPr>
-          <p:cNvPr id="791263649" name="Shape 4"/>
+          <p:cNvPr id="1320960647" name="Shape 4"/>
           <p:cNvSpPr/>
           <p:nvPr/>
         </p:nvSpPr>
@@ -4310,7 +7494,7 @@
       </p:sp>
       <p:sp>
         <p:nvSpPr>
-          <p:cNvPr id="1079917226" name="Text 5"/>
+          <p:cNvPr id="130842858" name="Text 5"/>
           <p:cNvSpPr/>
           <p:nvPr/>
         </p:nvSpPr>
@@ -4347,7 +7531,7 @@
       </p:sp>
       <p:sp>
         <p:nvSpPr>
-          <p:cNvPr id="829810474" name="Text 6"/>
+          <p:cNvPr id="1703554065" name="Text 6"/>
           <p:cNvSpPr/>
           <p:nvPr/>
         </p:nvSpPr>
@@ -4384,7 +7568,7 @@
       </p:sp>
       <p:sp>
         <p:nvSpPr>
-          <p:cNvPr id="893519332" name="Shape 7"/>
+          <p:cNvPr id="1970085388" name="Shape 7"/>
           <p:cNvSpPr/>
           <p:nvPr/>
         </p:nvSpPr>
@@ -4416,7 +7600,7 @@
       </p:sp>
       <p:sp>
         <p:nvSpPr>
-          <p:cNvPr id="742723174" name="Shape 8"/>
+          <p:cNvPr id="1571731555" name="Shape 8"/>
           <p:cNvSpPr/>
           <p:nvPr/>
         </p:nvSpPr>
@@ -4441,7 +7625,7 @@
       </p:sp>
       <p:sp>
         <p:nvSpPr>
-          <p:cNvPr id="1668469863" name="Text 9"/>
+          <p:cNvPr id="2145596301" name="Text 9"/>
           <p:cNvSpPr/>
           <p:nvPr/>
         </p:nvSpPr>
@@ -4478,7 +7662,7 @@
       </p:sp>
       <p:sp>
         <p:nvSpPr>
-          <p:cNvPr id="578823670" name="Text 10"/>
+          <p:cNvPr id="832923959" name="Text 10"/>
           <p:cNvSpPr/>
           <p:nvPr/>
         </p:nvSpPr>
@@ -4515,7 +7699,7 @@
       </p:sp>
       <p:sp>
         <p:nvSpPr>
-          <p:cNvPr id="930011080" name="Text 11"/>
+          <p:cNvPr id="59685423" name="Text 11"/>
           <p:cNvSpPr/>
           <p:nvPr/>
         </p:nvSpPr>
@@ -4582,7 +7766,7 @@
       </p:sp>
       <p:sp>
         <p:nvSpPr>
-          <p:cNvPr id="185949700" name="Shape 12"/>
+          <p:cNvPr id="629511832" name="Shape 12"/>
           <p:cNvSpPr/>
           <p:nvPr/>
         </p:nvSpPr>
@@ -4607,7 +7791,7 @@
       </p:sp>
       <p:sp>
         <p:nvSpPr>
-          <p:cNvPr id="1577464890" name="Shape 13"/>
+          <p:cNvPr id="111326483" name="Shape 13"/>
           <p:cNvSpPr/>
           <p:nvPr/>
         </p:nvSpPr>
@@ -4639,7 +7823,7 @@
       </p:sp>
       <p:sp>
         <p:nvSpPr>
-          <p:cNvPr id="1491092829" name="Shape 14"/>
+          <p:cNvPr id="1361566062" name="Shape 14"/>
           <p:cNvSpPr/>
           <p:nvPr/>
         </p:nvSpPr>
@@ -4664,7 +7848,7 @@
       </p:sp>
       <p:sp>
         <p:nvSpPr>
-          <p:cNvPr id="392987601" name="Text 15"/>
+          <p:cNvPr id="609675465" name="Text 15"/>
           <p:cNvSpPr/>
           <p:nvPr/>
         </p:nvSpPr>
@@ -4701,7 +7885,7 @@
       </p:sp>
       <p:sp>
         <p:nvSpPr>
-          <p:cNvPr id="302399574" name="Text 16"/>
+          <p:cNvPr id="279117525" name="Text 16"/>
           <p:cNvSpPr/>
           <p:nvPr/>
         </p:nvSpPr>
@@ -4738,7 +7922,7 @@
       </p:sp>
       <p:sp>
         <p:nvSpPr>
-          <p:cNvPr id="222364247" name="Text 17"/>
+          <p:cNvPr id="85383032" name="Text 17"/>
           <p:cNvSpPr/>
           <p:nvPr/>
         </p:nvSpPr>
@@ -4805,7 +7989,7 @@
       </p:sp>
       <p:sp>
         <p:nvSpPr>
-          <p:cNvPr id="16895467" name="Shape 18"/>
+          <p:cNvPr id="424936604" name="Shape 18"/>
           <p:cNvSpPr/>
           <p:nvPr/>
         </p:nvSpPr>
@@ -4830,7 +8014,7 @@
       </p:sp>
       <p:sp>
         <p:nvSpPr>
-          <p:cNvPr id="924359291" name="Shape 19"/>
+          <p:cNvPr id="1419928482" name="Shape 19"/>
           <p:cNvSpPr/>
           <p:nvPr/>
         </p:nvSpPr>
@@ -4862,7 +8046,7 @@
       </p:sp>
       <p:sp>
         <p:nvSpPr>
-          <p:cNvPr id="133231312" name="Shape 20"/>
+          <p:cNvPr id="835629831" name="Shape 20"/>
           <p:cNvSpPr/>
           <p:nvPr/>
         </p:nvSpPr>
@@ -4887,7 +8071,7 @@
       </p:sp>
       <p:sp>
         <p:nvSpPr>
-          <p:cNvPr id="1171726511" name="Text 21"/>
+          <p:cNvPr id="1911268234" name="Text 21"/>
           <p:cNvSpPr/>
           <p:nvPr/>
         </p:nvSpPr>
@@ -4924,7 +8108,7 @@
       </p:sp>
       <p:sp>
         <p:nvSpPr>
-          <p:cNvPr id="387534499" name="Text 22"/>
+          <p:cNvPr id="861080018" name="Text 22"/>
           <p:cNvSpPr/>
           <p:nvPr/>
         </p:nvSpPr>
@@ -4961,7 +8145,7 @@
       </p:sp>
       <p:sp>
         <p:nvSpPr>
-          <p:cNvPr id="2001904975" name="Text 23"/>
+          <p:cNvPr id="785771539" name="Text 23"/>
           <p:cNvSpPr/>
           <p:nvPr/>
         </p:nvSpPr>
@@ -5022,13 +8206,82 @@
               </a:rPr>
               <a:t>5-fold CV</a:t>
             </a:r>
+            <a:endParaRPr lang="en-US" sz="1000">
+              <a:solidFill>
+                <a:srgbClr val="FFFFFF"/>
+              </a:solidFill>
+            </a:endParaRPr>
+          </a:p>
+          <a:p>
+            <a:pPr marL="0" indent="0" algn="ctr">
+              <a:buNone/>
+              <a:defRPr/>
+            </a:pPr>
             <a:endParaRPr lang="en-US" sz="1000"/>
           </a:p>
-        </p:txBody>
-      </p:sp>
-      <p:sp>
-        <p:nvSpPr>
-          <p:cNvPr id="1492655755" name="Shape 24"/>
+          <a:p>
+            <a:pPr marL="0" indent="0" algn="ctr">
+              <a:buNone/>
+              <a:defRPr/>
+            </a:pPr>
+            <a:r>
+              <a:rPr lang="en-US" sz="1000">
+                <a:solidFill>
+                  <a:srgbClr val="FFFFFF"/>
+                </a:solidFill>
+              </a:rPr>
+              <a:t>Why 5-fold CV?</a:t>
+            </a:r>
+            <a:endParaRPr lang="en-US" sz="1000">
+              <a:solidFill>
+                <a:srgbClr val="FFFFFF"/>
+              </a:solidFill>
+            </a:endParaRPr>
+          </a:p>
+          <a:p>
+            <a:pPr marL="195764" indent="-195764" algn="ctr">
+              <a:buFont typeface="Arial"/>
+              <a:buChar char="•"/>
+              <a:defRPr/>
+            </a:pPr>
+            <a:r>
+              <a:rPr lang="en-US" sz="1000" b="0" i="0" u="none" strike="noStrike" cap="none" spc="0">
+                <a:solidFill>
+                  <a:srgbClr val="FFFFFF"/>
+                </a:solidFill>
+                <a:latin typeface="Calibri"/>
+                <a:ea typeface="Calibri"/>
+                <a:cs typeface="Calibri"/>
+              </a:rPr>
+              <a:t>More reliable performance estimates</a:t>
+            </a:r>
+            <a:endParaRPr lang="en-US" sz="1000">
+              <a:solidFill>
+                <a:srgbClr val="FFFFFF"/>
+              </a:solidFill>
+            </a:endParaRPr>
+          </a:p>
+          <a:p>
+            <a:pPr marL="195764" indent="-195764" algn="ctr">
+              <a:buFont typeface="Arial"/>
+              <a:buChar char="•"/>
+              <a:defRPr/>
+            </a:pPr>
+            <a:r>
+              <a:rPr lang="en-US" sz="1000">
+                <a:solidFill>
+                  <a:srgbClr val="FFFFFF"/>
+                </a:solidFill>
+              </a:rPr>
+              <a:t>Small dataset</a:t>
+            </a:r>
+            <a:endParaRPr lang="en-US" sz="1000"/>
+          </a:p>
+        </p:txBody>
+      </p:sp>
+      <p:sp>
+        <p:nvSpPr>
+          <p:cNvPr id="1610512000" name="Shape 24"/>
           <p:cNvSpPr/>
           <p:nvPr/>
         </p:nvSpPr>
@@ -5053,7 +8306,7 @@
       </p:sp>
       <p:sp>
         <p:nvSpPr>
-          <p:cNvPr id="1299104192" name="Shape 25"/>
+          <p:cNvPr id="1981006871" name="Shape 25"/>
           <p:cNvSpPr/>
           <p:nvPr/>
         </p:nvSpPr>
@@ -5085,7 +8338,7 @@
       </p:sp>
       <p:sp>
         <p:nvSpPr>
-          <p:cNvPr id="1340291605" name="Shape 26"/>
+          <p:cNvPr id="1275200230" name="Shape 26"/>
           <p:cNvSpPr/>
           <p:nvPr/>
         </p:nvSpPr>
@@ -5110,7 +8363,7 @@
       </p:sp>
       <p:sp>
         <p:nvSpPr>
-          <p:cNvPr id="1013631054" name="Text 27"/>
+          <p:cNvPr id="283417023" name="Text 27"/>
           <p:cNvSpPr/>
           <p:nvPr/>
         </p:nvSpPr>
@@ -5147,7 +8400,7 @@
       </p:sp>
       <p:sp>
         <p:nvSpPr>
-          <p:cNvPr id="373688980" name="Text 28"/>
+          <p:cNvPr id="410026654" name="Text 28"/>
           <p:cNvSpPr/>
           <p:nvPr/>
         </p:nvSpPr>
@@ -5184,7 +8437,7 @@
       </p:sp>
       <p:sp>
         <p:nvSpPr>
-          <p:cNvPr id="1709880661" name="Text 29"/>
+          <p:cNvPr id="1591825525" name="Text 29"/>
           <p:cNvSpPr/>
           <p:nvPr/>
         </p:nvSpPr>
@@ -5245,13 +8498,98 @@
               </a:rPr>
               <a:t>5-fold CV</a:t>
             </a:r>
+            <a:endParaRPr lang="en-US" sz="1000">
+              <a:solidFill>
+                <a:srgbClr val="FFFFFF"/>
+              </a:solidFill>
+            </a:endParaRPr>
+          </a:p>
+          <a:p>
+            <a:pPr marL="0" indent="0" algn="ctr">
+              <a:buNone/>
+              <a:defRPr/>
+            </a:pPr>
             <a:endParaRPr lang="en-US" sz="1000"/>
           </a:p>
-        </p:txBody>
-      </p:sp>
-      <p:sp>
-        <p:nvSpPr>
-          <p:cNvPr id="295475314" name="Shape 30"/>
+          <a:p>
+            <a:pPr marL="0" indent="0" algn="ctr">
+              <a:buNone/>
+              <a:defRPr/>
+            </a:pPr>
+            <a:r>
+              <a:rPr lang="en-US" sz="1000" b="0" i="0" u="none" strike="noStrike" cap="none" spc="0">
+                <a:solidFill>
+                  <a:srgbClr val="FFFFFF"/>
+                </a:solidFill>
+                <a:latin typeface="Calibri"/>
+                <a:ea typeface="Calibri"/>
+                <a:cs typeface="Calibri"/>
+              </a:rPr>
+              <a:t>Why 5-fold CV?</a:t>
+            </a:r>
+            <a:endParaRPr lang="en-US" sz="1000" b="0" i="0" u="none" strike="noStrike" cap="none" spc="0">
+              <a:solidFill>
+                <a:srgbClr val="FFFFFF"/>
+              </a:solidFill>
+              <a:latin typeface="Calibri"/>
+              <a:ea typeface="Calibri"/>
+              <a:cs typeface="Calibri"/>
+            </a:endParaRPr>
+          </a:p>
+          <a:p>
+            <a:pPr marL="195764" indent="-195764" algn="ctr">
+              <a:buFont typeface="Arial"/>
+              <a:buChar char="•"/>
+              <a:defRPr/>
+            </a:pPr>
+            <a:r>
+              <a:rPr lang="en-US" sz="1000" b="0" i="0" u="none" strike="noStrike" cap="none" spc="0">
+                <a:solidFill>
+                  <a:srgbClr val="FFFFFF"/>
+                </a:solidFill>
+                <a:latin typeface="Calibri"/>
+                <a:ea typeface="Calibri"/>
+                <a:cs typeface="Calibri"/>
+              </a:rPr>
+              <a:t>Better use of data</a:t>
+            </a:r>
+            <a:endParaRPr lang="en-US" sz="1000" b="0" i="0" u="none" strike="noStrike" cap="none" spc="0">
+              <a:solidFill>
+                <a:srgbClr val="FFFFFF"/>
+              </a:solidFill>
+              <a:latin typeface="Calibri"/>
+              <a:ea typeface="Calibri"/>
+              <a:cs typeface="Calibri"/>
+            </a:endParaRPr>
+          </a:p>
+          <a:p>
+            <a:pPr marL="195764" indent="-195764" algn="ctr">
+              <a:buFont typeface="Arial"/>
+              <a:buChar char="•"/>
+              <a:defRPr/>
+            </a:pPr>
+            <a:r>
+              <a:rPr lang="en-US" sz="1000" b="0" i="0" u="none" strike="noStrike" cap="none" spc="0">
+                <a:solidFill>
+                  <a:srgbClr val="FFFFFF"/>
+                </a:solidFill>
+                <a:latin typeface="Calibri"/>
+                <a:ea typeface="Calibri"/>
+                <a:cs typeface="Calibri"/>
+              </a:rPr>
+              <a:t>Hyperparameter tuning without data leakage</a:t>
+            </a:r>
+            <a:endParaRPr lang="en-US" sz="1000">
+              <a:solidFill>
+                <a:srgbClr val="FFFFFF"/>
+              </a:solidFill>
+            </a:endParaRPr>
+          </a:p>
+        </p:txBody>
+      </p:sp>
+      <p:sp>
+        <p:nvSpPr>
+          <p:cNvPr id="629054800" name="Shape 30"/>
           <p:cNvSpPr/>
           <p:nvPr/>
         </p:nvSpPr>
@@ -5276,7 +8614,7 @@
       </p:sp>
       <p:sp>
         <p:nvSpPr>
-          <p:cNvPr id="1689541713" name="Shape 31"/>
+          <p:cNvPr id="1268138046" name="Shape 31"/>
           <p:cNvSpPr/>
           <p:nvPr/>
         </p:nvSpPr>
@@ -5308,7 +8646,7 @@
       </p:sp>
       <p:sp>
         <p:nvSpPr>
-          <p:cNvPr id="2056146896" name="Shape 32"/>
+          <p:cNvPr id="162206847" name="Shape 32"/>
           <p:cNvSpPr/>
           <p:nvPr/>
         </p:nvSpPr>
@@ -5333,7 +8671,7 @@
       </p:sp>
       <p:sp>
         <p:nvSpPr>
-          <p:cNvPr id="637528458" name="Text 33"/>
+          <p:cNvPr id="1442887849" name="Text 33"/>
           <p:cNvSpPr/>
           <p:nvPr/>
         </p:nvSpPr>
@@ -5370,7 +8708,7 @@
       </p:sp>
       <p:sp>
         <p:nvSpPr>
-          <p:cNvPr id="829239722" name="Text 34"/>
+          <p:cNvPr id="1699411563" name="Text 34"/>
           <p:cNvSpPr/>
           <p:nvPr/>
         </p:nvSpPr>
@@ -5407,7 +8745,7 @@
       </p:sp>
       <p:sp>
         <p:nvSpPr>
-          <p:cNvPr id="569544880" name="Text 35"/>
+          <p:cNvPr id="69020427" name="Text 35"/>
           <p:cNvSpPr/>
           <p:nvPr/>
         </p:nvSpPr>
@@ -5474,7 +8812,7 @@
       </p:sp>
       <p:sp>
         <p:nvSpPr>
-          <p:cNvPr id="1553966233" name="Shape 36"/>
+          <p:cNvPr id="383626988" name="Shape 36"/>
           <p:cNvSpPr/>
           <p:nvPr/>
         </p:nvSpPr>
@@ -5499,7 +8837,7 @@
       </p:sp>
       <p:sp>
         <p:nvSpPr>
-          <p:cNvPr id="932531833" name="Text 37"/>
+          <p:cNvPr id="118509553" name="Text 37"/>
           <p:cNvSpPr/>
           <p:nvPr/>
         </p:nvSpPr>
@@ -5536,7 +8874,7 @@
       </p:sp>
       <p:sp>
         <p:nvSpPr>
-          <p:cNvPr id="535157529" name="Text 38"/>
+          <p:cNvPr id="1636117475" name="Text 38"/>
           <p:cNvSpPr/>
           <p:nvPr/>
         </p:nvSpPr>
@@ -5588,6 +8926,502 @@
 </file>
 
 <file path=ppt/slides/slide6.xml><?xml version="1.0" encoding="utf-8"?>
+<p:sld xmlns:a="http://schemas.openxmlformats.org/drawingml/2006/main" xmlns:r="http://schemas.openxmlformats.org/officeDocument/2006/relationships" xmlns:p="http://schemas.openxmlformats.org/presentationml/2006/main" xmlns:m="http://schemas.openxmlformats.org/officeDocument/2006/math" xmlns:w="http://schemas.openxmlformats.org/wordprocessingml/2006/main" xmlns:mc="http://schemas.openxmlformats.org/markup-compatibility/2006" showMasterPhAnim="0" showMasterSp="1" show="1">
+  <p:cSld name="Slide 3">
+    <p:bg>
+      <p:bgPr shadeToTitle="0">
+        <a:solidFill>
+          <a:srgbClr val="FFFFFF"/>
+        </a:solidFill>
+      </p:bgPr>
+    </p:bg>
+    <p:spTree>
+      <p:nvGrpSpPr>
+        <p:cNvPr id="1" name=""/>
+        <p:cNvGrpSpPr/>
+        <p:nvPr/>
+      </p:nvGrpSpPr>
+      <p:grpSpPr bwMode="auto">
+        <a:xfrm>
+          <a:off x="0" y="0"/>
+          <a:ext cx="0" cy="0"/>
+          <a:chOff x="0" y="0"/>
+          <a:chExt cx="0" cy="0"/>
+        </a:xfrm>
+      </p:grpSpPr>
+      <p:sp>
+        <p:nvSpPr>
+          <p:cNvPr id="337593852" name="Shape 0"/>
+          <p:cNvSpPr/>
+          <p:nvPr/>
+        </p:nvSpPr>
+        <p:spPr bwMode="auto">
+          <a:xfrm>
+            <a:off x="0" y="0"/>
+            <a:ext cx="9144000" cy="658368"/>
+          </a:xfrm>
+          <a:prstGeom prst="rect">
+            <a:avLst/>
+          </a:prstGeom>
+          <a:solidFill>
+            <a:srgbClr val="0D1B2A"/>
+          </a:solidFill>
+          <a:ln w="12700">
+            <a:solidFill>
+              <a:srgbClr val="0D1B2A"/>
+            </a:solidFill>
+            <a:prstDash val="solid"/>
+          </a:ln>
+        </p:spPr>
+      </p:sp>
+      <p:sp>
+        <p:nvSpPr>
+          <p:cNvPr id="323772542" name="Shape 1"/>
+          <p:cNvSpPr/>
+          <p:nvPr/>
+        </p:nvSpPr>
+        <p:spPr bwMode="auto">
+          <a:xfrm>
+            <a:off x="411480" y="118872"/>
+            <a:ext cx="347471" cy="347471"/>
+          </a:xfrm>
+          <a:prstGeom prst="rect">
+            <a:avLst/>
+          </a:prstGeom>
+          <a:solidFill>
+            <a:srgbClr val="0A9396"/>
+          </a:solidFill>
+          <a:ln w="12700">
+            <a:solidFill>
+              <a:srgbClr val="0A9396"/>
+            </a:solidFill>
+            <a:prstDash val="solid"/>
+          </a:ln>
+        </p:spPr>
+      </p:sp>
+      <p:sp>
+        <p:nvSpPr>
+          <p:cNvPr id="566097487" name="Text 2"/>
+          <p:cNvSpPr/>
+          <p:nvPr/>
+        </p:nvSpPr>
+        <p:spPr bwMode="auto">
+          <a:xfrm>
+            <a:off x="411480" y="118872"/>
+            <a:ext cx="347471" cy="347471"/>
+          </a:xfrm>
+          <a:prstGeom prst="rect">
+            <a:avLst/>
+          </a:prstGeom>
+          <a:noFill/>
+          <a:ln/>
+        </p:spPr>
+        <p:txBody>
+          <a:bodyPr wrap="square" lIns="0" tIns="0" rIns="0" bIns="0" rtlCol="0" anchor="ctr"/>
+          <a:lstStyle/>
+          <a:p>
+            <a:pPr marL="0" indent="0" algn="ctr">
+              <a:buNone/>
+              <a:defRPr/>
+            </a:pPr>
+            <a:r>
+              <a:rPr lang="en-US" sz="1400" b="1">
+                <a:solidFill>
+                  <a:schemeClr val="bg1"/>
+                </a:solidFill>
+              </a:rPr>
+              <a:t>5</a:t>
+            </a:r>
+            <a:endParaRPr lang="en-US" sz="1400"/>
+          </a:p>
+        </p:txBody>
+      </p:sp>
+      <p:sp>
+        <p:nvSpPr>
+          <p:cNvPr id="1919998186" name="Text 3"/>
+          <p:cNvSpPr/>
+          <p:nvPr/>
+        </p:nvSpPr>
+        <p:spPr bwMode="auto">
+          <a:xfrm>
+            <a:off x="868680" y="118872"/>
+            <a:ext cx="8046720" cy="347471"/>
+          </a:xfrm>
+          <a:prstGeom prst="rect">
+            <a:avLst/>
+          </a:prstGeom>
+          <a:noFill/>
+          <a:ln/>
+        </p:spPr>
+        <p:txBody>
+          <a:bodyPr wrap="square" lIns="0" tIns="0" rIns="0" bIns="0" rtlCol="0" anchor="ctr"/>
+          <a:lstStyle/>
+          <a:p>
+            <a:pPr marL="0" indent="0">
+              <a:buNone/>
+              <a:defRPr/>
+            </a:pPr>
+            <a:r>
+              <a:rPr lang="en-US" sz="1800" b="1">
+                <a:solidFill>
+                  <a:srgbClr val="FFFFFF"/>
+                </a:solidFill>
+              </a:rPr>
+              <a:t>Visualizations</a:t>
+            </a:r>
+            <a:endParaRPr lang="en-US" sz="1800"/>
+          </a:p>
+        </p:txBody>
+      </p:sp>
+      <p:sp>
+        <p:nvSpPr>
+          <p:cNvPr id="961062410" name="Shape 4"/>
+          <p:cNvSpPr/>
+          <p:nvPr/>
+        </p:nvSpPr>
+        <p:spPr bwMode="auto">
+          <a:xfrm>
+            <a:off x="0" y="4937760"/>
+            <a:ext cx="9144000" cy="201168"/>
+          </a:xfrm>
+          <a:prstGeom prst="rect">
+            <a:avLst/>
+          </a:prstGeom>
+          <a:solidFill>
+            <a:srgbClr val="0A9396"/>
+          </a:solidFill>
+          <a:ln w="12700">
+            <a:solidFill>
+              <a:srgbClr val="0A9396"/>
+            </a:solidFill>
+            <a:prstDash val="solid"/>
+          </a:ln>
+        </p:spPr>
+      </p:sp>
+      <p:sp>
+        <p:nvSpPr>
+          <p:cNvPr id="981731845" name="Text 5"/>
+          <p:cNvSpPr/>
+          <p:nvPr/>
+        </p:nvSpPr>
+        <p:spPr bwMode="auto">
+          <a:xfrm>
+            <a:off x="274320" y="4937760"/>
+            <a:ext cx="8595360" cy="201168"/>
+          </a:xfrm>
+          <a:prstGeom prst="rect">
+            <a:avLst/>
+          </a:prstGeom>
+          <a:noFill/>
+          <a:ln/>
+        </p:spPr>
+        <p:txBody>
+          <a:bodyPr wrap="square" lIns="0" tIns="0" rIns="0" bIns="0" rtlCol="0" anchor="ctr"/>
+          <a:lstStyle/>
+          <a:p>
+            <a:pPr marL="0" indent="0">
+              <a:buNone/>
+              <a:defRPr/>
+            </a:pPr>
+            <a:r>
+              <a:rPr lang="en-US" sz="800">
+                <a:solidFill>
+                  <a:srgbClr val="FFFFFF"/>
+                </a:solidFill>
+              </a:rPr>
+              <a:t>Sleep Disorder Classification  |  Final Project</a:t>
+            </a:r>
+            <a:endParaRPr lang="en-US" sz="800"/>
+          </a:p>
+        </p:txBody>
+      </p:sp>
+      <p:pic>
+        <p:nvPicPr>
+          <p:cNvPr id="716622076" name=""/>
+          <p:cNvPicPr>
+            <a:picLocks noChangeAspect="1"/>
+          </p:cNvPicPr>
+          <p:nvPr/>
+        </p:nvPicPr>
+        <p:blipFill rotWithShape="1">
+          <a:blip r:embed="rId3"/>
+          <a:stretch/>
+        </p:blipFill>
+        <p:spPr bwMode="auto">
+          <a:xfrm flipH="0" flipV="0">
+            <a:off x="1876222" y="715762"/>
+            <a:ext cx="5391555" cy="4149924"/>
+          </a:xfrm>
+          <a:prstGeom prst="rect">
+            <a:avLst/>
+          </a:prstGeom>
+        </p:spPr>
+      </p:pic>
+    </p:spTree>
+  </p:cSld>
+  <p:clrMapOvr>
+    <a:masterClrMapping/>
+  </p:clrMapOvr>
+  <mc:AlternateContent xmlns:mc="http://schemas.openxmlformats.org/markup-compatibility/2006">
+    <mc:Choice xmlns:p159="http://schemas.microsoft.com/office/powerpoint/2015/09/main" xmlns:p14="http://schemas.microsoft.com/office/powerpoint/2010/main" Requires="p159">
+      <p:transition p14:dur="2000" advClick="1"/>
+    </mc:Choice>
+    <mc:Fallback>
+      <p:transition advClick="1"/>
+    </mc:Fallback>
+  </mc:AlternateContent>
+</p:sld>
+</file>
+
+<file path=ppt/slides/slide7.xml><?xml version="1.0" encoding="utf-8"?>
+<p:sld xmlns:a="http://schemas.openxmlformats.org/drawingml/2006/main" xmlns:r="http://schemas.openxmlformats.org/officeDocument/2006/relationships" xmlns:p="http://schemas.openxmlformats.org/presentationml/2006/main" xmlns:m="http://schemas.openxmlformats.org/officeDocument/2006/math" xmlns:w="http://schemas.openxmlformats.org/wordprocessingml/2006/main" xmlns:mc="http://schemas.openxmlformats.org/markup-compatibility/2006" showMasterPhAnim="0" showMasterSp="1" show="1">
+  <p:cSld name="Slide 3">
+    <p:bg>
+      <p:bgPr shadeToTitle="0">
+        <a:solidFill>
+          <a:srgbClr val="FFFFFF"/>
+        </a:solidFill>
+      </p:bgPr>
+    </p:bg>
+    <p:spTree>
+      <p:nvGrpSpPr>
+        <p:cNvPr id="1" name=""/>
+        <p:cNvGrpSpPr/>
+        <p:nvPr/>
+      </p:nvGrpSpPr>
+      <p:grpSpPr bwMode="auto">
+        <a:xfrm>
+          <a:off x="0" y="0"/>
+          <a:ext cx="0" cy="0"/>
+          <a:chOff x="0" y="0"/>
+          <a:chExt cx="0" cy="0"/>
+        </a:xfrm>
+      </p:grpSpPr>
+      <p:sp>
+        <p:nvSpPr>
+          <p:cNvPr id="456052121" name="Shape 0"/>
+          <p:cNvSpPr/>
+          <p:nvPr/>
+        </p:nvSpPr>
+        <p:spPr bwMode="auto">
+          <a:xfrm>
+            <a:off x="0" y="0"/>
+            <a:ext cx="9144000" cy="658368"/>
+          </a:xfrm>
+          <a:prstGeom prst="rect">
+            <a:avLst/>
+          </a:prstGeom>
+          <a:solidFill>
+            <a:srgbClr val="0D1B2A"/>
+          </a:solidFill>
+          <a:ln w="12700">
+            <a:solidFill>
+              <a:srgbClr val="0D1B2A"/>
+            </a:solidFill>
+            <a:prstDash val="solid"/>
+          </a:ln>
+        </p:spPr>
+      </p:sp>
+      <p:sp>
+        <p:nvSpPr>
+          <p:cNvPr id="147223067" name="Shape 1"/>
+          <p:cNvSpPr/>
+          <p:nvPr/>
+        </p:nvSpPr>
+        <p:spPr bwMode="auto">
+          <a:xfrm>
+            <a:off x="411480" y="118872"/>
+            <a:ext cx="347471" cy="347471"/>
+          </a:xfrm>
+          <a:prstGeom prst="rect">
+            <a:avLst/>
+          </a:prstGeom>
+          <a:solidFill>
+            <a:srgbClr val="0A9396"/>
+          </a:solidFill>
+          <a:ln w="12700">
+            <a:solidFill>
+              <a:srgbClr val="0A9396"/>
+            </a:solidFill>
+            <a:prstDash val="solid"/>
+          </a:ln>
+        </p:spPr>
+      </p:sp>
+      <p:sp>
+        <p:nvSpPr>
+          <p:cNvPr id="527378155" name="Text 2"/>
+          <p:cNvSpPr/>
+          <p:nvPr/>
+        </p:nvSpPr>
+        <p:spPr bwMode="auto">
+          <a:xfrm>
+            <a:off x="411480" y="118872"/>
+            <a:ext cx="347471" cy="347471"/>
+          </a:xfrm>
+          <a:prstGeom prst="rect">
+            <a:avLst/>
+          </a:prstGeom>
+          <a:noFill/>
+          <a:ln/>
+        </p:spPr>
+        <p:txBody>
+          <a:bodyPr wrap="square" lIns="0" tIns="0" rIns="0" bIns="0" rtlCol="0" anchor="ctr"/>
+          <a:lstStyle/>
+          <a:p>
+            <a:pPr marL="0" indent="0" algn="ctr">
+              <a:buNone/>
+              <a:defRPr/>
+            </a:pPr>
+            <a:r>
+              <a:rPr lang="en-US" sz="1400" b="1">
+                <a:solidFill>
+                  <a:schemeClr val="bg1"/>
+                </a:solidFill>
+              </a:rPr>
+              <a:t>6</a:t>
+            </a:r>
+            <a:endParaRPr lang="en-US" sz="1400"/>
+          </a:p>
+        </p:txBody>
+      </p:sp>
+      <p:sp>
+        <p:nvSpPr>
+          <p:cNvPr id="128965183" name="Text 3"/>
+          <p:cNvSpPr/>
+          <p:nvPr/>
+        </p:nvSpPr>
+        <p:spPr bwMode="auto">
+          <a:xfrm>
+            <a:off x="868680" y="118872"/>
+            <a:ext cx="8046720" cy="347471"/>
+          </a:xfrm>
+          <a:prstGeom prst="rect">
+            <a:avLst/>
+          </a:prstGeom>
+          <a:noFill/>
+          <a:ln/>
+        </p:spPr>
+        <p:txBody>
+          <a:bodyPr wrap="square" lIns="0" tIns="0" rIns="0" bIns="0" rtlCol="0" anchor="ctr"/>
+          <a:lstStyle/>
+          <a:p>
+            <a:pPr marL="0" indent="0">
+              <a:buNone/>
+              <a:defRPr/>
+            </a:pPr>
+            <a:r>
+              <a:rPr lang="en-US" sz="1800" b="1">
+                <a:solidFill>
+                  <a:srgbClr val="FFFFFF"/>
+                </a:solidFill>
+              </a:rPr>
+              <a:t>Visualizations</a:t>
+            </a:r>
+            <a:endParaRPr lang="en-US" sz="1800"/>
+          </a:p>
+        </p:txBody>
+      </p:sp>
+      <p:sp>
+        <p:nvSpPr>
+          <p:cNvPr id="1778123082" name="Shape 4"/>
+          <p:cNvSpPr/>
+          <p:nvPr/>
+        </p:nvSpPr>
+        <p:spPr bwMode="auto">
+          <a:xfrm>
+            <a:off x="0" y="4937760"/>
+            <a:ext cx="9144000" cy="201168"/>
+          </a:xfrm>
+          <a:prstGeom prst="rect">
+            <a:avLst/>
+          </a:prstGeom>
+          <a:solidFill>
+            <a:srgbClr val="0A9396"/>
+          </a:solidFill>
+          <a:ln w="12700">
+            <a:solidFill>
+              <a:srgbClr val="0A9396"/>
+            </a:solidFill>
+            <a:prstDash val="solid"/>
+          </a:ln>
+        </p:spPr>
+      </p:sp>
+      <p:sp>
+        <p:nvSpPr>
+          <p:cNvPr id="1174913235" name="Text 5"/>
+          <p:cNvSpPr/>
+          <p:nvPr/>
+        </p:nvSpPr>
+        <p:spPr bwMode="auto">
+          <a:xfrm>
+            <a:off x="274320" y="4937760"/>
+            <a:ext cx="8595360" cy="201168"/>
+          </a:xfrm>
+          <a:prstGeom prst="rect">
+            <a:avLst/>
+          </a:prstGeom>
+          <a:noFill/>
+          <a:ln/>
+        </p:spPr>
+        <p:txBody>
+          <a:bodyPr wrap="square" lIns="0" tIns="0" rIns="0" bIns="0" rtlCol="0" anchor="ctr"/>
+          <a:lstStyle/>
+          <a:p>
+            <a:pPr marL="0" indent="0">
+              <a:buNone/>
+              <a:defRPr/>
+            </a:pPr>
+            <a:r>
+              <a:rPr lang="en-US" sz="800">
+                <a:solidFill>
+                  <a:srgbClr val="FFFFFF"/>
+                </a:solidFill>
+              </a:rPr>
+              <a:t>Sleep Disorder Classification  |  Final Project</a:t>
+            </a:r>
+            <a:endParaRPr lang="en-US" sz="800"/>
+          </a:p>
+        </p:txBody>
+      </p:sp>
+      <p:pic>
+        <p:nvPicPr>
+          <p:cNvPr id="1654527715" name=""/>
+          <p:cNvPicPr>
+            <a:picLocks noChangeAspect="1"/>
+          </p:cNvPicPr>
+          <p:nvPr/>
+        </p:nvPicPr>
+        <p:blipFill rotWithShape="1">
+          <a:blip r:embed="rId3"/>
+          <a:stretch/>
+        </p:blipFill>
+        <p:spPr bwMode="auto">
+          <a:xfrm flipH="0" flipV="0">
+            <a:off x="1985936" y="658368"/>
+            <a:ext cx="4642960" cy="4248257"/>
+          </a:xfrm>
+          <a:prstGeom prst="rect">
+            <a:avLst/>
+          </a:prstGeom>
+        </p:spPr>
+      </p:pic>
+    </p:spTree>
+  </p:cSld>
+  <p:clrMapOvr>
+    <a:masterClrMapping/>
+  </p:clrMapOvr>
+  <mc:AlternateContent xmlns:mc="http://schemas.openxmlformats.org/markup-compatibility/2006">
+    <mc:Choice xmlns:p159="http://schemas.microsoft.com/office/powerpoint/2015/09/main" xmlns:p14="http://schemas.microsoft.com/office/powerpoint/2010/main" Requires="p159">
+      <p:transition p14:dur="2000" advClick="1"/>
+    </mc:Choice>
+    <mc:Fallback>
+      <p:transition advClick="1"/>
+    </mc:Fallback>
+  </mc:AlternateContent>
+</p:sld>
+</file>
+
+<file path=ppt/slides/slide8.xml><?xml version="1.0" encoding="utf-8"?>
 <p:sld xmlns:a="http://schemas.openxmlformats.org/drawingml/2006/main" xmlns:r="http://schemas.openxmlformats.org/officeDocument/2006/relationships" xmlns:p="http://schemas.openxmlformats.org/presentationml/2006/main" xmlns:m="http://schemas.openxmlformats.org/officeDocument/2006/math" xmlns:w="http://schemas.openxmlformats.org/wordprocessingml/2006/main" xmlns:mc="http://schemas.openxmlformats.org/markup-compatibility/2006" showMasterPhAnim="0" showMasterSp="1" show="1">
   <p:cSld name="Slide 6">
     <p:bg>
@@ -5613,7 +9447,7 @@
       </p:grpSpPr>
       <p:sp>
         <p:nvSpPr>
-          <p:cNvPr id="543550314" name="Shape 0"/>
+          <p:cNvPr id="284053629" name="Shape 0"/>
           <p:cNvSpPr/>
           <p:nvPr/>
         </p:nvSpPr>
@@ -5638,7 +9472,7 @@
       </p:sp>
       <p:sp>
         <p:nvSpPr>
-          <p:cNvPr id="1403324280" name="Shape 1"/>
+          <p:cNvPr id="1178525482" name="Shape 1"/>
           <p:cNvSpPr/>
           <p:nvPr/>
         </p:nvSpPr>
@@ -5663,7 +9497,7 @@
       </p:sp>
       <p:sp>
         <p:nvSpPr>
-          <p:cNvPr id="227218043" name="Text 2"/>
+          <p:cNvPr id="1267120162" name="Text 2"/>
           <p:cNvSpPr/>
           <p:nvPr/>
         </p:nvSpPr>
@@ -5692,7 +9526,7 @@
                   <a:srgbClr val="FFFFFF"/>
                 </a:solidFill>
               </a:rPr>
-              <a:t>5</a:t>
+              <a:t>7</a:t>
             </a:r>
             <a:endParaRPr lang="en-US" sz="1400"/>
           </a:p>
@@ -5700,7 +9534,7 @@
       </p:sp>
       <p:sp>
         <p:nvSpPr>
-          <p:cNvPr id="774329194" name="Text 3"/>
+          <p:cNvPr id="583109880" name="Text 3"/>
           <p:cNvSpPr/>
           <p:nvPr/>
         </p:nvSpPr>
@@ -5737,7 +9571,7 @@
       </p:sp>
       <p:sp>
         <p:nvSpPr>
-          <p:cNvPr id="2047737269" name="Shape 4"/>
+          <p:cNvPr id="2129624197" name="Shape 4"/>
           <p:cNvSpPr/>
           <p:nvPr/>
         </p:nvSpPr>
@@ -5762,7 +9596,7 @@
       </p:sp>
       <p:sp>
         <p:nvSpPr>
-          <p:cNvPr id="746702126" name="Text 5"/>
+          <p:cNvPr id="682412923" name="Text 5"/>
           <p:cNvSpPr/>
           <p:nvPr/>
         </p:nvSpPr>
@@ -5799,7 +9633,7 @@
       </p:sp>
       <p:sp>
         <p:nvSpPr>
-          <p:cNvPr id="89274850" name="Text 6"/>
+          <p:cNvPr id="1707391454" name="Text 6"/>
           <p:cNvSpPr/>
           <p:nvPr/>
         </p:nvSpPr>
@@ -5836,7 +9670,7 @@
       </p:sp>
       <p:sp>
         <p:nvSpPr>
-          <p:cNvPr id="88653858" name="Shape 7"/>
+          <p:cNvPr id="1793312658" name="Shape 7"/>
           <p:cNvSpPr/>
           <p:nvPr/>
         </p:nvSpPr>
@@ -5868,7 +9702,7 @@
       </p:sp>
       <p:sp>
         <p:nvSpPr>
-          <p:cNvPr id="1881715719" name="Text 8"/>
+          <p:cNvPr id="1916595065" name="Text 8"/>
           <p:cNvSpPr/>
           <p:nvPr/>
         </p:nvSpPr>
@@ -5905,7 +9739,7 @@
       </p:sp>
       <p:graphicFrame>
         <p:nvGraphicFramePr>
-          <p:cNvPr id="1354929978" name="Table 0"/>
+          <p:cNvPr id="830728066" name="Table 0"/>
           <p:cNvGraphicFramePr>
             <a:graphicFrameLocks xmlns:a="http://schemas.openxmlformats.org/drawingml/2006/main" noGrp="1"/>
           </p:cNvGraphicFramePr>
@@ -6149,7 +9983,7 @@
                           <a:ea typeface="Calibri"/>
                           <a:cs typeface="Calibri"/>
                         </a:rPr>
-                        <a:t>[XX%]</a:t>
+                        <a:t>0.9600 (96%)</a:t>
                       </a:r>
                       <a:endParaRPr lang="en-US" sz="1100">
                         <a:latin typeface="Calibri"/>
@@ -6198,7 +10032,7 @@
                           <a:ea typeface="Calibri"/>
                           <a:cs typeface="Calibri"/>
                         </a:rPr>
-                        <a:t>[XX%]</a:t>
+                        <a:t>0.9467 (~95%)</a:t>
                       </a:r>
                       <a:endParaRPr lang="en-US" sz="1100">
                         <a:latin typeface="Calibri"/>
@@ -6298,7 +10132,7 @@
                           <a:ea typeface="Calibri"/>
                           <a:cs typeface="Calibri"/>
                         </a:rPr>
-                        <a:t>[XX]</a:t>
+                        <a:t>0.9599</a:t>
                       </a:r>
                       <a:endParaRPr lang="en-US" sz="1100">
                         <a:latin typeface="Calibri"/>
@@ -6347,7 +10181,7 @@
                           <a:ea typeface="Calibri"/>
                           <a:cs typeface="Calibri"/>
                         </a:rPr>
-                        <a:t>[XX]</a:t>
+                        <a:t>0.9466</a:t>
                       </a:r>
                       <a:endParaRPr lang="en-US" sz="1100">
                         <a:latin typeface="Calibri"/>
@@ -6447,7 +10281,7 @@
                           <a:ea typeface="Calibri"/>
                           <a:cs typeface="Calibri"/>
                         </a:rPr>
-                        <a:t>[XX]</a:t>
+                        <a:t>0.9982</a:t>
                       </a:r>
                       <a:endParaRPr lang="en-US" sz="1100">
                         <a:latin typeface="Calibri"/>
@@ -6496,7 +10330,7 @@
                           <a:ea typeface="Calibri"/>
                           <a:cs typeface="Calibri"/>
                         </a:rPr>
-                        <a:t>[XX]</a:t>
+                        <a:t>0.9913</a:t>
                       </a:r>
                       <a:endParaRPr lang="en-US" sz="1100">
                         <a:latin typeface="Calibri"/>
@@ -6596,7 +10430,7 @@
                           <a:ea typeface="Calibri"/>
                           <a:cs typeface="Calibri"/>
                         </a:rPr>
-                        <a:t>[XX ± XX]</a:t>
+                        <a:t>[0.8889 ± 0.0184]</a:t>
                       </a:r>
                       <a:endParaRPr lang="en-US" sz="1100">
                         <a:latin typeface="Calibri"/>
@@ -6645,7 +10479,7 @@
                           <a:ea typeface="Calibri"/>
                           <a:cs typeface="Calibri"/>
                         </a:rPr>
-                        <a:t>[XX ± XX]</a:t>
+                        <a:t>[0.8862 ± 0.0219]</a:t>
                       </a:r>
                       <a:endParaRPr lang="en-US" sz="1100">
                         <a:latin typeface="Calibri"/>
@@ -6684,44 +10518,7 @@
       </p:graphicFrame>
       <p:sp>
         <p:nvSpPr>
-          <p:cNvPr id="2045217982" name="Text 9"/>
-          <p:cNvSpPr/>
-          <p:nvPr/>
-        </p:nvSpPr>
-        <p:spPr bwMode="auto">
-          <a:xfrm>
-            <a:off x="457200" y="4160519"/>
-            <a:ext cx="4572000" cy="320040"/>
-          </a:xfrm>
-          <a:prstGeom prst="rect">
-            <a:avLst/>
-          </a:prstGeom>
-          <a:noFill/>
-          <a:ln/>
-        </p:spPr>
-        <p:txBody>
-          <a:bodyPr wrap="square" rtlCol="0" anchor="ctr"/>
-          <a:lstStyle/>
-          <a:p>
-            <a:pPr marL="0" indent="0">
-              <a:buNone/>
-              <a:defRPr/>
-            </a:pPr>
-            <a:r>
-              <a:rPr lang="en-US" sz="900" i="1">
-                <a:solidFill>
-                  <a:srgbClr val="64748B"/>
-                </a:solidFill>
-              </a:rPr>
-              <a:t>📌 Replace bracketed values with your actual notebook output before the pitch.</a:t>
-            </a:r>
-            <a:endParaRPr lang="en-US" sz="900"/>
-          </a:p>
-        </p:txBody>
-      </p:sp>
-      <p:sp>
-        <p:nvSpPr>
-          <p:cNvPr id="2043996173" name="Shape 10"/>
+          <p:cNvPr id="726676512" name="Shape 10"/>
           <p:cNvSpPr/>
           <p:nvPr/>
         </p:nvSpPr>
@@ -6753,7 +10550,7 @@
       </p:sp>
       <p:sp>
         <p:nvSpPr>
-          <p:cNvPr id="1347016598" name="Text 11"/>
+          <p:cNvPr id="1981293811" name="Text 11"/>
           <p:cNvSpPr/>
           <p:nvPr/>
         </p:nvSpPr>
@@ -6790,7 +10587,7 @@
       </p:sp>
       <p:sp>
         <p:nvSpPr>
-          <p:cNvPr id="769261337" name="Text 12"/>
+          <p:cNvPr id="681625235" name="Text 12"/>
           <p:cNvSpPr/>
           <p:nvPr/>
         </p:nvSpPr>
@@ -6842,7 +10639,7 @@
                   <a:srgbClr val="1E293B"/>
                 </a:solidFill>
               </a:rPr>
-              <a:t>XGBoost / RF [state which] outperforms on weighted F1</a:t>
+              <a:t>RF vs. XGBoost: RF outperforms XGBoost although only a minor difference</a:t>
             </a:r>
             <a:endParaRPr lang="en-US" sz="1050"/>
           </a:p>
@@ -6880,31 +10677,25 @@
                   <a:srgbClr val="1E293B"/>
                 </a:solidFill>
               </a:rPr>
-              <a:t>Fairness audit shows [consistent / some variance] across gender groups</a:t>
+              <a:t>Fairness audit shows slight variance across gender and bmi groups</a:t>
             </a:r>
             <a:endParaRPr lang="en-US" sz="1050"/>
           </a:p>
           <a:p>
-            <a:pPr marL="342900" indent="-342900">
-              <a:buSzPct val="100000"/>
-              <a:buChar char="•"/>
-              <a:defRPr/>
-            </a:pPr>
-            <a:r>
-              <a:rPr lang="en-US" sz="1050">
-                <a:solidFill>
-                  <a:srgbClr val="1E293B"/>
-                </a:solidFill>
-              </a:rPr>
-              <a:t>No BMI subgroup flagged for low sample size (&lt; 5 samples)</a:t>
-            </a:r>
-            <a:endParaRPr lang="en-US" sz="1050"/>
-          </a:p>
-        </p:txBody>
-      </p:sp>
-      <p:sp>
-        <p:nvSpPr>
-          <p:cNvPr id="2077109408" name="Text 13"/>
+            <a:pPr>
+              <a:defRPr/>
+            </a:pPr>
+            <a:endParaRPr lang="en-US" sz="1050">
+              <a:solidFill>
+                <a:srgbClr val="1E293B"/>
+              </a:solidFill>
+            </a:endParaRPr>
+          </a:p>
+        </p:txBody>
+      </p:sp>
+      <p:sp>
+        <p:nvSpPr>
+          <p:cNvPr id="155903396" name="Text 13"/>
           <p:cNvSpPr/>
           <p:nvPr/>
         </p:nvSpPr>
@@ -6940,25 +10731,6 @@
               <a:t>Both models achieve strong accuracy on a 3-class problem</a:t>
             </a:r>
             <a:endParaRPr lang="en-US" sz="1050"/>
-          </a:p>
-          <a:p>
-            <a:pPr>
-              <a:spcAft>
-                <a:spcPts val="500"/>
-              </a:spcAft>
-              <a:defRPr/>
-            </a:pPr>
-            <a:endParaRPr lang="en-US" sz="1050"/>
-          </a:p>
-          <a:p>
-            <a:pPr>
-              <a:defRPr/>
-            </a:pPr>
-            <a:endParaRPr lang="en-US" sz="1050">
-              <a:solidFill>
-                <a:srgbClr val="1E293B"/>
-              </a:solidFill>
-            </a:endParaRPr>
           </a:p>
         </p:txBody>
       </p:sp>
@@ -6978,9 +10750,9 @@
 </p:sld>
 </file>
 
-<file path=ppt/slides/slide7.xml><?xml version="1.0" encoding="utf-8"?>
+<file path=ppt/slides/slide9.xml><?xml version="1.0" encoding="utf-8"?>
 <p:sld xmlns:a="http://schemas.openxmlformats.org/drawingml/2006/main" xmlns:r="http://schemas.openxmlformats.org/officeDocument/2006/relationships" xmlns:p="http://schemas.openxmlformats.org/presentationml/2006/main" xmlns:m="http://schemas.openxmlformats.org/officeDocument/2006/math" xmlns:w="http://schemas.openxmlformats.org/wordprocessingml/2006/main" xmlns:mc="http://schemas.openxmlformats.org/markup-compatibility/2006" showMasterPhAnim="0" showMasterSp="1" show="1">
-  <p:cSld name="Slide 7">
+  <p:cSld name="Slide 3">
     <p:bg>
       <p:bgPr shadeToTitle="0">
         <a:solidFill>
@@ -7004,7 +10776,7 @@
       </p:grpSpPr>
       <p:sp>
         <p:nvSpPr>
-          <p:cNvPr id="158786083" name="Shape 0"/>
+          <p:cNvPr id="1109115743" name="Shape 0"/>
           <p:cNvSpPr/>
           <p:nvPr/>
         </p:nvSpPr>
@@ -7029,14 +10801,14 @@
       </p:sp>
       <p:sp>
         <p:nvSpPr>
-          <p:cNvPr id="1141051690" name="Shape 1"/>
+          <p:cNvPr id="770662110" name="Shape 1"/>
           <p:cNvSpPr/>
           <p:nvPr/>
         </p:nvSpPr>
         <p:spPr bwMode="auto">
           <a:xfrm>
             <a:off x="411480" y="118872"/>
-            <a:ext cx="347472" cy="347472"/>
+            <a:ext cx="347471" cy="347471"/>
           </a:xfrm>
           <a:prstGeom prst="rect">
             <a:avLst/>
@@ -7054,14 +10826,14 @@
       </p:sp>
       <p:sp>
         <p:nvSpPr>
-          <p:cNvPr id="494829963" name="Text 2"/>
+          <p:cNvPr id="1326845943" name="Text 2"/>
           <p:cNvSpPr/>
           <p:nvPr/>
         </p:nvSpPr>
         <p:spPr bwMode="auto">
           <a:xfrm>
             <a:off x="411480" y="118872"/>
-            <a:ext cx="347472" cy="347472"/>
+            <a:ext cx="347471" cy="347471"/>
           </a:xfrm>
           <a:prstGeom prst="rect">
             <a:avLst/>
@@ -7080,47 +10852,47 @@
             <a:r>
               <a:rPr lang="en-US" sz="1400" b="1">
                 <a:solidFill>
+                  <a:schemeClr val="bg1"/>
+                </a:solidFill>
+              </a:rPr>
+              <a:t>8</a:t>
+            </a:r>
+            <a:endParaRPr lang="en-US" sz="1400"/>
+          </a:p>
+        </p:txBody>
+      </p:sp>
+      <p:sp>
+        <p:nvSpPr>
+          <p:cNvPr id="10977023" name="Text 3"/>
+          <p:cNvSpPr/>
+          <p:nvPr/>
+        </p:nvSpPr>
+        <p:spPr bwMode="auto">
+          <a:xfrm>
+            <a:off x="868680" y="118872"/>
+            <a:ext cx="8046720" cy="347471"/>
+          </a:xfrm>
+          <a:prstGeom prst="rect">
+            <a:avLst/>
+          </a:prstGeom>
+          <a:noFill/>
+          <a:ln/>
+        </p:spPr>
+        <p:txBody>
+          <a:bodyPr wrap="square" lIns="0" tIns="0" rIns="0" bIns="0" rtlCol="0" anchor="ctr"/>
+          <a:lstStyle/>
+          <a:p>
+            <a:pPr marL="0" indent="0">
+              <a:buNone/>
+              <a:defRPr/>
+            </a:pPr>
+            <a:r>
+              <a:rPr lang="en-US" sz="1800" b="1">
+                <a:solidFill>
                   <a:srgbClr val="FFFFFF"/>
                 </a:solidFill>
               </a:rPr>
-              <a:t>6</a:t>
-            </a:r>
-            <a:endParaRPr lang="en-US" sz="1400"/>
-          </a:p>
-        </p:txBody>
-      </p:sp>
-      <p:sp>
-        <p:nvSpPr>
-          <p:cNvPr id="467851075" name="Text 3"/>
-          <p:cNvSpPr/>
-          <p:nvPr/>
-        </p:nvSpPr>
-        <p:spPr bwMode="auto">
-          <a:xfrm>
-            <a:off x="868680" y="118872"/>
-            <a:ext cx="8046720" cy="347472"/>
-          </a:xfrm>
-          <a:prstGeom prst="rect">
-            <a:avLst/>
-          </a:prstGeom>
-          <a:noFill/>
-          <a:ln/>
-        </p:spPr>
-        <p:txBody>
-          <a:bodyPr wrap="square" lIns="0" tIns="0" rIns="0" bIns="0" rtlCol="0" anchor="ctr"/>
-          <a:lstStyle/>
-          <a:p>
-            <a:pPr marL="0" indent="0">
-              <a:buNone/>
-              <a:defRPr/>
-            </a:pPr>
-            <a:r>
-              <a:rPr lang="en-US" sz="1800" b="1">
-                <a:solidFill>
-                  <a:srgbClr val="FFFFFF"/>
-                </a:solidFill>
-              </a:rPr>
-              <a:t>Discussion</a:t>
+              <a:t>RF vs. XGBoost</a:t>
             </a:r>
             <a:endParaRPr lang="en-US" sz="1800"/>
           </a:p>
@@ -7128,7 +10900,7 @@
       </p:sp>
       <p:sp>
         <p:nvSpPr>
-          <p:cNvPr id="2092388956" name="Shape 4"/>
+          <p:cNvPr id="685574843" name="Shape 4"/>
           <p:cNvSpPr/>
           <p:nvPr/>
         </p:nvSpPr>
@@ -7153,7 +10925,7 @@
       </p:sp>
       <p:sp>
         <p:nvSpPr>
-          <p:cNvPr id="934437762" name="Text 5"/>
+          <p:cNvPr id="1332556993" name="Text 5"/>
           <p:cNvSpPr/>
           <p:nvPr/>
         </p:nvSpPr>
@@ -7188,2372 +10960,28 @@
           </a:p>
         </p:txBody>
       </p:sp>
-      <p:sp>
-        <p:nvSpPr>
-          <p:cNvPr id="572563242" name="Text 6"/>
-          <p:cNvSpPr/>
-          <p:nvPr/>
-        </p:nvSpPr>
-        <p:spPr bwMode="auto">
-          <a:xfrm>
-            <a:off x="457200" y="713232"/>
-            <a:ext cx="8229600" cy="274320"/>
-          </a:xfrm>
-          <a:prstGeom prst="rect">
-            <a:avLst/>
-          </a:prstGeom>
-          <a:noFill/>
-          <a:ln/>
-        </p:spPr>
-        <p:txBody>
-          <a:bodyPr wrap="square" rtlCol="0" anchor="ctr"/>
-          <a:lstStyle/>
-          <a:p>
-            <a:pPr marL="0" indent="0">
-              <a:buNone/>
-              <a:defRPr/>
-            </a:pPr>
-            <a:r>
-              <a:rPr lang="en-US" sz="1000" i="1">
-                <a:solidFill>
-                  <a:srgbClr val="64748B"/>
-                </a:solidFill>
-              </a:rPr>
-              <a:t>Challenges encountered and how they were addressed</a:t>
-            </a:r>
-            <a:endParaRPr lang="en-US" sz="1000"/>
-          </a:p>
-        </p:txBody>
-      </p:sp>
-      <p:sp>
-        <p:nvSpPr>
-          <p:cNvPr id="1748191343" name="Shape 7"/>
-          <p:cNvSpPr/>
-          <p:nvPr/>
-        </p:nvSpPr>
-        <p:spPr bwMode="auto">
-          <a:xfrm>
-            <a:off x="320040" y="1005840"/>
-            <a:ext cx="4114800" cy="1737360"/>
-          </a:xfrm>
-          <a:prstGeom prst="rect">
-            <a:avLst/>
-          </a:prstGeom>
-          <a:solidFill>
-            <a:srgbClr val="E9F5F6"/>
-          </a:solidFill>
-          <a:ln w="12700">
-            <a:solidFill>
-              <a:srgbClr val="94D2BD"/>
-            </a:solidFill>
-            <a:prstDash val="solid"/>
-          </a:ln>
-          <a:effectLst>
-            <a:outerShdw blurRad="101600" dist="38100" dir="8100000" sx="100000" sy="100000" kx="0" ky="0" algn="bl" rotWithShape="0">
-              <a:srgbClr val="000000">
-                <a:alpha val="13000"/>
-              </a:srgbClr>
-            </a:outerShdw>
-          </a:effectLst>
-        </p:spPr>
-      </p:sp>
-      <p:sp>
-        <p:nvSpPr>
-          <p:cNvPr id="2143421808" name="Text 8"/>
-          <p:cNvSpPr/>
-          <p:nvPr/>
-        </p:nvSpPr>
-        <p:spPr bwMode="auto">
-          <a:xfrm>
-            <a:off x="320040" y="1097280"/>
-            <a:ext cx="640080" cy="502920"/>
-          </a:xfrm>
-          <a:prstGeom prst="rect">
-            <a:avLst/>
-          </a:prstGeom>
-          <a:noFill/>
-          <a:ln/>
-        </p:spPr>
-        <p:txBody>
-          <a:bodyPr wrap="square" rtlCol="0" anchor="ctr"/>
-          <a:lstStyle/>
-          <a:p>
-            <a:pPr marL="0" indent="0" algn="ctr">
-              <a:buNone/>
-              <a:defRPr/>
-            </a:pPr>
-            <a:r>
-              <a:rPr lang="en-US" sz="2200">
-                <a:solidFill>
-                  <a:srgbClr val="000000"/>
-                </a:solidFill>
-              </a:rPr>
-              <a:t>⚙️</a:t>
-            </a:r>
-            <a:endParaRPr lang="en-US" sz="2200"/>
-          </a:p>
-        </p:txBody>
-      </p:sp>
-      <p:sp>
-        <p:nvSpPr>
-          <p:cNvPr id="848549732" name="Text 9"/>
-          <p:cNvSpPr/>
-          <p:nvPr/>
-        </p:nvSpPr>
-        <p:spPr bwMode="auto">
-          <a:xfrm>
-            <a:off x="914400" y="1143000"/>
-            <a:ext cx="3383280" cy="320040"/>
-          </a:xfrm>
-          <a:prstGeom prst="rect">
-            <a:avLst/>
-          </a:prstGeom>
-          <a:noFill/>
-          <a:ln/>
-        </p:spPr>
-        <p:txBody>
-          <a:bodyPr wrap="square" rtlCol="0" anchor="ctr"/>
-          <a:lstStyle/>
-          <a:p>
-            <a:pPr marL="0" indent="0">
-              <a:buNone/>
-              <a:defRPr/>
-            </a:pPr>
-            <a:r>
-              <a:rPr lang="en-US" sz="1300" b="1">
-                <a:solidFill>
-                  <a:srgbClr val="0D1B2A"/>
-                </a:solidFill>
-              </a:rPr>
-              <a:t>Class Imbalance</a:t>
-            </a:r>
-            <a:endParaRPr lang="en-US" sz="1300"/>
-          </a:p>
-        </p:txBody>
-      </p:sp>
-      <p:sp>
-        <p:nvSpPr>
-          <p:cNvPr id="1012208565" name="Text 10"/>
-          <p:cNvSpPr/>
-          <p:nvPr/>
-        </p:nvSpPr>
-        <p:spPr bwMode="auto">
-          <a:xfrm>
-            <a:off x="457200" y="1517904"/>
-            <a:ext cx="3886200" cy="1097280"/>
-          </a:xfrm>
-          <a:prstGeom prst="rect">
-            <a:avLst/>
-          </a:prstGeom>
-          <a:noFill/>
-          <a:ln/>
-        </p:spPr>
-        <p:txBody>
-          <a:bodyPr wrap="square" rtlCol="0" anchor="t"/>
-          <a:lstStyle/>
-          <a:p>
-            <a:pPr marL="0" indent="0">
-              <a:buNone/>
-              <a:defRPr/>
-            </a:pPr>
-            <a:r>
-              <a:rPr lang="en-US" sz="1100">
-                <a:solidFill>
-                  <a:srgbClr val="1E293B"/>
-                </a:solidFill>
-              </a:rPr>
-              <a:t>The dataset had unequal representation across sleep disorder classes. Stratified splitting and weighted F1-score evaluation ensured fair model comparison.</a:t>
-            </a:r>
-            <a:endParaRPr lang="en-US" sz="1100"/>
-          </a:p>
-        </p:txBody>
-      </p:sp>
-      <p:sp>
-        <p:nvSpPr>
-          <p:cNvPr id="265409312" name="Shape 11"/>
-          <p:cNvSpPr/>
-          <p:nvPr/>
-        </p:nvSpPr>
-        <p:spPr bwMode="auto">
-          <a:xfrm>
-            <a:off x="4754880" y="1005840"/>
-            <a:ext cx="4114800" cy="1737360"/>
-          </a:xfrm>
-          <a:prstGeom prst="rect">
-            <a:avLst/>
-          </a:prstGeom>
-          <a:solidFill>
-            <a:srgbClr val="E9F5F6"/>
-          </a:solidFill>
-          <a:ln w="12700">
-            <a:solidFill>
-              <a:srgbClr val="94D2BD"/>
-            </a:solidFill>
-            <a:prstDash val="solid"/>
-          </a:ln>
-          <a:effectLst>
-            <a:outerShdw blurRad="101600" dist="38100" dir="8100000" sx="100000" sy="100000" kx="0" ky="0" algn="bl" rotWithShape="0">
-              <a:srgbClr val="000000">
-                <a:alpha val="13000"/>
-              </a:srgbClr>
-            </a:outerShdw>
-          </a:effectLst>
-        </p:spPr>
-      </p:sp>
-      <p:sp>
-        <p:nvSpPr>
-          <p:cNvPr id="1382676067" name="Text 12"/>
-          <p:cNvSpPr/>
-          <p:nvPr/>
-        </p:nvSpPr>
-        <p:spPr bwMode="auto">
-          <a:xfrm>
-            <a:off x="4754880" y="1097280"/>
-            <a:ext cx="640080" cy="502920"/>
-          </a:xfrm>
-          <a:prstGeom prst="rect">
-            <a:avLst/>
-          </a:prstGeom>
-          <a:noFill/>
-          <a:ln/>
-        </p:spPr>
-        <p:txBody>
-          <a:bodyPr wrap="square" rtlCol="0" anchor="ctr"/>
-          <a:lstStyle/>
-          <a:p>
-            <a:pPr marL="0" indent="0" algn="ctr">
-              <a:buNone/>
-              <a:defRPr/>
-            </a:pPr>
-            <a:r>
-              <a:rPr lang="en-US" sz="2200">
-                <a:solidFill>
-                  <a:srgbClr val="000000"/>
-                </a:solidFill>
-              </a:rPr>
-              <a:t>🔧</a:t>
-            </a:r>
-            <a:endParaRPr lang="en-US" sz="2200"/>
-          </a:p>
-        </p:txBody>
-      </p:sp>
-      <p:sp>
-        <p:nvSpPr>
-          <p:cNvPr id="1167080402" name="Text 13"/>
-          <p:cNvSpPr/>
-          <p:nvPr/>
-        </p:nvSpPr>
-        <p:spPr bwMode="auto">
-          <a:xfrm>
-            <a:off x="5349240" y="1143000"/>
-            <a:ext cx="3383280" cy="320040"/>
-          </a:xfrm>
-          <a:prstGeom prst="rect">
-            <a:avLst/>
-          </a:prstGeom>
-          <a:noFill/>
-          <a:ln/>
-        </p:spPr>
-        <p:txBody>
-          <a:bodyPr wrap="square" rtlCol="0" anchor="ctr"/>
-          <a:lstStyle/>
-          <a:p>
-            <a:pPr marL="0" indent="0">
-              <a:buNone/>
-              <a:defRPr/>
-            </a:pPr>
-            <a:r>
-              <a:rPr lang="en-US" sz="1300" b="1">
-                <a:solidFill>
-                  <a:srgbClr val="0D1B2A"/>
-                </a:solidFill>
-              </a:rPr>
-              <a:t>Feature Engineering</a:t>
-            </a:r>
-            <a:endParaRPr lang="en-US" sz="1300"/>
-          </a:p>
-        </p:txBody>
-      </p:sp>
-      <p:sp>
-        <p:nvSpPr>
-          <p:cNvPr id="105098279" name="Text 14"/>
-          <p:cNvSpPr/>
-          <p:nvPr/>
-        </p:nvSpPr>
-        <p:spPr bwMode="auto">
-          <a:xfrm>
-            <a:off x="4892039" y="1517904"/>
-            <a:ext cx="3886200" cy="1097280"/>
-          </a:xfrm>
-          <a:prstGeom prst="rect">
-            <a:avLst/>
-          </a:prstGeom>
-          <a:noFill/>
-          <a:ln/>
-        </p:spPr>
-        <p:txBody>
-          <a:bodyPr wrap="square" rtlCol="0" anchor="t"/>
-          <a:lstStyle/>
-          <a:p>
-            <a:pPr marL="0" indent="0">
-              <a:buNone/>
-              <a:defRPr/>
-            </a:pPr>
-            <a:r>
-              <a:rPr lang="en-US" sz="1100">
-                <a:solidFill>
-                  <a:srgbClr val="1E293B"/>
-                </a:solidFill>
-              </a:rPr>
-              <a:t>The Blood Pressure column was stored as a string (e.g., '120/80'). We parsed it into separate Systolic and Diastolic numerical features.</a:t>
-            </a:r>
-            <a:endParaRPr lang="en-US" sz="1100"/>
-          </a:p>
-        </p:txBody>
-      </p:sp>
-      <p:sp>
-        <p:nvSpPr>
-          <p:cNvPr id="833827226" name="Shape 15"/>
-          <p:cNvSpPr/>
-          <p:nvPr/>
-        </p:nvSpPr>
-        <p:spPr bwMode="auto">
-          <a:xfrm>
-            <a:off x="320040" y="2926080"/>
-            <a:ext cx="4114800" cy="1737360"/>
-          </a:xfrm>
-          <a:prstGeom prst="rect">
-            <a:avLst/>
-          </a:prstGeom>
-          <a:solidFill>
-            <a:srgbClr val="E9F5F6"/>
-          </a:solidFill>
-          <a:ln w="12700">
-            <a:solidFill>
-              <a:srgbClr val="94D2BD"/>
-            </a:solidFill>
-            <a:prstDash val="solid"/>
-          </a:ln>
-          <a:effectLst>
-            <a:outerShdw blurRad="101600" dist="38100" dir="8100000" sx="100000" sy="100000" kx="0" ky="0" algn="bl" rotWithShape="0">
-              <a:srgbClr val="000000">
-                <a:alpha val="13000"/>
-              </a:srgbClr>
-            </a:outerShdw>
-          </a:effectLst>
-        </p:spPr>
-      </p:sp>
-      <p:sp>
-        <p:nvSpPr>
-          <p:cNvPr id="567008886" name="Text 16"/>
-          <p:cNvSpPr/>
-          <p:nvPr/>
-        </p:nvSpPr>
-        <p:spPr bwMode="auto">
-          <a:xfrm>
-            <a:off x="320040" y="3017519"/>
-            <a:ext cx="640080" cy="502920"/>
-          </a:xfrm>
-          <a:prstGeom prst="rect">
-            <a:avLst/>
-          </a:prstGeom>
-          <a:noFill/>
-          <a:ln/>
-        </p:spPr>
-        <p:txBody>
-          <a:bodyPr wrap="square" rtlCol="0" anchor="ctr"/>
-          <a:lstStyle/>
-          <a:p>
-            <a:pPr marL="0" indent="0" algn="ctr">
-              <a:buNone/>
-              <a:defRPr/>
-            </a:pPr>
-            <a:r>
-              <a:rPr lang="en-US" sz="2200">
-                <a:solidFill>
-                  <a:srgbClr val="000000"/>
-                </a:solidFill>
-              </a:rPr>
-              <a:t>📊</a:t>
-            </a:r>
-            <a:endParaRPr lang="en-US" sz="2200"/>
-          </a:p>
-        </p:txBody>
-      </p:sp>
-      <p:sp>
-        <p:nvSpPr>
-          <p:cNvPr id="950604804" name="Text 17"/>
-          <p:cNvSpPr/>
-          <p:nvPr/>
-        </p:nvSpPr>
-        <p:spPr bwMode="auto">
-          <a:xfrm>
-            <a:off x="914400" y="3063240"/>
-            <a:ext cx="3383280" cy="320040"/>
-          </a:xfrm>
-          <a:prstGeom prst="rect">
-            <a:avLst/>
-          </a:prstGeom>
-          <a:noFill/>
-          <a:ln/>
-        </p:spPr>
-        <p:txBody>
-          <a:bodyPr wrap="square" rtlCol="0" anchor="ctr"/>
-          <a:lstStyle/>
-          <a:p>
-            <a:pPr marL="0" indent="0">
-              <a:buNone/>
-              <a:defRPr/>
-            </a:pPr>
-            <a:r>
-              <a:rPr lang="en-US" sz="1300" b="1">
-                <a:solidFill>
-                  <a:srgbClr val="0D1B2A"/>
-                </a:solidFill>
-              </a:rPr>
-              <a:t>Model Stability</a:t>
-            </a:r>
-            <a:endParaRPr lang="en-US" sz="1300"/>
-          </a:p>
-        </p:txBody>
-      </p:sp>
-      <p:sp>
-        <p:nvSpPr>
-          <p:cNvPr id="1153619600" name="Text 18"/>
-          <p:cNvSpPr/>
-          <p:nvPr/>
-        </p:nvSpPr>
-        <p:spPr bwMode="auto">
-          <a:xfrm>
-            <a:off x="457200" y="3438144"/>
-            <a:ext cx="3886200" cy="1097280"/>
-          </a:xfrm>
-          <a:prstGeom prst="rect">
-            <a:avLst/>
-          </a:prstGeom>
-          <a:noFill/>
-          <a:ln/>
-        </p:spPr>
-        <p:txBody>
-          <a:bodyPr wrap="square" rtlCol="0" anchor="t"/>
-          <a:lstStyle/>
-          <a:p>
-            <a:pPr marL="0" indent="0">
-              <a:buNone/>
-              <a:defRPr/>
-            </a:pPr>
-            <a:r>
-              <a:rPr lang="en-US" sz="1100">
-                <a:solidFill>
-                  <a:srgbClr val="1E293B"/>
-                </a:solidFill>
-              </a:rPr>
-              <a:t>5-fold cross-validation was used to detect overfitting and confirm that test-set performance was consistent with training trends.</a:t>
-            </a:r>
-            <a:endParaRPr lang="en-US" sz="1100"/>
-          </a:p>
-        </p:txBody>
-      </p:sp>
-      <p:sp>
-        <p:nvSpPr>
-          <p:cNvPr id="1290258533" name="Shape 19"/>
-          <p:cNvSpPr/>
-          <p:nvPr/>
-        </p:nvSpPr>
-        <p:spPr bwMode="auto">
-          <a:xfrm>
-            <a:off x="4754880" y="2926080"/>
-            <a:ext cx="4114800" cy="1737360"/>
-          </a:xfrm>
-          <a:prstGeom prst="rect">
-            <a:avLst/>
-          </a:prstGeom>
-          <a:solidFill>
-            <a:srgbClr val="E9F5F6"/>
-          </a:solidFill>
-          <a:ln w="12700">
-            <a:solidFill>
-              <a:srgbClr val="94D2BD"/>
-            </a:solidFill>
-            <a:prstDash val="solid"/>
-          </a:ln>
-          <a:effectLst>
-            <a:outerShdw blurRad="101600" dist="38100" dir="8100000" sx="100000" sy="100000" kx="0" ky="0" algn="bl" rotWithShape="0">
-              <a:srgbClr val="000000">
-                <a:alpha val="13000"/>
-              </a:srgbClr>
-            </a:outerShdw>
-          </a:effectLst>
-        </p:spPr>
-      </p:sp>
-      <p:sp>
-        <p:nvSpPr>
-          <p:cNvPr id="181707108" name="Text 20"/>
-          <p:cNvSpPr/>
-          <p:nvPr/>
-        </p:nvSpPr>
-        <p:spPr bwMode="auto">
-          <a:xfrm>
-            <a:off x="4754880" y="3017519"/>
-            <a:ext cx="640080" cy="502920"/>
-          </a:xfrm>
-          <a:prstGeom prst="rect">
-            <a:avLst/>
-          </a:prstGeom>
-          <a:noFill/>
-          <a:ln/>
-        </p:spPr>
-        <p:txBody>
-          <a:bodyPr wrap="square" rtlCol="0" anchor="ctr"/>
-          <a:lstStyle/>
-          <a:p>
-            <a:pPr marL="0" indent="0" algn="ctr">
-              <a:buNone/>
-              <a:defRPr/>
-            </a:pPr>
-            <a:r>
-              <a:rPr lang="en-US" sz="2200">
-                <a:solidFill>
-                  <a:srgbClr val="000000"/>
-                </a:solidFill>
-              </a:rPr>
-              <a:t>⚖️</a:t>
-            </a:r>
-            <a:endParaRPr lang="en-US" sz="2200"/>
-          </a:p>
-        </p:txBody>
-      </p:sp>
-      <p:sp>
-        <p:nvSpPr>
-          <p:cNvPr id="1579844691" name="Text 21"/>
-          <p:cNvSpPr/>
-          <p:nvPr/>
-        </p:nvSpPr>
-        <p:spPr bwMode="auto">
-          <a:xfrm>
-            <a:off x="5349240" y="3063240"/>
-            <a:ext cx="3383280" cy="320040"/>
-          </a:xfrm>
-          <a:prstGeom prst="rect">
-            <a:avLst/>
-          </a:prstGeom>
-          <a:noFill/>
-          <a:ln/>
-        </p:spPr>
-        <p:txBody>
-          <a:bodyPr wrap="square" rtlCol="0" anchor="ctr"/>
-          <a:lstStyle/>
-          <a:p>
-            <a:pPr marL="0" indent="0">
-              <a:buNone/>
-              <a:defRPr/>
-            </a:pPr>
-            <a:r>
-              <a:rPr lang="en-US" sz="1300" b="1">
-                <a:solidFill>
-                  <a:srgbClr val="0D1B2A"/>
-                </a:solidFill>
-              </a:rPr>
-              <a:t>Fairness Gaps</a:t>
-            </a:r>
-            <a:endParaRPr lang="en-US" sz="1300"/>
-          </a:p>
-        </p:txBody>
-      </p:sp>
-      <p:sp>
-        <p:nvSpPr>
-          <p:cNvPr id="1645509211" name="Text 22"/>
-          <p:cNvSpPr/>
-          <p:nvPr/>
-        </p:nvSpPr>
-        <p:spPr bwMode="auto">
-          <a:xfrm>
-            <a:off x="4892039" y="3438144"/>
-            <a:ext cx="3886200" cy="1097280"/>
-          </a:xfrm>
-          <a:prstGeom prst="rect">
-            <a:avLst/>
-          </a:prstGeom>
-          <a:noFill/>
-          <a:ln/>
-        </p:spPr>
-        <p:txBody>
-          <a:bodyPr wrap="square" rtlCol="0" anchor="t"/>
-          <a:lstStyle/>
-          <a:p>
-            <a:pPr marL="0" indent="0">
-              <a:buNone/>
-              <a:defRPr/>
-            </a:pPr>
-            <a:r>
-              <a:rPr lang="en-US" sz="1100">
-                <a:solidFill>
-                  <a:srgbClr val="1E293B"/>
-                </a:solidFill>
-              </a:rPr>
-              <a:t>Initial fairness audit revealed minor accuracy differences by BMI category. Groups with fewer than 5 samples were flagged and interpreted with caution.</a:t>
-            </a:r>
-            <a:endParaRPr lang="en-US" sz="1100"/>
-          </a:p>
-        </p:txBody>
-      </p:sp>
-    </p:spTree>
-  </p:cSld>
-  <p:clrMapOvr>
-    <a:masterClrMapping/>
-  </p:clrMapOvr>
-  <mc:AlternateContent xmlns:mc="http://schemas.openxmlformats.org/markup-compatibility/2006">
-    <mc:Choice xmlns:p159="http://schemas.microsoft.com/office/powerpoint/2015/09/main" xmlns:p14="http://schemas.microsoft.com/office/powerpoint/2010/main" Requires="p159">
-      <p:transition p14:dur="2000" advClick="1"/>
-    </mc:Choice>
-    <mc:Fallback>
-      <p:transition advClick="1"/>
-    </mc:Fallback>
-  </mc:AlternateContent>
-</p:sld>
-</file>
-
-<file path=ppt/slides/slide8.xml><?xml version="1.0" encoding="utf-8"?>
-<p:sld xmlns:a="http://schemas.openxmlformats.org/drawingml/2006/main" xmlns:r="http://schemas.openxmlformats.org/officeDocument/2006/relationships" xmlns:p="http://schemas.openxmlformats.org/presentationml/2006/main" xmlns:m="http://schemas.openxmlformats.org/officeDocument/2006/math" xmlns:w="http://schemas.openxmlformats.org/wordprocessingml/2006/main" xmlns:mc="http://schemas.openxmlformats.org/markup-compatibility/2006" showMasterPhAnim="0" showMasterSp="1" show="1">
-  <p:cSld name="Slide 8">
-    <p:bg>
-      <p:bgPr shadeToTitle="0">
-        <a:solidFill>
-          <a:srgbClr val="FFFFFF"/>
-        </a:solidFill>
-      </p:bgPr>
-    </p:bg>
-    <p:spTree>
-      <p:nvGrpSpPr>
-        <p:cNvPr id="1" name=""/>
-        <p:cNvGrpSpPr/>
-        <p:nvPr/>
-      </p:nvGrpSpPr>
-      <p:grpSpPr bwMode="auto">
-        <a:xfrm>
-          <a:off x="0" y="0"/>
-          <a:ext cx="0" cy="0"/>
-          <a:chOff x="0" y="0"/>
-          <a:chExt cx="0" cy="0"/>
-        </a:xfrm>
-      </p:grpSpPr>
-      <p:sp>
-        <p:nvSpPr>
-          <p:cNvPr id="2138355063" name="Shape 0"/>
-          <p:cNvSpPr/>
-          <p:nvPr/>
-        </p:nvSpPr>
-        <p:spPr bwMode="auto">
-          <a:xfrm>
-            <a:off x="0" y="0"/>
-            <a:ext cx="9144000" cy="658368"/>
-          </a:xfrm>
-          <a:prstGeom prst="rect">
-            <a:avLst/>
-          </a:prstGeom>
-          <a:solidFill>
-            <a:srgbClr val="0D1B2A"/>
-          </a:solidFill>
-          <a:ln w="12700">
-            <a:solidFill>
-              <a:srgbClr val="0D1B2A"/>
-            </a:solidFill>
-            <a:prstDash val="solid"/>
-          </a:ln>
-        </p:spPr>
-      </p:sp>
-      <p:sp>
-        <p:nvSpPr>
-          <p:cNvPr id="868012760" name="Shape 1"/>
-          <p:cNvSpPr/>
-          <p:nvPr/>
-        </p:nvSpPr>
-        <p:spPr bwMode="auto">
-          <a:xfrm>
-            <a:off x="411480" y="118872"/>
-            <a:ext cx="347472" cy="347472"/>
-          </a:xfrm>
-          <a:prstGeom prst="rect">
-            <a:avLst/>
-          </a:prstGeom>
-          <a:solidFill>
-            <a:srgbClr val="0A9396"/>
-          </a:solidFill>
-          <a:ln w="12700">
-            <a:solidFill>
-              <a:srgbClr val="0A9396"/>
-            </a:solidFill>
-            <a:prstDash val="solid"/>
-          </a:ln>
-        </p:spPr>
-      </p:sp>
-      <p:sp>
-        <p:nvSpPr>
-          <p:cNvPr id="261572427" name="Text 2"/>
-          <p:cNvSpPr/>
-          <p:nvPr/>
-        </p:nvSpPr>
-        <p:spPr bwMode="auto">
-          <a:xfrm>
-            <a:off x="411480" y="118872"/>
-            <a:ext cx="347472" cy="347472"/>
-          </a:xfrm>
-          <a:prstGeom prst="rect">
-            <a:avLst/>
-          </a:prstGeom>
-          <a:noFill/>
-          <a:ln/>
-        </p:spPr>
-        <p:txBody>
-          <a:bodyPr wrap="square" lIns="0" tIns="0" rIns="0" bIns="0" rtlCol="0" anchor="ctr"/>
-          <a:lstStyle/>
-          <a:p>
-            <a:pPr marL="0" indent="0" algn="ctr">
-              <a:buNone/>
-              <a:defRPr/>
-            </a:pPr>
-            <a:r>
-              <a:rPr lang="en-US" sz="1400" b="1">
-                <a:solidFill>
-                  <a:srgbClr val="FFFFFF"/>
-                </a:solidFill>
-              </a:rPr>
-              <a:t>7</a:t>
-            </a:r>
-            <a:endParaRPr lang="en-US" sz="1400"/>
-          </a:p>
-        </p:txBody>
-      </p:sp>
-      <p:sp>
-        <p:nvSpPr>
-          <p:cNvPr id="2140329689" name="Text 3"/>
-          <p:cNvSpPr/>
-          <p:nvPr/>
-        </p:nvSpPr>
-        <p:spPr bwMode="auto">
-          <a:xfrm>
-            <a:off x="868680" y="118872"/>
-            <a:ext cx="8046720" cy="347472"/>
-          </a:xfrm>
-          <a:prstGeom prst="rect">
-            <a:avLst/>
-          </a:prstGeom>
-          <a:noFill/>
-          <a:ln/>
-        </p:spPr>
-        <p:txBody>
-          <a:bodyPr wrap="square" lIns="0" tIns="0" rIns="0" bIns="0" rtlCol="0" anchor="ctr"/>
-          <a:lstStyle/>
-          <a:p>
-            <a:pPr marL="0" indent="0">
-              <a:buNone/>
-              <a:defRPr/>
-            </a:pPr>
-            <a:r>
-              <a:rPr lang="en-US" sz="1800" b="1">
-                <a:solidFill>
-                  <a:srgbClr val="FFFFFF"/>
-                </a:solidFill>
-              </a:rPr>
-              <a:t>Future Directions</a:t>
-            </a:r>
-            <a:endParaRPr lang="en-US" sz="1800"/>
-          </a:p>
-        </p:txBody>
-      </p:sp>
-      <p:sp>
-        <p:nvSpPr>
-          <p:cNvPr id="1739736377" name="Shape 4"/>
-          <p:cNvSpPr/>
-          <p:nvPr/>
-        </p:nvSpPr>
-        <p:spPr bwMode="auto">
-          <a:xfrm>
-            <a:off x="0" y="4937760"/>
-            <a:ext cx="9144000" cy="201168"/>
-          </a:xfrm>
-          <a:prstGeom prst="rect">
-            <a:avLst/>
-          </a:prstGeom>
-          <a:solidFill>
-            <a:srgbClr val="0A9396"/>
-          </a:solidFill>
-          <a:ln w="12700">
-            <a:solidFill>
-              <a:srgbClr val="0A9396"/>
-            </a:solidFill>
-            <a:prstDash val="solid"/>
-          </a:ln>
-        </p:spPr>
-      </p:sp>
-      <p:sp>
-        <p:nvSpPr>
-          <p:cNvPr id="1595089902" name="Text 5"/>
-          <p:cNvSpPr/>
-          <p:nvPr/>
-        </p:nvSpPr>
-        <p:spPr bwMode="auto">
-          <a:xfrm>
-            <a:off x="274320" y="4937760"/>
-            <a:ext cx="8595360" cy="201168"/>
-          </a:xfrm>
-          <a:prstGeom prst="rect">
-            <a:avLst/>
-          </a:prstGeom>
-          <a:noFill/>
-          <a:ln/>
-        </p:spPr>
-        <p:txBody>
-          <a:bodyPr wrap="square" lIns="0" tIns="0" rIns="0" bIns="0" rtlCol="0" anchor="ctr"/>
-          <a:lstStyle/>
-          <a:p>
-            <a:pPr marL="0" indent="0">
-              <a:buNone/>
-              <a:defRPr/>
-            </a:pPr>
-            <a:r>
-              <a:rPr lang="en-US" sz="800">
-                <a:solidFill>
-                  <a:srgbClr val="FFFFFF"/>
-                </a:solidFill>
-              </a:rPr>
-              <a:t>Sleep Disorder Classification  |  Final Project</a:t>
-            </a:r>
-            <a:endParaRPr lang="en-US" sz="800"/>
-          </a:p>
-        </p:txBody>
-      </p:sp>
-      <p:sp>
-        <p:nvSpPr>
-          <p:cNvPr id="1513542800" name="Text 6"/>
-          <p:cNvSpPr/>
-          <p:nvPr/>
-        </p:nvSpPr>
-        <p:spPr bwMode="auto">
-          <a:xfrm>
-            <a:off x="457200" y="713232"/>
-            <a:ext cx="8229600" cy="274320"/>
-          </a:xfrm>
-          <a:prstGeom prst="rect">
-            <a:avLst/>
-          </a:prstGeom>
-          <a:noFill/>
-          <a:ln/>
-        </p:spPr>
-        <p:txBody>
-          <a:bodyPr wrap="square" rtlCol="0" anchor="ctr"/>
-          <a:lstStyle/>
-          <a:p>
-            <a:pPr marL="0" indent="0">
-              <a:buNone/>
-              <a:defRPr/>
-            </a:pPr>
-            <a:r>
-              <a:rPr lang="en-US" sz="1000" i="1">
-                <a:solidFill>
-                  <a:srgbClr val="64748B"/>
-                </a:solidFill>
-              </a:rPr>
-              <a:t>Key areas for improvement and lessons learned</a:t>
-            </a:r>
-            <a:endParaRPr lang="en-US" sz="1000"/>
-          </a:p>
-        </p:txBody>
-      </p:sp>
-      <p:sp>
-        <p:nvSpPr>
-          <p:cNvPr id="245111205" name="Shape 7"/>
-          <p:cNvSpPr/>
-          <p:nvPr/>
-        </p:nvSpPr>
-        <p:spPr bwMode="auto">
-          <a:xfrm>
-            <a:off x="457200" y="2441448"/>
-            <a:ext cx="8229600" cy="45720"/>
-          </a:xfrm>
-          <a:prstGeom prst="rect">
-            <a:avLst/>
-          </a:prstGeom>
-          <a:solidFill>
-            <a:srgbClr val="94D2BD"/>
-          </a:solidFill>
-          <a:ln w="12700">
-            <a:solidFill>
-              <a:srgbClr val="94D2BD"/>
-            </a:solidFill>
-            <a:prstDash val="solid"/>
-          </a:ln>
-        </p:spPr>
-      </p:sp>
-      <p:sp>
-        <p:nvSpPr>
-          <p:cNvPr id="157129858" name="Shape 8"/>
-          <p:cNvSpPr/>
-          <p:nvPr/>
-        </p:nvSpPr>
-        <p:spPr bwMode="auto">
-          <a:xfrm>
-            <a:off x="960120" y="2304288"/>
-            <a:ext cx="228600" cy="228600"/>
-          </a:xfrm>
-          <a:prstGeom prst="ellipse">
-            <a:avLst/>
-          </a:prstGeom>
-          <a:solidFill>
-            <a:srgbClr val="0A9396"/>
-          </a:solidFill>
-          <a:ln w="12700">
-            <a:solidFill>
-              <a:srgbClr val="0A9396"/>
-            </a:solidFill>
-            <a:prstDash val="solid"/>
-          </a:ln>
-        </p:spPr>
-      </p:sp>
-      <p:sp>
-        <p:nvSpPr>
-          <p:cNvPr id="306872544" name="Shape 9"/>
-          <p:cNvSpPr/>
-          <p:nvPr/>
-        </p:nvSpPr>
-        <p:spPr bwMode="auto">
-          <a:xfrm>
-            <a:off x="530352" y="960120"/>
-            <a:ext cx="1508759" cy="1371600"/>
-          </a:xfrm>
-          <a:prstGeom prst="rect">
-            <a:avLst/>
-          </a:prstGeom>
-          <a:solidFill>
-            <a:srgbClr val="0D1B2A"/>
-          </a:solidFill>
-          <a:ln w="12700">
-            <a:solidFill>
-              <a:srgbClr val="0A9396"/>
-            </a:solidFill>
-            <a:prstDash val="solid"/>
-          </a:ln>
-          <a:effectLst>
-            <a:outerShdw blurRad="101600" dist="38100" dir="8100000" sx="100000" sy="100000" kx="0" ky="0" algn="bl" rotWithShape="0">
-              <a:srgbClr val="000000">
-                <a:alpha val="13000"/>
-              </a:srgbClr>
-            </a:outerShdw>
-          </a:effectLst>
-        </p:spPr>
-      </p:sp>
-      <p:sp>
-        <p:nvSpPr>
-          <p:cNvPr id="734511268" name="Text 10"/>
-          <p:cNvSpPr/>
-          <p:nvPr/>
-        </p:nvSpPr>
-        <p:spPr bwMode="auto">
-          <a:xfrm>
-            <a:off x="576072" y="1051560"/>
-            <a:ext cx="1417320" cy="347472"/>
-          </a:xfrm>
-          <a:prstGeom prst="rect">
-            <a:avLst/>
-          </a:prstGeom>
-          <a:noFill/>
-          <a:ln/>
-        </p:spPr>
-        <p:txBody>
-          <a:bodyPr wrap="square" rtlCol="0" anchor="ctr"/>
-          <a:lstStyle/>
-          <a:p>
-            <a:pPr marL="0" indent="0" algn="ctr">
-              <a:buNone/>
-              <a:defRPr/>
-            </a:pPr>
-            <a:r>
-              <a:rPr lang="en-US" sz="1100" b="1">
-                <a:solidFill>
-                  <a:srgbClr val="94D2BD"/>
-                </a:solidFill>
-              </a:rPr>
-              <a:t>Larger Dataset</a:t>
-            </a:r>
-            <a:endParaRPr lang="en-US" sz="1100"/>
-          </a:p>
-        </p:txBody>
-      </p:sp>
-      <p:sp>
-        <p:nvSpPr>
-          <p:cNvPr id="1125563741" name="Text 11"/>
-          <p:cNvSpPr/>
-          <p:nvPr/>
-        </p:nvSpPr>
-        <p:spPr bwMode="auto">
-          <a:xfrm>
-            <a:off x="576072" y="1417320"/>
-            <a:ext cx="1417320" cy="822960"/>
-          </a:xfrm>
-          <a:prstGeom prst="rect">
-            <a:avLst/>
-          </a:prstGeom>
-          <a:noFill/>
-          <a:ln/>
-        </p:spPr>
-        <p:txBody>
-          <a:bodyPr wrap="square" rtlCol="0" anchor="t"/>
-          <a:lstStyle/>
-          <a:p>
-            <a:pPr marL="0" indent="0" algn="ctr">
-              <a:buNone/>
-              <a:defRPr/>
-            </a:pPr>
-            <a:r>
-              <a:rPr lang="en-US" sz="900">
-                <a:solidFill>
-                  <a:srgbClr val="FFFFFF"/>
-                </a:solidFill>
-              </a:rPr>
-              <a:t>Collect or augment with PSG or wearable sensor data to improve generalizability and reduce demographic sampling gaps.</a:t>
-            </a:r>
-            <a:endParaRPr lang="en-US" sz="900"/>
-          </a:p>
-        </p:txBody>
-      </p:sp>
-      <p:sp>
-        <p:nvSpPr>
-          <p:cNvPr id="41270282" name="Shape 12"/>
-          <p:cNvSpPr/>
-          <p:nvPr/>
-        </p:nvSpPr>
-        <p:spPr bwMode="auto">
-          <a:xfrm>
-            <a:off x="1051560" y="2331720"/>
-            <a:ext cx="36576" cy="109728"/>
-          </a:xfrm>
-          <a:prstGeom prst="rect">
-            <a:avLst/>
-          </a:prstGeom>
-          <a:solidFill>
-            <a:srgbClr val="94D2BD"/>
-          </a:solidFill>
-          <a:ln w="12700">
-            <a:solidFill>
-              <a:srgbClr val="94D2BD"/>
-            </a:solidFill>
-            <a:prstDash val="solid"/>
-          </a:ln>
-        </p:spPr>
-      </p:sp>
-      <p:sp>
-        <p:nvSpPr>
-          <p:cNvPr id="1453480213" name="Shape 13"/>
-          <p:cNvSpPr/>
-          <p:nvPr/>
-        </p:nvSpPr>
-        <p:spPr bwMode="auto">
-          <a:xfrm>
-            <a:off x="2624328" y="2304288"/>
-            <a:ext cx="228600" cy="228600"/>
-          </a:xfrm>
-          <a:prstGeom prst="ellipse">
-            <a:avLst/>
-          </a:prstGeom>
-          <a:solidFill>
-            <a:srgbClr val="0A9396"/>
-          </a:solidFill>
-          <a:ln w="12700">
-            <a:solidFill>
-              <a:srgbClr val="0A9396"/>
-            </a:solidFill>
-            <a:prstDash val="solid"/>
-          </a:ln>
-        </p:spPr>
-      </p:sp>
-      <p:sp>
-        <p:nvSpPr>
-          <p:cNvPr id="1811450932" name="Shape 14"/>
-          <p:cNvSpPr/>
-          <p:nvPr/>
-        </p:nvSpPr>
-        <p:spPr bwMode="auto">
-          <a:xfrm>
-            <a:off x="2194560" y="2834640"/>
-            <a:ext cx="1508759" cy="1417320"/>
-          </a:xfrm>
-          <a:prstGeom prst="rect">
-            <a:avLst/>
-          </a:prstGeom>
-          <a:solidFill>
-            <a:srgbClr val="0D1B2A"/>
-          </a:solidFill>
-          <a:ln w="12700">
-            <a:solidFill>
-              <a:srgbClr val="0A9396"/>
-            </a:solidFill>
-            <a:prstDash val="solid"/>
-          </a:ln>
-          <a:effectLst>
-            <a:outerShdw blurRad="101600" dist="38100" dir="8100000" sx="100000" sy="100000" kx="0" ky="0" algn="bl" rotWithShape="0">
-              <a:srgbClr val="000000">
-                <a:alpha val="13000"/>
-              </a:srgbClr>
-            </a:outerShdw>
-          </a:effectLst>
-        </p:spPr>
-      </p:sp>
-      <p:sp>
-        <p:nvSpPr>
-          <p:cNvPr id="1840547865" name="Text 15"/>
-          <p:cNvSpPr/>
-          <p:nvPr/>
-        </p:nvSpPr>
-        <p:spPr bwMode="auto">
-          <a:xfrm>
-            <a:off x="2240280" y="2926080"/>
-            <a:ext cx="1417320" cy="347472"/>
-          </a:xfrm>
-          <a:prstGeom prst="rect">
-            <a:avLst/>
-          </a:prstGeom>
-          <a:noFill/>
-          <a:ln/>
-        </p:spPr>
-        <p:txBody>
-          <a:bodyPr wrap="square" rtlCol="0" anchor="ctr"/>
-          <a:lstStyle/>
-          <a:p>
-            <a:pPr marL="0" indent="0" algn="ctr">
-              <a:buNone/>
-              <a:defRPr/>
-            </a:pPr>
-            <a:r>
-              <a:rPr lang="en-US" sz="1100" b="1">
-                <a:solidFill>
-                  <a:srgbClr val="94D2BD"/>
-                </a:solidFill>
-              </a:rPr>
-              <a:t>Deep Learning</a:t>
-            </a:r>
-            <a:endParaRPr lang="en-US" sz="1100"/>
-          </a:p>
-        </p:txBody>
-      </p:sp>
-      <p:sp>
-        <p:nvSpPr>
-          <p:cNvPr id="1860794750" name="Text 16"/>
-          <p:cNvSpPr/>
-          <p:nvPr/>
-        </p:nvSpPr>
-        <p:spPr bwMode="auto">
-          <a:xfrm>
-            <a:off x="2240280" y="3291840"/>
-            <a:ext cx="1417320" cy="868680"/>
-          </a:xfrm>
-          <a:prstGeom prst="rect">
-            <a:avLst/>
-          </a:prstGeom>
-          <a:noFill/>
-          <a:ln/>
-        </p:spPr>
-        <p:txBody>
-          <a:bodyPr wrap="square" rtlCol="0" anchor="t"/>
-          <a:lstStyle/>
-          <a:p>
-            <a:pPr marL="0" indent="0" algn="ctr">
-              <a:buNone/>
-              <a:defRPr/>
-            </a:pPr>
-            <a:r>
-              <a:rPr lang="en-US" sz="900">
-                <a:solidFill>
-                  <a:srgbClr val="FFFFFF"/>
-                </a:solidFill>
-              </a:rPr>
-              <a:t>Explore LSTM or Transformer models if time-series sleep metrics (e.g., nightly wearable data) become available.</a:t>
-            </a:r>
-            <a:endParaRPr lang="en-US" sz="900"/>
-          </a:p>
-        </p:txBody>
-      </p:sp>
-      <p:sp>
-        <p:nvSpPr>
-          <p:cNvPr id="1017836507" name="Shape 17"/>
-          <p:cNvSpPr/>
-          <p:nvPr/>
-        </p:nvSpPr>
-        <p:spPr bwMode="auto">
-          <a:xfrm>
-            <a:off x="2715768" y="2624328"/>
-            <a:ext cx="36576" cy="210312"/>
-          </a:xfrm>
-          <a:prstGeom prst="rect">
-            <a:avLst/>
-          </a:prstGeom>
-          <a:solidFill>
-            <a:srgbClr val="94D2BD"/>
-          </a:solidFill>
-          <a:ln w="12700">
-            <a:solidFill>
-              <a:srgbClr val="94D2BD"/>
-            </a:solidFill>
-            <a:prstDash val="solid"/>
-          </a:ln>
-        </p:spPr>
-      </p:sp>
-      <p:sp>
-        <p:nvSpPr>
-          <p:cNvPr id="1285900593" name="Shape 18"/>
-          <p:cNvSpPr/>
-          <p:nvPr/>
-        </p:nvSpPr>
-        <p:spPr bwMode="auto">
-          <a:xfrm>
-            <a:off x="4288536" y="2304288"/>
-            <a:ext cx="228600" cy="228600"/>
-          </a:xfrm>
-          <a:prstGeom prst="ellipse">
-            <a:avLst/>
-          </a:prstGeom>
-          <a:solidFill>
-            <a:srgbClr val="0A9396"/>
-          </a:solidFill>
-          <a:ln w="12700">
-            <a:solidFill>
-              <a:srgbClr val="0A9396"/>
-            </a:solidFill>
-            <a:prstDash val="solid"/>
-          </a:ln>
-        </p:spPr>
-      </p:sp>
-      <p:sp>
-        <p:nvSpPr>
-          <p:cNvPr id="803311975" name="Shape 19"/>
-          <p:cNvSpPr/>
-          <p:nvPr/>
-        </p:nvSpPr>
-        <p:spPr bwMode="auto">
-          <a:xfrm>
-            <a:off x="3858768" y="960120"/>
-            <a:ext cx="1508759" cy="1371600"/>
-          </a:xfrm>
-          <a:prstGeom prst="rect">
-            <a:avLst/>
-          </a:prstGeom>
-          <a:solidFill>
-            <a:srgbClr val="0D1B2A"/>
-          </a:solidFill>
-          <a:ln w="12700">
-            <a:solidFill>
-              <a:srgbClr val="0A9396"/>
-            </a:solidFill>
-            <a:prstDash val="solid"/>
-          </a:ln>
-          <a:effectLst>
-            <a:outerShdw blurRad="101600" dist="38100" dir="8100000" sx="100000" sy="100000" kx="0" ky="0" algn="bl" rotWithShape="0">
-              <a:srgbClr val="000000">
-                <a:alpha val="13000"/>
-              </a:srgbClr>
-            </a:outerShdw>
-          </a:effectLst>
-        </p:spPr>
-      </p:sp>
-      <p:sp>
-        <p:nvSpPr>
-          <p:cNvPr id="985377094" name="Text 20"/>
-          <p:cNvSpPr/>
-          <p:nvPr/>
-        </p:nvSpPr>
-        <p:spPr bwMode="auto">
-          <a:xfrm>
-            <a:off x="3904488" y="1051560"/>
-            <a:ext cx="1417320" cy="347472"/>
-          </a:xfrm>
-          <a:prstGeom prst="rect">
-            <a:avLst/>
-          </a:prstGeom>
-          <a:noFill/>
-          <a:ln/>
-        </p:spPr>
-        <p:txBody>
-          <a:bodyPr wrap="square" rtlCol="0" anchor="ctr"/>
-          <a:lstStyle/>
-          <a:p>
-            <a:pPr marL="0" indent="0" algn="ctr">
-              <a:buNone/>
-              <a:defRPr/>
-            </a:pPr>
-            <a:r>
-              <a:rPr lang="en-US" sz="1100" b="1">
-                <a:solidFill>
-                  <a:srgbClr val="94D2BD"/>
-                </a:solidFill>
-              </a:rPr>
-              <a:t>Hyperparameter Tuning</a:t>
-            </a:r>
-            <a:endParaRPr lang="en-US" sz="1100"/>
-          </a:p>
-        </p:txBody>
-      </p:sp>
-      <p:sp>
-        <p:nvSpPr>
-          <p:cNvPr id="436922429" name="Text 21"/>
-          <p:cNvSpPr/>
-          <p:nvPr/>
-        </p:nvSpPr>
-        <p:spPr bwMode="auto">
-          <a:xfrm>
-            <a:off x="3904488" y="1417320"/>
-            <a:ext cx="1417320" cy="822960"/>
-          </a:xfrm>
-          <a:prstGeom prst="rect">
-            <a:avLst/>
-          </a:prstGeom>
-          <a:noFill/>
-          <a:ln/>
-        </p:spPr>
-        <p:txBody>
-          <a:bodyPr wrap="square" rtlCol="0" anchor="t"/>
-          <a:lstStyle/>
-          <a:p>
-            <a:pPr marL="0" indent="0" algn="ctr">
-              <a:buNone/>
-              <a:defRPr/>
-            </a:pPr>
-            <a:r>
-              <a:rPr lang="en-US" sz="900">
-                <a:solidFill>
-                  <a:srgbClr val="FFFFFF"/>
-                </a:solidFill>
-              </a:rPr>
-              <a:t>Apply Bayesian optimization or Optuna for more principled model selection beyond default parameters.</a:t>
-            </a:r>
-            <a:endParaRPr lang="en-US" sz="900"/>
-          </a:p>
-        </p:txBody>
-      </p:sp>
-      <p:sp>
-        <p:nvSpPr>
-          <p:cNvPr id="1192422768" name="Shape 22"/>
-          <p:cNvSpPr/>
-          <p:nvPr/>
-        </p:nvSpPr>
-        <p:spPr bwMode="auto">
-          <a:xfrm>
-            <a:off x="4379976" y="2331720"/>
-            <a:ext cx="36576" cy="109728"/>
-          </a:xfrm>
-          <a:prstGeom prst="rect">
-            <a:avLst/>
-          </a:prstGeom>
-          <a:solidFill>
-            <a:srgbClr val="94D2BD"/>
-          </a:solidFill>
-          <a:ln w="12700">
-            <a:solidFill>
-              <a:srgbClr val="94D2BD"/>
-            </a:solidFill>
-            <a:prstDash val="solid"/>
-          </a:ln>
-        </p:spPr>
-      </p:sp>
-      <p:sp>
-        <p:nvSpPr>
-          <p:cNvPr id="1442328544" name="Shape 23"/>
-          <p:cNvSpPr/>
-          <p:nvPr/>
-        </p:nvSpPr>
-        <p:spPr bwMode="auto">
-          <a:xfrm>
-            <a:off x="5952744" y="2304288"/>
-            <a:ext cx="228600" cy="228600"/>
-          </a:xfrm>
-          <a:prstGeom prst="ellipse">
-            <a:avLst/>
-          </a:prstGeom>
-          <a:solidFill>
-            <a:srgbClr val="0A9396"/>
-          </a:solidFill>
-          <a:ln w="12700">
-            <a:solidFill>
-              <a:srgbClr val="0A9396"/>
-            </a:solidFill>
-            <a:prstDash val="solid"/>
-          </a:ln>
-        </p:spPr>
-      </p:sp>
-      <p:sp>
-        <p:nvSpPr>
-          <p:cNvPr id="924727592" name="Shape 24"/>
-          <p:cNvSpPr/>
-          <p:nvPr/>
-        </p:nvSpPr>
-        <p:spPr bwMode="auto">
-          <a:xfrm>
-            <a:off x="5522976" y="2834640"/>
-            <a:ext cx="1508759" cy="1417320"/>
-          </a:xfrm>
-          <a:prstGeom prst="rect">
-            <a:avLst/>
-          </a:prstGeom>
-          <a:solidFill>
-            <a:srgbClr val="0D1B2A"/>
-          </a:solidFill>
-          <a:ln w="12700">
-            <a:solidFill>
-              <a:srgbClr val="0A9396"/>
-            </a:solidFill>
-            <a:prstDash val="solid"/>
-          </a:ln>
-          <a:effectLst>
-            <a:outerShdw blurRad="101600" dist="38100" dir="8100000" sx="100000" sy="100000" kx="0" ky="0" algn="bl" rotWithShape="0">
-              <a:srgbClr val="000000">
-                <a:alpha val="13000"/>
-              </a:srgbClr>
-            </a:outerShdw>
-          </a:effectLst>
-        </p:spPr>
-      </p:sp>
-      <p:sp>
-        <p:nvSpPr>
-          <p:cNvPr id="2087289713" name="Text 25"/>
-          <p:cNvSpPr/>
-          <p:nvPr/>
-        </p:nvSpPr>
-        <p:spPr bwMode="auto">
-          <a:xfrm>
-            <a:off x="5568696" y="2926080"/>
-            <a:ext cx="1417320" cy="347472"/>
-          </a:xfrm>
-          <a:prstGeom prst="rect">
-            <a:avLst/>
-          </a:prstGeom>
-          <a:noFill/>
-          <a:ln/>
-        </p:spPr>
-        <p:txBody>
-          <a:bodyPr wrap="square" rtlCol="0" anchor="ctr"/>
-          <a:lstStyle/>
-          <a:p>
-            <a:pPr marL="0" indent="0" algn="ctr">
-              <a:buNone/>
-              <a:defRPr/>
-            </a:pPr>
-            <a:r>
-              <a:rPr lang="en-US" sz="1100" b="1">
-                <a:solidFill>
-                  <a:srgbClr val="94D2BD"/>
-                </a:solidFill>
-              </a:rPr>
-              <a:t>Explainability</a:t>
-            </a:r>
-            <a:endParaRPr lang="en-US" sz="1100"/>
-          </a:p>
-        </p:txBody>
-      </p:sp>
-      <p:sp>
-        <p:nvSpPr>
-          <p:cNvPr id="664261746" name="Text 26"/>
-          <p:cNvSpPr/>
-          <p:nvPr/>
-        </p:nvSpPr>
-        <p:spPr bwMode="auto">
-          <a:xfrm>
-            <a:off x="5568696" y="3291840"/>
-            <a:ext cx="1417320" cy="868680"/>
-          </a:xfrm>
-          <a:prstGeom prst="rect">
-            <a:avLst/>
-          </a:prstGeom>
-          <a:noFill/>
-          <a:ln/>
-        </p:spPr>
-        <p:txBody>
-          <a:bodyPr wrap="square" rtlCol="0" anchor="t"/>
-          <a:lstStyle/>
-          <a:p>
-            <a:pPr marL="0" indent="0" algn="ctr">
-              <a:buNone/>
-              <a:defRPr/>
-            </a:pPr>
-            <a:r>
-              <a:rPr lang="en-US" sz="900">
-                <a:solidFill>
-                  <a:srgbClr val="FFFFFF"/>
-                </a:solidFill>
-              </a:rPr>
-              <a:t>Integrate SHAP values for per-patient explanations — critical for clinical adoption and regulatory requirements.</a:t>
-            </a:r>
-            <a:endParaRPr lang="en-US" sz="900"/>
-          </a:p>
-        </p:txBody>
-      </p:sp>
-      <p:sp>
-        <p:nvSpPr>
-          <p:cNvPr id="126335364" name="Shape 27"/>
-          <p:cNvSpPr/>
-          <p:nvPr/>
-        </p:nvSpPr>
-        <p:spPr bwMode="auto">
-          <a:xfrm>
-            <a:off x="6044184" y="2624328"/>
-            <a:ext cx="36576" cy="210312"/>
-          </a:xfrm>
-          <a:prstGeom prst="rect">
-            <a:avLst/>
-          </a:prstGeom>
-          <a:solidFill>
-            <a:srgbClr val="94D2BD"/>
-          </a:solidFill>
-          <a:ln w="12700">
-            <a:solidFill>
-              <a:srgbClr val="94D2BD"/>
-            </a:solidFill>
-            <a:prstDash val="solid"/>
-          </a:ln>
-        </p:spPr>
-      </p:sp>
-      <p:sp>
-        <p:nvSpPr>
-          <p:cNvPr id="1922032739" name="Shape 28"/>
-          <p:cNvSpPr/>
-          <p:nvPr/>
-        </p:nvSpPr>
-        <p:spPr bwMode="auto">
-          <a:xfrm>
-            <a:off x="7616952" y="2304288"/>
-            <a:ext cx="228600" cy="228600"/>
-          </a:xfrm>
-          <a:prstGeom prst="ellipse">
-            <a:avLst/>
-          </a:prstGeom>
-          <a:solidFill>
-            <a:srgbClr val="0A9396"/>
-          </a:solidFill>
-          <a:ln w="12700">
-            <a:solidFill>
-              <a:srgbClr val="0A9396"/>
-            </a:solidFill>
-            <a:prstDash val="solid"/>
-          </a:ln>
-        </p:spPr>
-      </p:sp>
-      <p:sp>
-        <p:nvSpPr>
-          <p:cNvPr id="1504631233" name="Shape 29"/>
-          <p:cNvSpPr/>
-          <p:nvPr/>
-        </p:nvSpPr>
-        <p:spPr bwMode="auto">
-          <a:xfrm>
-            <a:off x="7187184" y="960120"/>
-            <a:ext cx="1508759" cy="1371600"/>
-          </a:xfrm>
-          <a:prstGeom prst="rect">
-            <a:avLst/>
-          </a:prstGeom>
-          <a:solidFill>
-            <a:srgbClr val="0D1B2A"/>
-          </a:solidFill>
-          <a:ln w="12700">
-            <a:solidFill>
-              <a:srgbClr val="0A9396"/>
-            </a:solidFill>
-            <a:prstDash val="solid"/>
-          </a:ln>
-          <a:effectLst>
-            <a:outerShdw blurRad="101600" dist="38100" dir="8100000" sx="100000" sy="100000" kx="0" ky="0" algn="bl" rotWithShape="0">
-              <a:srgbClr val="000000">
-                <a:alpha val="13000"/>
-              </a:srgbClr>
-            </a:outerShdw>
-          </a:effectLst>
-        </p:spPr>
-      </p:sp>
-      <p:sp>
-        <p:nvSpPr>
-          <p:cNvPr id="457305209" name="Text 30"/>
-          <p:cNvSpPr/>
-          <p:nvPr/>
-        </p:nvSpPr>
-        <p:spPr bwMode="auto">
-          <a:xfrm>
-            <a:off x="7232904" y="1051560"/>
-            <a:ext cx="1417320" cy="347472"/>
-          </a:xfrm>
-          <a:prstGeom prst="rect">
-            <a:avLst/>
-          </a:prstGeom>
-          <a:noFill/>
-          <a:ln/>
-        </p:spPr>
-        <p:txBody>
-          <a:bodyPr wrap="square" rtlCol="0" anchor="ctr"/>
-          <a:lstStyle/>
-          <a:p>
-            <a:pPr marL="0" indent="0" algn="ctr">
-              <a:buNone/>
-              <a:defRPr/>
-            </a:pPr>
-            <a:r>
-              <a:rPr lang="en-US" sz="1100" b="1">
-                <a:solidFill>
-                  <a:srgbClr val="94D2BD"/>
-                </a:solidFill>
-              </a:rPr>
-              <a:t>Real-World Deployment</a:t>
-            </a:r>
-            <a:endParaRPr lang="en-US" sz="1100"/>
-          </a:p>
-        </p:txBody>
-      </p:sp>
-      <p:sp>
-        <p:nvSpPr>
-          <p:cNvPr id="1213963306" name="Text 31"/>
-          <p:cNvSpPr/>
-          <p:nvPr/>
-        </p:nvSpPr>
-        <p:spPr bwMode="auto">
-          <a:xfrm>
-            <a:off x="7232904" y="1417320"/>
-            <a:ext cx="1417320" cy="822960"/>
-          </a:xfrm>
-          <a:prstGeom prst="rect">
-            <a:avLst/>
-          </a:prstGeom>
-          <a:noFill/>
-          <a:ln/>
-        </p:spPr>
-        <p:txBody>
-          <a:bodyPr wrap="square" rtlCol="0" anchor="t"/>
-          <a:lstStyle/>
-          <a:p>
-            <a:pPr marL="0" indent="0" algn="ctr">
-              <a:buNone/>
-              <a:defRPr/>
-            </a:pPr>
-            <a:r>
-              <a:rPr lang="en-US" sz="900">
-                <a:solidFill>
-                  <a:srgbClr val="FFFFFF"/>
-                </a:solidFill>
-              </a:rPr>
-              <a:t>Wrap the best model in a clinical screening tool with a user-facing interface and continuous model monitoring.</a:t>
-            </a:r>
-            <a:endParaRPr lang="en-US" sz="900"/>
-          </a:p>
-        </p:txBody>
-      </p:sp>
-      <p:sp>
-        <p:nvSpPr>
-          <p:cNvPr id="481929949" name="Shape 32"/>
-          <p:cNvSpPr/>
-          <p:nvPr/>
-        </p:nvSpPr>
-        <p:spPr bwMode="auto">
-          <a:xfrm>
-            <a:off x="7708392" y="2331720"/>
-            <a:ext cx="36576" cy="109728"/>
-          </a:xfrm>
-          <a:prstGeom prst="rect">
-            <a:avLst/>
-          </a:prstGeom>
-          <a:solidFill>
-            <a:srgbClr val="94D2BD"/>
-          </a:solidFill>
-          <a:ln w="12700">
-            <a:solidFill>
-              <a:srgbClr val="94D2BD"/>
-            </a:solidFill>
-            <a:prstDash val="solid"/>
-          </a:ln>
-        </p:spPr>
-      </p:sp>
-    </p:spTree>
-  </p:cSld>
-  <p:clrMapOvr>
-    <a:masterClrMapping/>
-  </p:clrMapOvr>
-  <mc:AlternateContent xmlns:mc="http://schemas.openxmlformats.org/markup-compatibility/2006">
-    <mc:Choice xmlns:p159="http://schemas.microsoft.com/office/powerpoint/2015/09/main" xmlns:p14="http://schemas.microsoft.com/office/powerpoint/2010/main" Requires="p159">
-      <p:transition p14:dur="2000" advClick="1"/>
-    </mc:Choice>
-    <mc:Fallback>
-      <p:transition advClick="1"/>
-    </mc:Fallback>
-  </mc:AlternateContent>
-</p:sld>
-</file>
-
-<file path=ppt/slides/slide9.xml><?xml version="1.0" encoding="utf-8"?>
-<p:sld xmlns:a="http://schemas.openxmlformats.org/drawingml/2006/main" xmlns:r="http://schemas.openxmlformats.org/officeDocument/2006/relationships" xmlns:p="http://schemas.openxmlformats.org/presentationml/2006/main" xmlns:m="http://schemas.openxmlformats.org/officeDocument/2006/math" xmlns:w="http://schemas.openxmlformats.org/wordprocessingml/2006/main" xmlns:mc="http://schemas.openxmlformats.org/markup-compatibility/2006" showMasterPhAnim="0" showMasterSp="1" show="1">
-  <p:cSld name="Slide 9">
-    <p:bg>
-      <p:bgPr shadeToTitle="0">
-        <a:solidFill>
-          <a:srgbClr val="0D1B2A"/>
-        </a:solidFill>
-      </p:bgPr>
-    </p:bg>
-    <p:spTree>
-      <p:nvGrpSpPr>
-        <p:cNvPr id="1" name=""/>
-        <p:cNvGrpSpPr/>
-        <p:nvPr/>
-      </p:nvGrpSpPr>
-      <p:grpSpPr bwMode="auto">
-        <a:xfrm>
-          <a:off x="0" y="0"/>
-          <a:ext cx="0" cy="0"/>
-          <a:chOff x="0" y="0"/>
-          <a:chExt cx="0" cy="0"/>
-        </a:xfrm>
-      </p:grpSpPr>
-      <p:sp>
-        <p:nvSpPr>
-          <p:cNvPr id="352862553" name="Shape 0"/>
-          <p:cNvSpPr/>
-          <p:nvPr/>
-        </p:nvSpPr>
-        <p:spPr bwMode="auto">
-          <a:xfrm>
-            <a:off x="0" y="0"/>
-            <a:ext cx="228600" cy="5143500"/>
-          </a:xfrm>
-          <a:prstGeom prst="rect">
-            <a:avLst/>
-          </a:prstGeom>
-          <a:solidFill>
-            <a:srgbClr val="0A9396"/>
-          </a:solidFill>
-          <a:ln w="12700">
-            <a:solidFill>
-              <a:srgbClr val="0A9396"/>
-            </a:solidFill>
-            <a:prstDash val="solid"/>
-          </a:ln>
-        </p:spPr>
-      </p:sp>
-      <p:sp>
-        <p:nvSpPr>
-          <p:cNvPr id="2030793285" name="Shape 1"/>
-          <p:cNvSpPr/>
-          <p:nvPr/>
-        </p:nvSpPr>
-        <p:spPr bwMode="auto">
-          <a:xfrm>
-            <a:off x="6858000" y="-457200"/>
-            <a:ext cx="2743200" cy="2743200"/>
-          </a:xfrm>
-          <a:prstGeom prst="ellipse">
-            <a:avLst/>
-          </a:prstGeom>
-          <a:solidFill>
-            <a:srgbClr val="0A9396">
-              <a:alpha val="15000"/>
-            </a:srgbClr>
-          </a:solidFill>
-          <a:ln w="12700">
-            <a:solidFill>
-              <a:srgbClr val="0A9396">
-                <a:alpha val="15000"/>
-              </a:srgbClr>
-            </a:solidFill>
-            <a:prstDash val="solid"/>
-          </a:ln>
-        </p:spPr>
-      </p:sp>
-      <p:sp>
-        <p:nvSpPr>
-          <p:cNvPr id="43154043" name="Shape 2"/>
-          <p:cNvSpPr/>
-          <p:nvPr/>
-        </p:nvSpPr>
-        <p:spPr bwMode="auto">
-          <a:xfrm>
-            <a:off x="7498080" y="3200400"/>
-            <a:ext cx="1645920" cy="1645920"/>
-          </a:xfrm>
-          <a:prstGeom prst="ellipse">
-            <a:avLst/>
-          </a:prstGeom>
-          <a:solidFill>
-            <a:srgbClr val="94D2BD">
-              <a:alpha val="20000"/>
-            </a:srgbClr>
-          </a:solidFill>
-          <a:ln w="12700">
-            <a:solidFill>
-              <a:srgbClr val="94D2BD">
-                <a:alpha val="20000"/>
-              </a:srgbClr>
-            </a:solidFill>
-            <a:prstDash val="solid"/>
-          </a:ln>
-        </p:spPr>
-      </p:sp>
-      <p:sp>
-        <p:nvSpPr>
-          <p:cNvPr id="16139102" name="Text 3"/>
-          <p:cNvSpPr/>
-          <p:nvPr/>
-        </p:nvSpPr>
-        <p:spPr bwMode="auto">
-          <a:xfrm>
-            <a:off x="502920" y="274320"/>
-            <a:ext cx="411480" cy="411480"/>
-          </a:xfrm>
-          <a:prstGeom prst="rect">
-            <a:avLst/>
-          </a:prstGeom>
-          <a:noFill/>
-          <a:ln/>
-        </p:spPr>
-        <p:txBody>
-          <a:bodyPr wrap="square" rtlCol="0" anchor="ctr"/>
-          <a:lstStyle/>
-          <a:p>
-            <a:pPr marL="0" indent="0" algn="ctr">
-              <a:buNone/>
-              <a:defRPr/>
-            </a:pPr>
-            <a:r>
-              <a:rPr lang="en-US" sz="1800" b="1">
-                <a:solidFill>
-                  <a:srgbClr val="FFFFFF"/>
-                </a:solidFill>
-              </a:rPr>
-              <a:t>8</a:t>
-            </a:r>
-            <a:endParaRPr lang="en-US" sz="1800"/>
-          </a:p>
-        </p:txBody>
-      </p:sp>
-      <p:sp>
-        <p:nvSpPr>
-          <p:cNvPr id="93980372" name="Shape 4"/>
-          <p:cNvSpPr/>
-          <p:nvPr/>
-        </p:nvSpPr>
-        <p:spPr bwMode="auto">
-          <a:xfrm>
-            <a:off x="502920" y="274320"/>
-            <a:ext cx="411480" cy="411480"/>
-          </a:xfrm>
-          <a:prstGeom prst="rect">
-            <a:avLst/>
-          </a:prstGeom>
-          <a:solidFill>
-            <a:srgbClr val="0A9396"/>
-          </a:solidFill>
-          <a:ln w="12700">
-            <a:solidFill>
-              <a:srgbClr val="0A9396"/>
-            </a:solidFill>
-            <a:prstDash val="solid"/>
-          </a:ln>
-        </p:spPr>
-      </p:sp>
-      <p:sp>
-        <p:nvSpPr>
-          <p:cNvPr id="989999393" name="Text 5"/>
-          <p:cNvSpPr/>
-          <p:nvPr/>
-        </p:nvSpPr>
-        <p:spPr bwMode="auto">
-          <a:xfrm>
-            <a:off x="502920" y="274320"/>
-            <a:ext cx="411480" cy="411480"/>
-          </a:xfrm>
-          <a:prstGeom prst="rect">
-            <a:avLst/>
-          </a:prstGeom>
-          <a:noFill/>
-          <a:ln/>
-        </p:spPr>
-        <p:txBody>
-          <a:bodyPr wrap="square" lIns="0" tIns="0" rIns="0" bIns="0" rtlCol="0" anchor="ctr"/>
-          <a:lstStyle/>
-          <a:p>
-            <a:pPr marL="0" indent="0" algn="ctr">
-              <a:buNone/>
-              <a:defRPr/>
-            </a:pPr>
-            <a:r>
-              <a:rPr lang="en-US" sz="1600" b="1">
-                <a:solidFill>
-                  <a:srgbClr val="FFFFFF"/>
-                </a:solidFill>
-              </a:rPr>
-              <a:t>8</a:t>
-            </a:r>
-            <a:endParaRPr lang="en-US" sz="1600"/>
-          </a:p>
-        </p:txBody>
-      </p:sp>
-      <p:sp>
-        <p:nvSpPr>
-          <p:cNvPr id="1985808841" name="Text 6"/>
-          <p:cNvSpPr/>
-          <p:nvPr/>
-        </p:nvSpPr>
-        <p:spPr bwMode="auto">
-          <a:xfrm>
-            <a:off x="1210291" y="274320"/>
-            <a:ext cx="5486400" cy="548640"/>
-          </a:xfrm>
-          <a:prstGeom prst="rect">
-            <a:avLst/>
-          </a:prstGeom>
-          <a:noFill/>
-          <a:ln/>
-        </p:spPr>
-        <p:txBody>
-          <a:bodyPr wrap="square" rtlCol="0" anchor="ctr"/>
-          <a:lstStyle/>
-          <a:p>
-            <a:pPr marL="0" indent="0">
-              <a:buNone/>
-              <a:defRPr/>
-            </a:pPr>
-            <a:r>
-              <a:rPr lang="en-US" sz="3000" b="1">
-                <a:solidFill>
-                  <a:srgbClr val="FFFFFF"/>
-                </a:solidFill>
-              </a:rPr>
-              <a:t>Conclusion</a:t>
-            </a:r>
-            <a:endParaRPr lang="en-US" sz="3000"/>
-          </a:p>
-        </p:txBody>
-      </p:sp>
-      <p:sp>
-        <p:nvSpPr>
-          <p:cNvPr id="1714598216" name="Shape 7"/>
-          <p:cNvSpPr/>
-          <p:nvPr/>
-        </p:nvSpPr>
-        <p:spPr bwMode="auto">
-          <a:xfrm>
-            <a:off x="502920" y="960120"/>
-            <a:ext cx="8046720" cy="1051560"/>
-          </a:xfrm>
-          <a:prstGeom prst="rect">
-            <a:avLst/>
-          </a:prstGeom>
-          <a:solidFill>
-            <a:srgbClr val="122636"/>
-          </a:solidFill>
-          <a:ln w="12700">
-            <a:solidFill>
-              <a:srgbClr val="0A9396"/>
-            </a:solidFill>
-            <a:prstDash val="solid"/>
-          </a:ln>
-          <a:effectLst>
-            <a:outerShdw blurRad="101600" dist="38100" dir="8100000" sx="100000" sy="100000" kx="0" ky="0" algn="bl" rotWithShape="0">
-              <a:srgbClr val="000000">
-                <a:alpha val="13000"/>
-              </a:srgbClr>
-            </a:outerShdw>
-          </a:effectLst>
-        </p:spPr>
-      </p:sp>
-      <p:sp>
-        <p:nvSpPr>
-          <p:cNvPr id="583791541" name="Shape 8"/>
-          <p:cNvSpPr/>
-          <p:nvPr/>
-        </p:nvSpPr>
-        <p:spPr bwMode="auto">
-          <a:xfrm>
-            <a:off x="502920" y="960120"/>
-            <a:ext cx="91440" cy="1051560"/>
-          </a:xfrm>
-          <a:prstGeom prst="rect">
-            <a:avLst/>
-          </a:prstGeom>
-          <a:solidFill>
-            <a:srgbClr val="0A9396"/>
-          </a:solidFill>
-          <a:ln w="12700">
-            <a:solidFill>
-              <a:srgbClr val="0A9396"/>
-            </a:solidFill>
-            <a:prstDash val="solid"/>
-          </a:ln>
-        </p:spPr>
-      </p:sp>
-      <p:sp>
-        <p:nvSpPr>
-          <p:cNvPr id="1773198451" name="Text 9"/>
-          <p:cNvSpPr/>
-          <p:nvPr/>
-        </p:nvSpPr>
-        <p:spPr bwMode="auto">
-          <a:xfrm>
-            <a:off x="731520" y="1051560"/>
-            <a:ext cx="7589520" cy="274320"/>
-          </a:xfrm>
-          <a:prstGeom prst="rect">
-            <a:avLst/>
-          </a:prstGeom>
-          <a:noFill/>
-          <a:ln/>
-        </p:spPr>
-        <p:txBody>
-          <a:bodyPr wrap="square" rtlCol="0" anchor="ctr"/>
-          <a:lstStyle/>
-          <a:p>
-            <a:pPr marL="0" indent="0">
-              <a:buNone/>
-              <a:defRPr/>
-            </a:pPr>
-            <a:r>
-              <a:rPr lang="en-US" sz="1300" b="1">
-                <a:solidFill>
-                  <a:srgbClr val="94D2BD"/>
-                </a:solidFill>
-              </a:rPr>
-              <a:t>What Was Built</a:t>
-            </a:r>
-            <a:endParaRPr lang="en-US" sz="1300"/>
-          </a:p>
-        </p:txBody>
-      </p:sp>
-      <p:sp>
-        <p:nvSpPr>
-          <p:cNvPr id="1406313438" name="Text 10"/>
-          <p:cNvSpPr/>
-          <p:nvPr/>
-        </p:nvSpPr>
-        <p:spPr bwMode="auto">
-          <a:xfrm>
-            <a:off x="731520" y="1362455"/>
-            <a:ext cx="7589520" cy="566928"/>
-          </a:xfrm>
-          <a:prstGeom prst="rect">
-            <a:avLst/>
-          </a:prstGeom>
-          <a:noFill/>
-          <a:ln/>
-        </p:spPr>
-        <p:txBody>
-          <a:bodyPr wrap="square" rtlCol="0" anchor="t"/>
-          <a:lstStyle/>
-          <a:p>
-            <a:pPr marL="0" indent="0">
-              <a:buNone/>
-              <a:defRPr/>
-            </a:pPr>
-            <a:r>
-              <a:rPr lang="en-US" sz="1100">
-                <a:solidFill>
-                  <a:srgbClr val="FFFFFF"/>
-                </a:solidFill>
-              </a:rPr>
-              <a:t>A 3-class sleep disorder classifier using Random Forest and XGBoost on real-world lifestyle data. This achieved high accuracy with minimal preprocessing.</a:t>
-            </a:r>
-            <a:endParaRPr lang="en-US" sz="1100"/>
-          </a:p>
-        </p:txBody>
-      </p:sp>
-      <p:sp>
-        <p:nvSpPr>
-          <p:cNvPr id="1150891295" name="Shape 11"/>
-          <p:cNvSpPr/>
-          <p:nvPr/>
-        </p:nvSpPr>
-        <p:spPr bwMode="auto">
-          <a:xfrm>
-            <a:off x="502920" y="2194560"/>
-            <a:ext cx="8046720" cy="1051560"/>
-          </a:xfrm>
-          <a:prstGeom prst="rect">
-            <a:avLst/>
-          </a:prstGeom>
-          <a:solidFill>
-            <a:srgbClr val="122636"/>
-          </a:solidFill>
-          <a:ln w="12700">
-            <a:solidFill>
-              <a:srgbClr val="0A9396"/>
-            </a:solidFill>
-            <a:prstDash val="solid"/>
-          </a:ln>
-          <a:effectLst>
-            <a:outerShdw blurRad="101600" dist="38100" dir="8100000" sx="100000" sy="100000" kx="0" ky="0" algn="bl" rotWithShape="0">
-              <a:srgbClr val="000000">
-                <a:alpha val="13000"/>
-              </a:srgbClr>
-            </a:outerShdw>
-          </a:effectLst>
-        </p:spPr>
-      </p:sp>
-      <p:sp>
-        <p:nvSpPr>
-          <p:cNvPr id="884622454" name="Shape 12"/>
-          <p:cNvSpPr/>
-          <p:nvPr/>
-        </p:nvSpPr>
-        <p:spPr bwMode="auto">
-          <a:xfrm>
-            <a:off x="502920" y="2194560"/>
-            <a:ext cx="91440" cy="1051560"/>
-          </a:xfrm>
-          <a:prstGeom prst="rect">
-            <a:avLst/>
-          </a:prstGeom>
-          <a:solidFill>
-            <a:srgbClr val="0A9396"/>
-          </a:solidFill>
-          <a:ln w="12700">
-            <a:solidFill>
-              <a:srgbClr val="0A9396"/>
-            </a:solidFill>
-            <a:prstDash val="solid"/>
-          </a:ln>
-        </p:spPr>
-      </p:sp>
-      <p:sp>
-        <p:nvSpPr>
-          <p:cNvPr id="311230864" name="Text 13"/>
-          <p:cNvSpPr/>
-          <p:nvPr/>
-        </p:nvSpPr>
-        <p:spPr bwMode="auto">
-          <a:xfrm>
-            <a:off x="731520" y="2286000"/>
-            <a:ext cx="7589520" cy="274320"/>
-          </a:xfrm>
-          <a:prstGeom prst="rect">
-            <a:avLst/>
-          </a:prstGeom>
-          <a:noFill/>
-          <a:ln/>
-        </p:spPr>
-        <p:txBody>
-          <a:bodyPr wrap="square" rtlCol="0" anchor="ctr"/>
-          <a:lstStyle/>
-          <a:p>
-            <a:pPr marL="0" indent="0">
-              <a:buNone/>
-              <a:defRPr/>
-            </a:pPr>
-            <a:r>
-              <a:rPr lang="en-US" sz="1300" b="1">
-                <a:solidFill>
-                  <a:srgbClr val="94D2BD"/>
-                </a:solidFill>
-              </a:rPr>
-              <a:t>What We Learned</a:t>
-            </a:r>
-            <a:endParaRPr lang="en-US" sz="1300"/>
-          </a:p>
-        </p:txBody>
-      </p:sp>
-      <p:sp>
-        <p:nvSpPr>
-          <p:cNvPr id="1824223401" name="Text 14"/>
-          <p:cNvSpPr/>
-          <p:nvPr/>
-        </p:nvSpPr>
-        <p:spPr bwMode="auto">
-          <a:xfrm>
-            <a:off x="731520" y="2596896"/>
-            <a:ext cx="7589520" cy="566928"/>
-          </a:xfrm>
-          <a:prstGeom prst="rect">
-            <a:avLst/>
-          </a:prstGeom>
-          <a:noFill/>
-          <a:ln/>
-        </p:spPr>
-        <p:txBody>
-          <a:bodyPr wrap="square" rtlCol="0" anchor="t"/>
-          <a:lstStyle/>
-          <a:p>
-            <a:pPr marL="0" indent="0">
-              <a:buNone/>
-              <a:defRPr/>
-            </a:pPr>
-            <a:r>
-              <a:rPr lang="en-US" sz="1100">
-                <a:solidFill>
-                  <a:srgbClr val="FFFFFF"/>
-                </a:solidFill>
-              </a:rPr>
-              <a:t>Tree-based models are effective and interpretable for tabular health data. Feature engineering (BP parsing) and stratified splits were key to reliable results.</a:t>
-            </a:r>
-            <a:endParaRPr lang="en-US" sz="1100"/>
-          </a:p>
-        </p:txBody>
-      </p:sp>
-      <p:sp>
-        <p:nvSpPr>
-          <p:cNvPr id="9686235" name="Shape 15"/>
-          <p:cNvSpPr/>
-          <p:nvPr/>
-        </p:nvSpPr>
-        <p:spPr bwMode="auto">
-          <a:xfrm>
-            <a:off x="502920" y="3429000"/>
-            <a:ext cx="8046720" cy="1051560"/>
-          </a:xfrm>
-          <a:prstGeom prst="rect">
-            <a:avLst/>
-          </a:prstGeom>
-          <a:solidFill>
-            <a:srgbClr val="122636"/>
-          </a:solidFill>
-          <a:ln w="12700">
-            <a:solidFill>
-              <a:srgbClr val="0A9396"/>
-            </a:solidFill>
-            <a:prstDash val="solid"/>
-          </a:ln>
-          <a:effectLst>
-            <a:outerShdw blurRad="101600" dist="38100" dir="8100000" sx="100000" sy="100000" kx="0" ky="0" algn="bl" rotWithShape="0">
-              <a:srgbClr val="000000">
-                <a:alpha val="13000"/>
-              </a:srgbClr>
-            </a:outerShdw>
-          </a:effectLst>
-        </p:spPr>
-      </p:sp>
-      <p:sp>
-        <p:nvSpPr>
-          <p:cNvPr id="1631170308" name="Shape 16"/>
-          <p:cNvSpPr/>
-          <p:nvPr/>
-        </p:nvSpPr>
-        <p:spPr bwMode="auto">
-          <a:xfrm>
-            <a:off x="502920" y="3429000"/>
-            <a:ext cx="91440" cy="1051560"/>
-          </a:xfrm>
-          <a:prstGeom prst="rect">
-            <a:avLst/>
-          </a:prstGeom>
-          <a:solidFill>
-            <a:srgbClr val="0A9396"/>
-          </a:solidFill>
-          <a:ln w="12700">
-            <a:solidFill>
-              <a:srgbClr val="0A9396"/>
-            </a:solidFill>
-            <a:prstDash val="solid"/>
-          </a:ln>
-        </p:spPr>
-      </p:sp>
-      <p:sp>
-        <p:nvSpPr>
-          <p:cNvPr id="709040516" name="Text 17"/>
-          <p:cNvSpPr/>
-          <p:nvPr/>
-        </p:nvSpPr>
-        <p:spPr bwMode="auto">
-          <a:xfrm>
-            <a:off x="731520" y="3520440"/>
-            <a:ext cx="7589520" cy="274320"/>
-          </a:xfrm>
-          <a:prstGeom prst="rect">
-            <a:avLst/>
-          </a:prstGeom>
-          <a:noFill/>
-          <a:ln/>
-        </p:spPr>
-        <p:txBody>
-          <a:bodyPr wrap="square" rtlCol="0" anchor="ctr"/>
-          <a:lstStyle/>
-          <a:p>
-            <a:pPr marL="0" indent="0">
-              <a:buNone/>
-              <a:defRPr/>
-            </a:pPr>
-            <a:r>
-              <a:rPr lang="en-US" sz="1300" b="1">
-                <a:solidFill>
-                  <a:srgbClr val="94D2BD"/>
-                </a:solidFill>
-              </a:rPr>
-              <a:t>Broader Impact</a:t>
-            </a:r>
-            <a:endParaRPr lang="en-US" sz="1300"/>
-          </a:p>
-        </p:txBody>
-      </p:sp>
-      <p:sp>
-        <p:nvSpPr>
-          <p:cNvPr id="1915204061" name="Text 18"/>
-          <p:cNvSpPr/>
-          <p:nvPr/>
-        </p:nvSpPr>
-        <p:spPr bwMode="auto">
-          <a:xfrm>
-            <a:off x="731520" y="3831336"/>
-            <a:ext cx="7589520" cy="566928"/>
-          </a:xfrm>
-          <a:prstGeom prst="rect">
-            <a:avLst/>
-          </a:prstGeom>
-          <a:noFill/>
-          <a:ln/>
-        </p:spPr>
-        <p:txBody>
-          <a:bodyPr wrap="square" rtlCol="0" anchor="t"/>
-          <a:lstStyle/>
-          <a:p>
-            <a:pPr marL="0" indent="0">
-              <a:buNone/>
-              <a:defRPr/>
-            </a:pPr>
-            <a:r>
-              <a:rPr lang="en-US" sz="1100">
-                <a:solidFill>
-                  <a:srgbClr val="FFFFFF"/>
-                </a:solidFill>
-              </a:rPr>
-              <a:t>Fairness auditing ensures equitable predictions across gender and BMI groups, a necessary step for any real clinical screening tool.</a:t>
-            </a:r>
-            <a:endParaRPr lang="en-US" sz="1100"/>
-          </a:p>
-        </p:txBody>
-      </p:sp>
-      <p:sp>
-        <p:nvSpPr>
-          <p:cNvPr id="1006061792" name="Text 19"/>
-          <p:cNvSpPr/>
-          <p:nvPr/>
-        </p:nvSpPr>
-        <p:spPr bwMode="auto">
-          <a:xfrm>
-            <a:off x="502920" y="4663440"/>
-            <a:ext cx="8229600" cy="320040"/>
-          </a:xfrm>
-          <a:prstGeom prst="rect">
-            <a:avLst/>
-          </a:prstGeom>
-          <a:noFill/>
-          <a:ln/>
-        </p:spPr>
-        <p:txBody>
-          <a:bodyPr wrap="square" rtlCol="0" anchor="ctr"/>
-          <a:lstStyle/>
-          <a:p>
-            <a:pPr marL="0" indent="0" algn="ctr">
-              <a:buNone/>
-              <a:defRPr/>
-            </a:pPr>
-            <a:r>
-              <a:rPr lang="en-US" sz="1200" i="1">
-                <a:solidFill>
-                  <a:srgbClr val="64748B"/>
-                </a:solidFill>
-              </a:rPr>
-              <a:t>Thank you  •  Questions welcome</a:t>
-            </a:r>
-            <a:endParaRPr lang="en-US" sz="1200"/>
-          </a:p>
-        </p:txBody>
-      </p:sp>
+      <p:pic>
+        <p:nvPicPr>
+          <p:cNvPr id="714395842" name=""/>
+          <p:cNvPicPr>
+            <a:picLocks noChangeAspect="1"/>
+          </p:cNvPicPr>
+          <p:nvPr/>
+        </p:nvPicPr>
+        <p:blipFill rotWithShape="1">
+          <a:blip r:embed="rId3"/>
+          <a:stretch/>
+        </p:blipFill>
+        <p:spPr bwMode="auto">
+          <a:xfrm flipH="0" flipV="0">
+            <a:off x="1125087" y="658368"/>
+            <a:ext cx="6893825" cy="4273390"/>
+          </a:xfrm>
+          <a:prstGeom prst="rect">
+            <a:avLst/>
+          </a:prstGeom>
+        </p:spPr>
+      </p:pic>
     </p:spTree>
   </p:cSld>
   <p:clrMapOvr>
